--- a/問題集/問41-45.pptx
+++ b/問題集/問41-45.pptx
@@ -109,7 +109,6704 @@
       </a:defRPr>
     </a:lvl9pPr>
   </p:defaultTextStyle>
+  <p:extLst>
+    <p:ext uri="{EFAFB233-063F-42B5-8137-9DF3F51BA10A}">
+      <p15:sldGuideLst xmlns:p15="http://schemas.microsoft.com/office/powerpoint/2012/main"/>
+    </p:ext>
+  </p:extLst>
 </p:presentation>
+</file>
+
+<file path=ppt/revisionInfo.xml><?xml version="1.0" encoding="utf-8"?>
+<p1510:revInfo xmlns:a="http://schemas.openxmlformats.org/drawingml/2006/main" xmlns:r="http://schemas.openxmlformats.org/officeDocument/2006/relationships" xmlns:p1510="http://schemas.microsoft.com/office/powerpoint/2015/10/main">
+  <p1510:revLst>
+    <p1510:client id="{F99FA1C6-0788-46DA-A32A-89EF363D747C}" v="244" dt="2026-10-21T14:01:45.245"/>
+  </p1510:revLst>
+</p1510:revInfo>
+</file>
+
+<file path=ppt/changesInfos/changesInfo1.xml><?xml version="1.0" encoding="utf-8"?>
+<pc:chgInfo xmlns:a="http://schemas.openxmlformats.org/drawingml/2006/main" xmlns:r="http://schemas.openxmlformats.org/officeDocument/2006/relationships" xmlns:ac="http://schemas.microsoft.com/office/drawing/2013/main/command" xmlns:pc="http://schemas.microsoft.com/office/powerpoint/2013/main/command">
+  <pc:docChgLst>
+    <pc:chgData name="越智 統" userId="2de33d77-a65a-42d1-92e2-b40da65bb07e" providerId="ADAL" clId="{F99FA1C6-0788-46DA-A32A-89EF363D747C}"/>
+    <pc:docChg chg="custSel modSld">
+      <pc:chgData name="越智 統" userId="2de33d77-a65a-42d1-92e2-b40da65bb07e" providerId="ADAL" clId="{F99FA1C6-0788-46DA-A32A-89EF363D747C}" dt="2026-10-22T02:14:35.910" v="2547" actId="20577"/>
+      <pc:docMkLst>
+        <pc:docMk/>
+      </pc:docMkLst>
+      <pc:sldChg chg="modSp mod">
+        <pc:chgData name="越智 統" userId="2de33d77-a65a-42d1-92e2-b40da65bb07e" providerId="ADAL" clId="{F99FA1C6-0788-46DA-A32A-89EF363D747C}" dt="2026-10-21T12:22:05.662" v="5" actId="20577"/>
+        <pc:sldMkLst>
+          <pc:docMk/>
+          <pc:sldMk cId="87558667" sldId="256"/>
+        </pc:sldMkLst>
+        <pc:spChg chg="mod">
+          <ac:chgData name="越智 統" userId="2de33d77-a65a-42d1-92e2-b40da65bb07e" providerId="ADAL" clId="{F99FA1C6-0788-46DA-A32A-89EF363D747C}" dt="2026-10-21T12:22:05.662" v="5" actId="20577"/>
+          <ac:spMkLst>
+            <pc:docMk/>
+            <pc:sldMk cId="87558667" sldId="256"/>
+            <ac:spMk id="2" creationId="{54BBEBBD-1C13-9111-5D6E-6978AA1CCEF6}"/>
+          </ac:spMkLst>
+        </pc:spChg>
+      </pc:sldChg>
+      <pc:sldChg chg="addSp modSp mod">
+        <pc:chgData name="越智 統" userId="2de33d77-a65a-42d1-92e2-b40da65bb07e" providerId="ADAL" clId="{F99FA1C6-0788-46DA-A32A-89EF363D747C}" dt="2026-10-22T02:14:35.910" v="2547" actId="20577"/>
+        <pc:sldMkLst>
+          <pc:docMk/>
+          <pc:sldMk cId="4204333872" sldId="261"/>
+        </pc:sldMkLst>
+        <pc:spChg chg="mod">
+          <ac:chgData name="越智 統" userId="2de33d77-a65a-42d1-92e2-b40da65bb07e" providerId="ADAL" clId="{F99FA1C6-0788-46DA-A32A-89EF363D747C}" dt="2026-10-21T12:27:34.747" v="38" actId="20577"/>
+          <ac:spMkLst>
+            <pc:docMk/>
+            <pc:sldMk cId="4204333872" sldId="261"/>
+            <ac:spMk id="2" creationId="{BA78393C-4136-4143-B248-25581EA672B8}"/>
+          </ac:spMkLst>
+        </pc:spChg>
+        <pc:spChg chg="mod">
+          <ac:chgData name="越智 統" userId="2de33d77-a65a-42d1-92e2-b40da65bb07e" providerId="ADAL" clId="{F99FA1C6-0788-46DA-A32A-89EF363D747C}" dt="2026-10-22T02:14:35.910" v="2547" actId="20577"/>
+          <ac:spMkLst>
+            <pc:docMk/>
+            <pc:sldMk cId="4204333872" sldId="261"/>
+            <ac:spMk id="3" creationId="{2D19E177-E713-A82D-BD21-120D00D50102}"/>
+          </ac:spMkLst>
+        </pc:spChg>
+        <pc:picChg chg="add mod">
+          <ac:chgData name="越智 統" userId="2de33d77-a65a-42d1-92e2-b40da65bb07e" providerId="ADAL" clId="{F99FA1C6-0788-46DA-A32A-89EF363D747C}" dt="2026-10-21T12:46:13.494" v="205" actId="1076"/>
+          <ac:picMkLst>
+            <pc:docMk/>
+            <pc:sldMk cId="4204333872" sldId="261"/>
+            <ac:picMk id="4" creationId="{B42B7152-BB34-3636-B5F6-CA9A6E10BD1C}"/>
+          </ac:picMkLst>
+        </pc:picChg>
+      </pc:sldChg>
+      <pc:sldChg chg="addSp modSp mod">
+        <pc:chgData name="越智 統" userId="2de33d77-a65a-42d1-92e2-b40da65bb07e" providerId="ADAL" clId="{F99FA1C6-0788-46DA-A32A-89EF363D747C}" dt="2026-10-21T13:10:06.878" v="545" actId="1076"/>
+        <pc:sldMkLst>
+          <pc:docMk/>
+          <pc:sldMk cId="3736045710" sldId="262"/>
+        </pc:sldMkLst>
+        <pc:spChg chg="mod">
+          <ac:chgData name="越智 統" userId="2de33d77-a65a-42d1-92e2-b40da65bb07e" providerId="ADAL" clId="{F99FA1C6-0788-46DA-A32A-89EF363D747C}" dt="2026-10-21T12:48:46.072" v="238" actId="20577"/>
+          <ac:spMkLst>
+            <pc:docMk/>
+            <pc:sldMk cId="3736045710" sldId="262"/>
+            <ac:spMk id="2" creationId="{64640761-234D-6BC7-D72D-C9AE53594C3D}"/>
+          </ac:spMkLst>
+        </pc:spChg>
+        <pc:spChg chg="mod">
+          <ac:chgData name="越智 統" userId="2de33d77-a65a-42d1-92e2-b40da65bb07e" providerId="ADAL" clId="{F99FA1C6-0788-46DA-A32A-89EF363D747C}" dt="2026-10-21T13:09:53.958" v="542" actId="5793"/>
+          <ac:spMkLst>
+            <pc:docMk/>
+            <pc:sldMk cId="3736045710" sldId="262"/>
+            <ac:spMk id="3" creationId="{B8131AB1-3F2D-2FEF-791C-85B5C4CF91C4}"/>
+          </ac:spMkLst>
+        </pc:spChg>
+        <pc:graphicFrameChg chg="add mod">
+          <ac:chgData name="越智 統" userId="2de33d77-a65a-42d1-92e2-b40da65bb07e" providerId="ADAL" clId="{F99FA1C6-0788-46DA-A32A-89EF363D747C}" dt="2026-10-21T13:09:55.557" v="543"/>
+          <ac:graphicFrameMkLst>
+            <pc:docMk/>
+            <pc:sldMk cId="3736045710" sldId="262"/>
+            <ac:graphicFrameMk id="4" creationId="{840B49D8-FCDC-80CC-76BB-F72C356E57F2}"/>
+          </ac:graphicFrameMkLst>
+        </pc:graphicFrameChg>
+        <pc:picChg chg="add mod">
+          <ac:chgData name="越智 統" userId="2de33d77-a65a-42d1-92e2-b40da65bb07e" providerId="ADAL" clId="{F99FA1C6-0788-46DA-A32A-89EF363D747C}" dt="2026-10-21T13:10:06.878" v="545" actId="1076"/>
+          <ac:picMkLst>
+            <pc:docMk/>
+            <pc:sldMk cId="3736045710" sldId="262"/>
+            <ac:picMk id="5" creationId="{86C59EDB-BD4A-81EC-4B40-60883D6CE599}"/>
+          </ac:picMkLst>
+        </pc:picChg>
+      </pc:sldChg>
+      <pc:sldChg chg="modSp mod">
+        <pc:chgData name="越智 統" userId="2de33d77-a65a-42d1-92e2-b40da65bb07e" providerId="ADAL" clId="{F99FA1C6-0788-46DA-A32A-89EF363D747C}" dt="2026-10-21T13:23:15.826" v="847" actId="20577"/>
+        <pc:sldMkLst>
+          <pc:docMk/>
+          <pc:sldMk cId="3882074766" sldId="263"/>
+        </pc:sldMkLst>
+        <pc:spChg chg="mod">
+          <ac:chgData name="越智 統" userId="2de33d77-a65a-42d1-92e2-b40da65bb07e" providerId="ADAL" clId="{F99FA1C6-0788-46DA-A32A-89EF363D747C}" dt="2026-10-21T13:18:25.723" v="652" actId="20577"/>
+          <ac:spMkLst>
+            <pc:docMk/>
+            <pc:sldMk cId="3882074766" sldId="263"/>
+            <ac:spMk id="2" creationId="{580CCA8E-082E-9CFE-8FA9-DE02C7F6E493}"/>
+          </ac:spMkLst>
+        </pc:spChg>
+        <pc:spChg chg="mod">
+          <ac:chgData name="越智 統" userId="2de33d77-a65a-42d1-92e2-b40da65bb07e" providerId="ADAL" clId="{F99FA1C6-0788-46DA-A32A-89EF363D747C}" dt="2026-10-21T13:23:15.826" v="847" actId="20577"/>
+          <ac:spMkLst>
+            <pc:docMk/>
+            <pc:sldMk cId="3882074766" sldId="263"/>
+            <ac:spMk id="3" creationId="{BF969751-C17A-1769-0ABC-1B51BE3C73F9}"/>
+          </ac:spMkLst>
+        </pc:spChg>
+      </pc:sldChg>
+      <pc:sldChg chg="addSp delSp modSp mod">
+        <pc:chgData name="越智 統" userId="2de33d77-a65a-42d1-92e2-b40da65bb07e" providerId="ADAL" clId="{F99FA1C6-0788-46DA-A32A-89EF363D747C}" dt="2026-10-21T13:43:16.227" v="1707" actId="14100"/>
+        <pc:sldMkLst>
+          <pc:docMk/>
+          <pc:sldMk cId="3885844179" sldId="264"/>
+        </pc:sldMkLst>
+        <pc:spChg chg="mod">
+          <ac:chgData name="越智 統" userId="2de33d77-a65a-42d1-92e2-b40da65bb07e" providerId="ADAL" clId="{F99FA1C6-0788-46DA-A32A-89EF363D747C}" dt="2026-10-21T13:39:35.846" v="1605" actId="20577"/>
+          <ac:spMkLst>
+            <pc:docMk/>
+            <pc:sldMk cId="3885844179" sldId="264"/>
+            <ac:spMk id="2" creationId="{5E4C6CFB-2F0D-35D3-D9D1-9EBA1819C25D}"/>
+          </ac:spMkLst>
+        </pc:spChg>
+        <pc:spChg chg="mod">
+          <ac:chgData name="越智 統" userId="2de33d77-a65a-42d1-92e2-b40da65bb07e" providerId="ADAL" clId="{F99FA1C6-0788-46DA-A32A-89EF363D747C}" dt="2026-10-21T13:39:45.311" v="1606" actId="6549"/>
+          <ac:spMkLst>
+            <pc:docMk/>
+            <pc:sldMk cId="3885844179" sldId="264"/>
+            <ac:spMk id="3" creationId="{841864B1-F11B-791E-B2CC-18BD151883D1}"/>
+          </ac:spMkLst>
+        </pc:spChg>
+        <pc:spChg chg="add mod">
+          <ac:chgData name="越智 統" userId="2de33d77-a65a-42d1-92e2-b40da65bb07e" providerId="ADAL" clId="{F99FA1C6-0788-46DA-A32A-89EF363D747C}" dt="2026-10-21T13:43:16.227" v="1707" actId="14100"/>
+          <ac:spMkLst>
+            <pc:docMk/>
+            <pc:sldMk cId="3885844179" sldId="264"/>
+            <ac:spMk id="5" creationId="{AD7D4309-9046-FA59-05E9-AAD83D9462C1}"/>
+          </ac:spMkLst>
+        </pc:spChg>
+        <pc:spChg chg="add mod">
+          <ac:chgData name="越智 統" userId="2de33d77-a65a-42d1-92e2-b40da65bb07e" providerId="ADAL" clId="{F99FA1C6-0788-46DA-A32A-89EF363D747C}" dt="2026-10-21T13:43:02.919" v="1704" actId="14100"/>
+          <ac:spMkLst>
+            <pc:docMk/>
+            <pc:sldMk cId="3885844179" sldId="264"/>
+            <ac:spMk id="7" creationId="{02DC29F5-0C5F-578B-EF45-0383E2CE515D}"/>
+          </ac:spMkLst>
+        </pc:spChg>
+        <pc:graphicFrameChg chg="add mod modGraphic">
+          <ac:chgData name="越智 統" userId="2de33d77-a65a-42d1-92e2-b40da65bb07e" providerId="ADAL" clId="{F99FA1C6-0788-46DA-A32A-89EF363D747C}" dt="2026-10-21T13:42:57.248" v="1703" actId="20577"/>
+          <ac:graphicFrameMkLst>
+            <pc:docMk/>
+            <pc:sldMk cId="3885844179" sldId="264"/>
+            <ac:graphicFrameMk id="4" creationId="{6AEE0CE6-FC05-CD0A-38C7-27F9B69A46F4}"/>
+          </ac:graphicFrameMkLst>
+        </pc:graphicFrameChg>
+        <pc:graphicFrameChg chg="add del mod">
+          <ac:chgData name="越智 統" userId="2de33d77-a65a-42d1-92e2-b40da65bb07e" providerId="ADAL" clId="{F99FA1C6-0788-46DA-A32A-89EF363D747C}" dt="2026-10-21T13:41:39.622" v="1656" actId="478"/>
+          <ac:graphicFrameMkLst>
+            <pc:docMk/>
+            <pc:sldMk cId="3885844179" sldId="264"/>
+            <ac:graphicFrameMk id="6" creationId="{4C5CE019-1FDB-8DE1-2B7D-63877D6DF1CB}"/>
+          </ac:graphicFrameMkLst>
+        </pc:graphicFrameChg>
+      </pc:sldChg>
+      <pc:sldChg chg="addSp delSp modSp mod">
+        <pc:chgData name="越智 統" userId="2de33d77-a65a-42d1-92e2-b40da65bb07e" providerId="ADAL" clId="{F99FA1C6-0788-46DA-A32A-89EF363D747C}" dt="2026-10-21T14:02:08.790" v="2526" actId="1076"/>
+        <pc:sldMkLst>
+          <pc:docMk/>
+          <pc:sldMk cId="3164935586" sldId="265"/>
+        </pc:sldMkLst>
+        <pc:spChg chg="mod">
+          <ac:chgData name="越智 統" userId="2de33d77-a65a-42d1-92e2-b40da65bb07e" providerId="ADAL" clId="{F99FA1C6-0788-46DA-A32A-89EF363D747C}" dt="2026-10-21T13:44:34.106" v="1741" actId="20577"/>
+          <ac:spMkLst>
+            <pc:docMk/>
+            <pc:sldMk cId="3164935586" sldId="265"/>
+            <ac:spMk id="2" creationId="{ED59F0AA-AD8D-902D-D440-84F85A87E490}"/>
+          </ac:spMkLst>
+        </pc:spChg>
+        <pc:spChg chg="mod">
+          <ac:chgData name="越智 統" userId="2de33d77-a65a-42d1-92e2-b40da65bb07e" providerId="ADAL" clId="{F99FA1C6-0788-46DA-A32A-89EF363D747C}" dt="2026-10-21T13:57:04.235" v="2304" actId="6549"/>
+          <ac:spMkLst>
+            <pc:docMk/>
+            <pc:sldMk cId="3164935586" sldId="265"/>
+            <ac:spMk id="3" creationId="{3043F0E9-13F1-3471-E6FC-7A64303B55C3}"/>
+          </ac:spMkLst>
+        </pc:spChg>
+        <pc:spChg chg="add mod">
+          <ac:chgData name="越智 統" userId="2de33d77-a65a-42d1-92e2-b40da65bb07e" providerId="ADAL" clId="{F99FA1C6-0788-46DA-A32A-89EF363D747C}" dt="2026-10-21T13:58:57.919" v="2349"/>
+          <ac:spMkLst>
+            <pc:docMk/>
+            <pc:sldMk cId="3164935586" sldId="265"/>
+            <ac:spMk id="5" creationId="{0CA845AF-6BF7-C048-02F6-D1ADA69E86B4}"/>
+          </ac:spMkLst>
+        </pc:spChg>
+        <pc:graphicFrameChg chg="add del mod modGraphic">
+          <ac:chgData name="越智 統" userId="2de33d77-a65a-42d1-92e2-b40da65bb07e" providerId="ADAL" clId="{F99FA1C6-0788-46DA-A32A-89EF363D747C}" dt="2026-10-21T14:00:46.498" v="2429" actId="478"/>
+          <ac:graphicFrameMkLst>
+            <pc:docMk/>
+            <pc:sldMk cId="3164935586" sldId="265"/>
+            <ac:graphicFrameMk id="4" creationId="{30DE11D9-726E-13EA-5AF2-2309A4612F57}"/>
+          </ac:graphicFrameMkLst>
+        </pc:graphicFrameChg>
+        <pc:graphicFrameChg chg="add mod modGraphic">
+          <ac:chgData name="越智 統" userId="2de33d77-a65a-42d1-92e2-b40da65bb07e" providerId="ADAL" clId="{F99FA1C6-0788-46DA-A32A-89EF363D747C}" dt="2026-10-21T14:02:08.790" v="2526" actId="1076"/>
+          <ac:graphicFrameMkLst>
+            <pc:docMk/>
+            <pc:sldMk cId="3164935586" sldId="265"/>
+            <ac:graphicFrameMk id="6" creationId="{0A80708C-0B3C-101F-823D-A990294D51B5}"/>
+          </ac:graphicFrameMkLst>
+        </pc:graphicFrameChg>
+      </pc:sldChg>
+    </pc:docChg>
+  </pc:docChgLst>
+</pc:chgInfo>
+</file>
+
+<file path=ppt/diagrams/colors1.xml><?xml version="1.0" encoding="utf-8"?>
+<dgm:colorsDef xmlns:dgm="http://schemas.openxmlformats.org/drawingml/2006/diagram" xmlns:a="http://schemas.openxmlformats.org/drawingml/2006/main" uniqueId="urn:microsoft.com/office/officeart/2005/8/colors/accent1_2">
+  <dgm:title val=""/>
+  <dgm:desc val=""/>
+  <dgm:catLst>
+    <dgm:cat type="accent1" pri="11200"/>
+  </dgm:catLst>
+  <dgm:styleLbl name="node0">
+    <dgm:fillClrLst meth="repeat">
+      <a:schemeClr val="accent1"/>
+    </dgm:fillClrLst>
+    <dgm:linClrLst meth="repeat">
+      <a:schemeClr val="lt1"/>
+    </dgm:linClrLst>
+    <dgm:effectClrLst/>
+    <dgm:txLinClrLst/>
+    <dgm:txFillClrLst/>
+    <dgm:txEffectClrLst/>
+  </dgm:styleLbl>
+  <dgm:styleLbl name="alignNode1">
+    <dgm:fillClrLst meth="repeat">
+      <a:schemeClr val="accent1"/>
+    </dgm:fillClrLst>
+    <dgm:linClrLst meth="repeat">
+      <a:schemeClr val="accent1"/>
+    </dgm:linClrLst>
+    <dgm:effectClrLst/>
+    <dgm:txLinClrLst/>
+    <dgm:txFillClrLst/>
+    <dgm:txEffectClrLst/>
+  </dgm:styleLbl>
+  <dgm:styleLbl name="node1">
+    <dgm:fillClrLst meth="repeat">
+      <a:schemeClr val="accent1"/>
+    </dgm:fillClrLst>
+    <dgm:linClrLst meth="repeat">
+      <a:schemeClr val="lt1"/>
+    </dgm:linClrLst>
+    <dgm:effectClrLst/>
+    <dgm:txLinClrLst/>
+    <dgm:txFillClrLst/>
+    <dgm:txEffectClrLst/>
+  </dgm:styleLbl>
+  <dgm:styleLbl name="lnNode1">
+    <dgm:fillClrLst meth="repeat">
+      <a:schemeClr val="accent1"/>
+    </dgm:fillClrLst>
+    <dgm:linClrLst meth="repeat">
+      <a:schemeClr val="lt1"/>
+    </dgm:linClrLst>
+    <dgm:effectClrLst/>
+    <dgm:txLinClrLst/>
+    <dgm:txFillClrLst/>
+    <dgm:txEffectClrLst/>
+  </dgm:styleLbl>
+  <dgm:styleLbl name="vennNode1">
+    <dgm:fillClrLst meth="repeat">
+      <a:schemeClr val="accent1">
+        <a:alpha val="50000"/>
+      </a:schemeClr>
+    </dgm:fillClrLst>
+    <dgm:linClrLst meth="repeat">
+      <a:schemeClr val="lt1"/>
+    </dgm:linClrLst>
+    <dgm:effectClrLst/>
+    <dgm:txLinClrLst/>
+    <dgm:txFillClrLst/>
+    <dgm:txEffectClrLst/>
+  </dgm:styleLbl>
+  <dgm:styleLbl name="node2">
+    <dgm:fillClrLst meth="repeat">
+      <a:schemeClr val="accent1"/>
+    </dgm:fillClrLst>
+    <dgm:linClrLst meth="repeat">
+      <a:schemeClr val="lt1"/>
+    </dgm:linClrLst>
+    <dgm:effectClrLst/>
+    <dgm:txLinClrLst/>
+    <dgm:txFillClrLst/>
+    <dgm:txEffectClrLst/>
+  </dgm:styleLbl>
+  <dgm:styleLbl name="node3">
+    <dgm:fillClrLst meth="repeat">
+      <a:schemeClr val="accent1"/>
+    </dgm:fillClrLst>
+    <dgm:linClrLst meth="repeat">
+      <a:schemeClr val="lt1"/>
+    </dgm:linClrLst>
+    <dgm:effectClrLst/>
+    <dgm:txLinClrLst/>
+    <dgm:txFillClrLst/>
+    <dgm:txEffectClrLst/>
+  </dgm:styleLbl>
+  <dgm:styleLbl name="node4">
+    <dgm:fillClrLst meth="repeat">
+      <a:schemeClr val="accent1"/>
+    </dgm:fillClrLst>
+    <dgm:linClrLst meth="repeat">
+      <a:schemeClr val="lt1"/>
+    </dgm:linClrLst>
+    <dgm:effectClrLst/>
+    <dgm:txLinClrLst/>
+    <dgm:txFillClrLst/>
+    <dgm:txEffectClrLst/>
+  </dgm:styleLbl>
+  <dgm:styleLbl name="fgImgPlace1">
+    <dgm:fillClrLst meth="repeat">
+      <a:schemeClr val="accent1">
+        <a:tint val="50000"/>
+      </a:schemeClr>
+    </dgm:fillClrLst>
+    <dgm:linClrLst meth="repeat">
+      <a:schemeClr val="lt1"/>
+    </dgm:linClrLst>
+    <dgm:effectClrLst/>
+    <dgm:txLinClrLst/>
+    <dgm:txFillClrLst meth="repeat">
+      <a:schemeClr val="lt1"/>
+    </dgm:txFillClrLst>
+    <dgm:txEffectClrLst/>
+  </dgm:styleLbl>
+  <dgm:styleLbl name="alignImgPlace1">
+    <dgm:fillClrLst meth="repeat">
+      <a:schemeClr val="accent1">
+        <a:tint val="50000"/>
+      </a:schemeClr>
+    </dgm:fillClrLst>
+    <dgm:linClrLst meth="repeat">
+      <a:schemeClr val="lt1"/>
+    </dgm:linClrLst>
+    <dgm:effectClrLst/>
+    <dgm:txLinClrLst/>
+    <dgm:txFillClrLst meth="repeat">
+      <a:schemeClr val="lt1"/>
+    </dgm:txFillClrLst>
+    <dgm:txEffectClrLst/>
+  </dgm:styleLbl>
+  <dgm:styleLbl name="bgImgPlace1">
+    <dgm:fillClrLst meth="repeat">
+      <a:schemeClr val="accent1">
+        <a:tint val="50000"/>
+      </a:schemeClr>
+    </dgm:fillClrLst>
+    <dgm:linClrLst meth="repeat">
+      <a:schemeClr val="lt1"/>
+    </dgm:linClrLst>
+    <dgm:effectClrLst/>
+    <dgm:txLinClrLst/>
+    <dgm:txFillClrLst meth="repeat">
+      <a:schemeClr val="lt1"/>
+    </dgm:txFillClrLst>
+    <dgm:txEffectClrLst/>
+  </dgm:styleLbl>
+  <dgm:styleLbl name="sibTrans2D1">
+    <dgm:fillClrLst meth="repeat">
+      <a:schemeClr val="accent1">
+        <a:tint val="60000"/>
+      </a:schemeClr>
+    </dgm:fillClrLst>
+    <dgm:linClrLst meth="repeat">
+      <a:schemeClr val="accent1">
+        <a:tint val="60000"/>
+      </a:schemeClr>
+    </dgm:linClrLst>
+    <dgm:effectClrLst/>
+    <dgm:txLinClrLst/>
+    <dgm:txFillClrLst/>
+    <dgm:txEffectClrLst/>
+  </dgm:styleLbl>
+  <dgm:styleLbl name="fgSibTrans2D1">
+    <dgm:fillClrLst meth="repeat">
+      <a:schemeClr val="accent1">
+        <a:tint val="60000"/>
+      </a:schemeClr>
+    </dgm:fillClrLst>
+    <dgm:linClrLst meth="repeat">
+      <a:schemeClr val="accent1">
+        <a:tint val="60000"/>
+      </a:schemeClr>
+    </dgm:linClrLst>
+    <dgm:effectClrLst/>
+    <dgm:txLinClrLst/>
+    <dgm:txFillClrLst/>
+    <dgm:txEffectClrLst/>
+  </dgm:styleLbl>
+  <dgm:styleLbl name="bgSibTrans2D1">
+    <dgm:fillClrLst meth="repeat">
+      <a:schemeClr val="accent1">
+        <a:tint val="60000"/>
+      </a:schemeClr>
+    </dgm:fillClrLst>
+    <dgm:linClrLst meth="repeat">
+      <a:schemeClr val="accent1">
+        <a:tint val="60000"/>
+      </a:schemeClr>
+    </dgm:linClrLst>
+    <dgm:effectClrLst/>
+    <dgm:txLinClrLst/>
+    <dgm:txFillClrLst/>
+    <dgm:txEffectClrLst/>
+  </dgm:styleLbl>
+  <dgm:styleLbl name="sibTrans1D1">
+    <dgm:fillClrLst meth="repeat">
+      <a:schemeClr val="accent1"/>
+    </dgm:fillClrLst>
+    <dgm:linClrLst meth="repeat">
+      <a:schemeClr val="accent1"/>
+    </dgm:linClrLst>
+    <dgm:effectClrLst/>
+    <dgm:txLinClrLst/>
+    <dgm:txFillClrLst meth="repeat">
+      <a:schemeClr val="tx1"/>
+    </dgm:txFillClrLst>
+    <dgm:txEffectClrLst/>
+  </dgm:styleLbl>
+  <dgm:styleLbl name="callout">
+    <dgm:fillClrLst meth="repeat">
+      <a:schemeClr val="accent1"/>
+    </dgm:fillClrLst>
+    <dgm:linClrLst meth="repeat">
+      <a:schemeClr val="accent1">
+        <a:tint val="50000"/>
+      </a:schemeClr>
+    </dgm:linClrLst>
+    <dgm:effectClrLst/>
+    <dgm:txLinClrLst/>
+    <dgm:txFillClrLst meth="repeat">
+      <a:schemeClr val="tx1"/>
+    </dgm:txFillClrLst>
+    <dgm:txEffectClrLst/>
+  </dgm:styleLbl>
+  <dgm:styleLbl name="asst0">
+    <dgm:fillClrLst meth="repeat">
+      <a:schemeClr val="accent1"/>
+    </dgm:fillClrLst>
+    <dgm:linClrLst meth="repeat">
+      <a:schemeClr val="lt1"/>
+    </dgm:linClrLst>
+    <dgm:effectClrLst/>
+    <dgm:txLinClrLst/>
+    <dgm:txFillClrLst/>
+    <dgm:txEffectClrLst/>
+  </dgm:styleLbl>
+  <dgm:styleLbl name="asst1">
+    <dgm:fillClrLst meth="repeat">
+      <a:schemeClr val="accent1"/>
+    </dgm:fillClrLst>
+    <dgm:linClrLst meth="repeat">
+      <a:schemeClr val="lt1"/>
+    </dgm:linClrLst>
+    <dgm:effectClrLst/>
+    <dgm:txLinClrLst/>
+    <dgm:txFillClrLst/>
+    <dgm:txEffectClrLst/>
+  </dgm:styleLbl>
+  <dgm:styleLbl name="asst2">
+    <dgm:fillClrLst meth="repeat">
+      <a:schemeClr val="accent1"/>
+    </dgm:fillClrLst>
+    <dgm:linClrLst meth="repeat">
+      <a:schemeClr val="lt1"/>
+    </dgm:linClrLst>
+    <dgm:effectClrLst/>
+    <dgm:txLinClrLst/>
+    <dgm:txFillClrLst/>
+    <dgm:txEffectClrLst/>
+  </dgm:styleLbl>
+  <dgm:styleLbl name="asst3">
+    <dgm:fillClrLst meth="repeat">
+      <a:schemeClr val="accent1"/>
+    </dgm:fillClrLst>
+    <dgm:linClrLst meth="repeat">
+      <a:schemeClr val="lt1"/>
+    </dgm:linClrLst>
+    <dgm:effectClrLst/>
+    <dgm:txLinClrLst/>
+    <dgm:txFillClrLst/>
+    <dgm:txEffectClrLst/>
+  </dgm:styleLbl>
+  <dgm:styleLbl name="asst4">
+    <dgm:fillClrLst meth="repeat">
+      <a:schemeClr val="accent1"/>
+    </dgm:fillClrLst>
+    <dgm:linClrLst meth="repeat">
+      <a:schemeClr val="lt1"/>
+    </dgm:linClrLst>
+    <dgm:effectClrLst/>
+    <dgm:txLinClrLst/>
+    <dgm:txFillClrLst/>
+    <dgm:txEffectClrLst/>
+  </dgm:styleLbl>
+  <dgm:styleLbl name="parChTrans2D1">
+    <dgm:fillClrLst meth="repeat">
+      <a:schemeClr val="accent1">
+        <a:tint val="60000"/>
+      </a:schemeClr>
+    </dgm:fillClrLst>
+    <dgm:linClrLst meth="repeat">
+      <a:schemeClr val="accent1">
+        <a:tint val="60000"/>
+      </a:schemeClr>
+    </dgm:linClrLst>
+    <dgm:effectClrLst/>
+    <dgm:txLinClrLst/>
+    <dgm:txFillClrLst meth="repeat">
+      <a:schemeClr val="lt1"/>
+    </dgm:txFillClrLst>
+    <dgm:txEffectClrLst/>
+  </dgm:styleLbl>
+  <dgm:styleLbl name="parChTrans2D2">
+    <dgm:fillClrLst meth="repeat">
+      <a:schemeClr val="accent1"/>
+    </dgm:fillClrLst>
+    <dgm:linClrLst meth="repeat">
+      <a:schemeClr val="accent1"/>
+    </dgm:linClrLst>
+    <dgm:effectClrLst/>
+    <dgm:txLinClrLst/>
+    <dgm:txFillClrLst meth="repeat">
+      <a:schemeClr val="lt1"/>
+    </dgm:txFillClrLst>
+    <dgm:txEffectClrLst/>
+  </dgm:styleLbl>
+  <dgm:styleLbl name="parChTrans2D3">
+    <dgm:fillClrLst meth="repeat">
+      <a:schemeClr val="accent1"/>
+    </dgm:fillClrLst>
+    <dgm:linClrLst meth="repeat">
+      <a:schemeClr val="accent1"/>
+    </dgm:linClrLst>
+    <dgm:effectClrLst/>
+    <dgm:txLinClrLst/>
+    <dgm:txFillClrLst meth="repeat">
+      <a:schemeClr val="lt1"/>
+    </dgm:txFillClrLst>
+    <dgm:txEffectClrLst/>
+  </dgm:styleLbl>
+  <dgm:styleLbl name="parChTrans2D4">
+    <dgm:fillClrLst meth="repeat">
+      <a:schemeClr val="accent1"/>
+    </dgm:fillClrLst>
+    <dgm:linClrLst meth="repeat">
+      <a:schemeClr val="accent1"/>
+    </dgm:linClrLst>
+    <dgm:effectClrLst/>
+    <dgm:txLinClrLst/>
+    <dgm:txFillClrLst meth="repeat">
+      <a:schemeClr val="lt1"/>
+    </dgm:txFillClrLst>
+    <dgm:txEffectClrLst/>
+  </dgm:styleLbl>
+  <dgm:styleLbl name="parChTrans1D1">
+    <dgm:fillClrLst meth="repeat">
+      <a:schemeClr val="accent1"/>
+    </dgm:fillClrLst>
+    <dgm:linClrLst meth="repeat">
+      <a:schemeClr val="accent1">
+        <a:shade val="60000"/>
+      </a:schemeClr>
+    </dgm:linClrLst>
+    <dgm:effectClrLst/>
+    <dgm:txLinClrLst/>
+    <dgm:txFillClrLst meth="repeat">
+      <a:schemeClr val="tx1"/>
+    </dgm:txFillClrLst>
+    <dgm:txEffectClrLst/>
+  </dgm:styleLbl>
+  <dgm:styleLbl name="parChTrans1D2">
+    <dgm:fillClrLst meth="repeat">
+      <a:schemeClr val="accent1"/>
+    </dgm:fillClrLst>
+    <dgm:linClrLst meth="repeat">
+      <a:schemeClr val="accent1">
+        <a:shade val="60000"/>
+      </a:schemeClr>
+    </dgm:linClrLst>
+    <dgm:effectClrLst/>
+    <dgm:txLinClrLst/>
+    <dgm:txFillClrLst meth="repeat">
+      <a:schemeClr val="tx1"/>
+    </dgm:txFillClrLst>
+    <dgm:txEffectClrLst/>
+  </dgm:styleLbl>
+  <dgm:styleLbl name="parChTrans1D3">
+    <dgm:fillClrLst meth="repeat">
+      <a:schemeClr val="accent1"/>
+    </dgm:fillClrLst>
+    <dgm:linClrLst meth="repeat">
+      <a:schemeClr val="accent1">
+        <a:shade val="80000"/>
+      </a:schemeClr>
+    </dgm:linClrLst>
+    <dgm:effectClrLst/>
+    <dgm:txLinClrLst/>
+    <dgm:txFillClrLst meth="repeat">
+      <a:schemeClr val="tx1"/>
+    </dgm:txFillClrLst>
+    <dgm:txEffectClrLst/>
+  </dgm:styleLbl>
+  <dgm:styleLbl name="parChTrans1D4">
+    <dgm:fillClrLst meth="repeat">
+      <a:schemeClr val="accent1"/>
+    </dgm:fillClrLst>
+    <dgm:linClrLst meth="repeat">
+      <a:schemeClr val="accent1">
+        <a:shade val="80000"/>
+      </a:schemeClr>
+    </dgm:linClrLst>
+    <dgm:effectClrLst/>
+    <dgm:txLinClrLst/>
+    <dgm:txFillClrLst meth="repeat">
+      <a:schemeClr val="tx1"/>
+    </dgm:txFillClrLst>
+    <dgm:txEffectClrLst/>
+  </dgm:styleLbl>
+  <dgm:styleLbl name="fgAcc1">
+    <dgm:fillClrLst meth="repeat">
+      <a:schemeClr val="lt1">
+        <a:alpha val="90000"/>
+      </a:schemeClr>
+    </dgm:fillClrLst>
+    <dgm:linClrLst meth="repeat">
+      <a:schemeClr val="accent1"/>
+    </dgm:linClrLst>
+    <dgm:effectClrLst/>
+    <dgm:txLinClrLst/>
+    <dgm:txFillClrLst meth="repeat">
+      <a:schemeClr val="dk1"/>
+    </dgm:txFillClrLst>
+    <dgm:txEffectClrLst/>
+  </dgm:styleLbl>
+  <dgm:styleLbl name="conFgAcc1">
+    <dgm:fillClrLst meth="repeat">
+      <a:schemeClr val="lt1">
+        <a:alpha val="90000"/>
+      </a:schemeClr>
+    </dgm:fillClrLst>
+    <dgm:linClrLst meth="repeat">
+      <a:schemeClr val="accent1"/>
+    </dgm:linClrLst>
+    <dgm:effectClrLst/>
+    <dgm:txLinClrLst/>
+    <dgm:txFillClrLst meth="repeat">
+      <a:schemeClr val="dk1"/>
+    </dgm:txFillClrLst>
+    <dgm:txEffectClrLst/>
+  </dgm:styleLbl>
+  <dgm:styleLbl name="alignAcc1">
+    <dgm:fillClrLst meth="repeat">
+      <a:schemeClr val="lt1">
+        <a:alpha val="90000"/>
+      </a:schemeClr>
+    </dgm:fillClrLst>
+    <dgm:linClrLst meth="repeat">
+      <a:schemeClr val="accent1"/>
+    </dgm:linClrLst>
+    <dgm:effectClrLst/>
+    <dgm:txLinClrLst/>
+    <dgm:txFillClrLst meth="repeat">
+      <a:schemeClr val="dk1"/>
+    </dgm:txFillClrLst>
+    <dgm:txEffectClrLst/>
+  </dgm:styleLbl>
+  <dgm:styleLbl name="trAlignAcc1">
+    <dgm:fillClrLst meth="repeat">
+      <a:schemeClr val="lt1">
+        <a:alpha val="40000"/>
+      </a:schemeClr>
+    </dgm:fillClrLst>
+    <dgm:linClrLst meth="repeat">
+      <a:schemeClr val="accent1"/>
+    </dgm:linClrLst>
+    <dgm:effectClrLst/>
+    <dgm:txLinClrLst/>
+    <dgm:txFillClrLst meth="repeat">
+      <a:schemeClr val="dk1"/>
+    </dgm:txFillClrLst>
+    <dgm:txEffectClrLst/>
+  </dgm:styleLbl>
+  <dgm:styleLbl name="bgAcc1">
+    <dgm:fillClrLst meth="repeat">
+      <a:schemeClr val="lt1">
+        <a:alpha val="90000"/>
+      </a:schemeClr>
+    </dgm:fillClrLst>
+    <dgm:linClrLst meth="repeat">
+      <a:schemeClr val="accent1"/>
+    </dgm:linClrLst>
+    <dgm:effectClrLst/>
+    <dgm:txLinClrLst/>
+    <dgm:txFillClrLst meth="repeat">
+      <a:schemeClr val="dk1"/>
+    </dgm:txFillClrLst>
+    <dgm:txEffectClrLst/>
+  </dgm:styleLbl>
+  <dgm:styleLbl name="solidFgAcc1">
+    <dgm:fillClrLst meth="repeat">
+      <a:schemeClr val="lt1"/>
+    </dgm:fillClrLst>
+    <dgm:linClrLst meth="repeat">
+      <a:schemeClr val="accent1"/>
+    </dgm:linClrLst>
+    <dgm:effectClrLst/>
+    <dgm:txLinClrLst/>
+    <dgm:txFillClrLst meth="repeat">
+      <a:schemeClr val="dk1"/>
+    </dgm:txFillClrLst>
+    <dgm:txEffectClrLst/>
+  </dgm:styleLbl>
+  <dgm:styleLbl name="solidAlignAcc1">
+    <dgm:fillClrLst meth="repeat">
+      <a:schemeClr val="lt1"/>
+    </dgm:fillClrLst>
+    <dgm:linClrLst meth="repeat">
+      <a:schemeClr val="accent1"/>
+    </dgm:linClrLst>
+    <dgm:effectClrLst/>
+    <dgm:txLinClrLst/>
+    <dgm:txFillClrLst meth="repeat">
+      <a:schemeClr val="dk1"/>
+    </dgm:txFillClrLst>
+    <dgm:txEffectClrLst/>
+  </dgm:styleLbl>
+  <dgm:styleLbl name="solidBgAcc1">
+    <dgm:fillClrLst meth="repeat">
+      <a:schemeClr val="lt1"/>
+    </dgm:fillClrLst>
+    <dgm:linClrLst meth="repeat">
+      <a:schemeClr val="accent1"/>
+    </dgm:linClrLst>
+    <dgm:effectClrLst/>
+    <dgm:txLinClrLst/>
+    <dgm:txFillClrLst meth="repeat">
+      <a:schemeClr val="dk1"/>
+    </dgm:txFillClrLst>
+    <dgm:txEffectClrLst/>
+  </dgm:styleLbl>
+  <dgm:styleLbl name="fgAccFollowNode1">
+    <dgm:fillClrLst meth="repeat">
+      <a:schemeClr val="accent1">
+        <a:alpha val="90000"/>
+        <a:tint val="40000"/>
+      </a:schemeClr>
+    </dgm:fillClrLst>
+    <dgm:linClrLst meth="repeat">
+      <a:schemeClr val="accent1">
+        <a:alpha val="90000"/>
+        <a:tint val="40000"/>
+      </a:schemeClr>
+    </dgm:linClrLst>
+    <dgm:effectClrLst/>
+    <dgm:txLinClrLst/>
+    <dgm:txFillClrLst meth="repeat">
+      <a:schemeClr val="dk1"/>
+    </dgm:txFillClrLst>
+    <dgm:txEffectClrLst/>
+  </dgm:styleLbl>
+  <dgm:styleLbl name="alignAccFollowNode1">
+    <dgm:fillClrLst meth="repeat">
+      <a:schemeClr val="accent1">
+        <a:alpha val="90000"/>
+        <a:tint val="40000"/>
+      </a:schemeClr>
+    </dgm:fillClrLst>
+    <dgm:linClrLst meth="repeat">
+      <a:schemeClr val="accent1">
+        <a:alpha val="90000"/>
+        <a:tint val="40000"/>
+      </a:schemeClr>
+    </dgm:linClrLst>
+    <dgm:effectClrLst/>
+    <dgm:txLinClrLst/>
+    <dgm:txFillClrLst meth="repeat">
+      <a:schemeClr val="dk1"/>
+    </dgm:txFillClrLst>
+    <dgm:txEffectClrLst/>
+  </dgm:styleLbl>
+  <dgm:styleLbl name="bgAccFollowNode1">
+    <dgm:fillClrLst meth="repeat">
+      <a:schemeClr val="accent1">
+        <a:alpha val="90000"/>
+        <a:tint val="40000"/>
+      </a:schemeClr>
+    </dgm:fillClrLst>
+    <dgm:linClrLst meth="repeat">
+      <a:schemeClr val="accent1">
+        <a:alpha val="90000"/>
+        <a:tint val="40000"/>
+      </a:schemeClr>
+    </dgm:linClrLst>
+    <dgm:effectClrLst/>
+    <dgm:txLinClrLst/>
+    <dgm:txFillClrLst meth="repeat">
+      <a:schemeClr val="dk1"/>
+    </dgm:txFillClrLst>
+    <dgm:txEffectClrLst/>
+  </dgm:styleLbl>
+  <dgm:styleLbl name="fgAcc0">
+    <dgm:fillClrLst meth="repeat">
+      <a:schemeClr val="lt1">
+        <a:alpha val="90000"/>
+      </a:schemeClr>
+    </dgm:fillClrLst>
+    <dgm:linClrLst meth="repeat">
+      <a:schemeClr val="accent1"/>
+    </dgm:linClrLst>
+    <dgm:effectClrLst/>
+    <dgm:txLinClrLst/>
+    <dgm:txFillClrLst meth="repeat">
+      <a:schemeClr val="dk1"/>
+    </dgm:txFillClrLst>
+    <dgm:txEffectClrLst/>
+  </dgm:styleLbl>
+  <dgm:styleLbl name="fgAcc2">
+    <dgm:fillClrLst meth="repeat">
+      <a:schemeClr val="lt1">
+        <a:alpha val="90000"/>
+      </a:schemeClr>
+    </dgm:fillClrLst>
+    <dgm:linClrLst meth="repeat">
+      <a:schemeClr val="accent1"/>
+    </dgm:linClrLst>
+    <dgm:effectClrLst/>
+    <dgm:txLinClrLst/>
+    <dgm:txFillClrLst meth="repeat">
+      <a:schemeClr val="dk1"/>
+    </dgm:txFillClrLst>
+    <dgm:txEffectClrLst/>
+  </dgm:styleLbl>
+  <dgm:styleLbl name="fgAcc3">
+    <dgm:fillClrLst meth="repeat">
+      <a:schemeClr val="lt1">
+        <a:alpha val="90000"/>
+      </a:schemeClr>
+    </dgm:fillClrLst>
+    <dgm:linClrLst meth="repeat">
+      <a:schemeClr val="accent1"/>
+    </dgm:linClrLst>
+    <dgm:effectClrLst/>
+    <dgm:txLinClrLst/>
+    <dgm:txFillClrLst meth="repeat">
+      <a:schemeClr val="dk1"/>
+    </dgm:txFillClrLst>
+    <dgm:txEffectClrLst/>
+  </dgm:styleLbl>
+  <dgm:styleLbl name="fgAcc4">
+    <dgm:fillClrLst meth="repeat">
+      <a:schemeClr val="lt1">
+        <a:alpha val="90000"/>
+      </a:schemeClr>
+    </dgm:fillClrLst>
+    <dgm:linClrLst meth="repeat">
+      <a:schemeClr val="accent1"/>
+    </dgm:linClrLst>
+    <dgm:effectClrLst/>
+    <dgm:txLinClrLst/>
+    <dgm:txFillClrLst meth="repeat">
+      <a:schemeClr val="dk1"/>
+    </dgm:txFillClrLst>
+    <dgm:txEffectClrLst/>
+  </dgm:styleLbl>
+  <dgm:styleLbl name="bgShp">
+    <dgm:fillClrLst meth="repeat">
+      <a:schemeClr val="accent1">
+        <a:tint val="40000"/>
+      </a:schemeClr>
+    </dgm:fillClrLst>
+    <dgm:linClrLst meth="repeat">
+      <a:schemeClr val="accent1"/>
+    </dgm:linClrLst>
+    <dgm:effectClrLst/>
+    <dgm:txLinClrLst/>
+    <dgm:txFillClrLst meth="repeat">
+      <a:schemeClr val="dk1"/>
+    </dgm:txFillClrLst>
+    <dgm:txEffectClrLst/>
+  </dgm:styleLbl>
+  <dgm:styleLbl name="dkBgShp">
+    <dgm:fillClrLst meth="repeat">
+      <a:schemeClr val="accent1">
+        <a:shade val="80000"/>
+      </a:schemeClr>
+    </dgm:fillClrLst>
+    <dgm:linClrLst meth="repeat">
+      <a:schemeClr val="accent1"/>
+    </dgm:linClrLst>
+    <dgm:effectClrLst/>
+    <dgm:txLinClrLst/>
+    <dgm:txFillClrLst meth="repeat">
+      <a:schemeClr val="lt1"/>
+    </dgm:txFillClrLst>
+    <dgm:txEffectClrLst/>
+  </dgm:styleLbl>
+  <dgm:styleLbl name="trBgShp">
+    <dgm:fillClrLst meth="repeat">
+      <a:schemeClr val="accent1">
+        <a:tint val="50000"/>
+        <a:alpha val="40000"/>
+      </a:schemeClr>
+    </dgm:fillClrLst>
+    <dgm:linClrLst meth="repeat">
+      <a:schemeClr val="accent1"/>
+    </dgm:linClrLst>
+    <dgm:effectClrLst/>
+    <dgm:txLinClrLst/>
+    <dgm:txFillClrLst meth="repeat">
+      <a:schemeClr val="lt1"/>
+    </dgm:txFillClrLst>
+    <dgm:txEffectClrLst/>
+  </dgm:styleLbl>
+  <dgm:styleLbl name="fgShp">
+    <dgm:fillClrLst meth="repeat">
+      <a:schemeClr val="accent1">
+        <a:tint val="60000"/>
+      </a:schemeClr>
+    </dgm:fillClrLst>
+    <dgm:linClrLst meth="repeat">
+      <a:schemeClr val="lt1"/>
+    </dgm:linClrLst>
+    <dgm:effectClrLst/>
+    <dgm:txLinClrLst/>
+    <dgm:txFillClrLst meth="repeat">
+      <a:schemeClr val="dk1"/>
+    </dgm:txFillClrLst>
+    <dgm:txEffectClrLst/>
+  </dgm:styleLbl>
+  <dgm:styleLbl name="revTx">
+    <dgm:fillClrLst meth="repeat">
+      <a:schemeClr val="lt1">
+        <a:alpha val="0"/>
+      </a:schemeClr>
+    </dgm:fillClrLst>
+    <dgm:linClrLst meth="repeat">
+      <a:schemeClr val="dk1">
+        <a:alpha val="0"/>
+      </a:schemeClr>
+    </dgm:linClrLst>
+    <dgm:effectClrLst/>
+    <dgm:txLinClrLst/>
+    <dgm:txFillClrLst meth="repeat">
+      <a:schemeClr val="tx1"/>
+    </dgm:txFillClrLst>
+    <dgm:txEffectClrLst/>
+  </dgm:styleLbl>
+</dgm:colorsDef>
+</file>
+
+<file path=ppt/diagrams/colors2.xml><?xml version="1.0" encoding="utf-8"?>
+<dgm:colorsDef xmlns:dgm="http://schemas.openxmlformats.org/drawingml/2006/diagram" xmlns:a="http://schemas.openxmlformats.org/drawingml/2006/main" uniqueId="urn:microsoft.com/office/officeart/2005/8/colors/accent1_2">
+  <dgm:title val=""/>
+  <dgm:desc val=""/>
+  <dgm:catLst>
+    <dgm:cat type="accent1" pri="11200"/>
+  </dgm:catLst>
+  <dgm:styleLbl name="node0">
+    <dgm:fillClrLst meth="repeat">
+      <a:schemeClr val="accent1"/>
+    </dgm:fillClrLst>
+    <dgm:linClrLst meth="repeat">
+      <a:schemeClr val="lt1"/>
+    </dgm:linClrLst>
+    <dgm:effectClrLst/>
+    <dgm:txLinClrLst/>
+    <dgm:txFillClrLst/>
+    <dgm:txEffectClrLst/>
+  </dgm:styleLbl>
+  <dgm:styleLbl name="alignNode1">
+    <dgm:fillClrLst meth="repeat">
+      <a:schemeClr val="accent1"/>
+    </dgm:fillClrLst>
+    <dgm:linClrLst meth="repeat">
+      <a:schemeClr val="accent1"/>
+    </dgm:linClrLst>
+    <dgm:effectClrLst/>
+    <dgm:txLinClrLst/>
+    <dgm:txFillClrLst/>
+    <dgm:txEffectClrLst/>
+  </dgm:styleLbl>
+  <dgm:styleLbl name="node1">
+    <dgm:fillClrLst meth="repeat">
+      <a:schemeClr val="accent1"/>
+    </dgm:fillClrLst>
+    <dgm:linClrLst meth="repeat">
+      <a:schemeClr val="lt1"/>
+    </dgm:linClrLst>
+    <dgm:effectClrLst/>
+    <dgm:txLinClrLst/>
+    <dgm:txFillClrLst/>
+    <dgm:txEffectClrLst/>
+  </dgm:styleLbl>
+  <dgm:styleLbl name="lnNode1">
+    <dgm:fillClrLst meth="repeat">
+      <a:schemeClr val="accent1"/>
+    </dgm:fillClrLst>
+    <dgm:linClrLst meth="repeat">
+      <a:schemeClr val="lt1"/>
+    </dgm:linClrLst>
+    <dgm:effectClrLst/>
+    <dgm:txLinClrLst/>
+    <dgm:txFillClrLst/>
+    <dgm:txEffectClrLst/>
+  </dgm:styleLbl>
+  <dgm:styleLbl name="vennNode1">
+    <dgm:fillClrLst meth="repeat">
+      <a:schemeClr val="accent1">
+        <a:alpha val="50000"/>
+      </a:schemeClr>
+    </dgm:fillClrLst>
+    <dgm:linClrLst meth="repeat">
+      <a:schemeClr val="lt1"/>
+    </dgm:linClrLst>
+    <dgm:effectClrLst/>
+    <dgm:txLinClrLst/>
+    <dgm:txFillClrLst/>
+    <dgm:txEffectClrLst/>
+  </dgm:styleLbl>
+  <dgm:styleLbl name="node2">
+    <dgm:fillClrLst meth="repeat">
+      <a:schemeClr val="accent1"/>
+    </dgm:fillClrLst>
+    <dgm:linClrLst meth="repeat">
+      <a:schemeClr val="lt1"/>
+    </dgm:linClrLst>
+    <dgm:effectClrLst/>
+    <dgm:txLinClrLst/>
+    <dgm:txFillClrLst/>
+    <dgm:txEffectClrLst/>
+  </dgm:styleLbl>
+  <dgm:styleLbl name="node3">
+    <dgm:fillClrLst meth="repeat">
+      <a:schemeClr val="accent1"/>
+    </dgm:fillClrLst>
+    <dgm:linClrLst meth="repeat">
+      <a:schemeClr val="lt1"/>
+    </dgm:linClrLst>
+    <dgm:effectClrLst/>
+    <dgm:txLinClrLst/>
+    <dgm:txFillClrLst/>
+    <dgm:txEffectClrLst/>
+  </dgm:styleLbl>
+  <dgm:styleLbl name="node4">
+    <dgm:fillClrLst meth="repeat">
+      <a:schemeClr val="accent1"/>
+    </dgm:fillClrLst>
+    <dgm:linClrLst meth="repeat">
+      <a:schemeClr val="lt1"/>
+    </dgm:linClrLst>
+    <dgm:effectClrLst/>
+    <dgm:txLinClrLst/>
+    <dgm:txFillClrLst/>
+    <dgm:txEffectClrLst/>
+  </dgm:styleLbl>
+  <dgm:styleLbl name="fgImgPlace1">
+    <dgm:fillClrLst meth="repeat">
+      <a:schemeClr val="accent1">
+        <a:tint val="50000"/>
+      </a:schemeClr>
+    </dgm:fillClrLst>
+    <dgm:linClrLst meth="repeat">
+      <a:schemeClr val="lt1"/>
+    </dgm:linClrLst>
+    <dgm:effectClrLst/>
+    <dgm:txLinClrLst/>
+    <dgm:txFillClrLst meth="repeat">
+      <a:schemeClr val="lt1"/>
+    </dgm:txFillClrLst>
+    <dgm:txEffectClrLst/>
+  </dgm:styleLbl>
+  <dgm:styleLbl name="alignImgPlace1">
+    <dgm:fillClrLst meth="repeat">
+      <a:schemeClr val="accent1">
+        <a:tint val="50000"/>
+      </a:schemeClr>
+    </dgm:fillClrLst>
+    <dgm:linClrLst meth="repeat">
+      <a:schemeClr val="lt1"/>
+    </dgm:linClrLst>
+    <dgm:effectClrLst/>
+    <dgm:txLinClrLst/>
+    <dgm:txFillClrLst meth="repeat">
+      <a:schemeClr val="lt1"/>
+    </dgm:txFillClrLst>
+    <dgm:txEffectClrLst/>
+  </dgm:styleLbl>
+  <dgm:styleLbl name="bgImgPlace1">
+    <dgm:fillClrLst meth="repeat">
+      <a:schemeClr val="accent1">
+        <a:tint val="50000"/>
+      </a:schemeClr>
+    </dgm:fillClrLst>
+    <dgm:linClrLst meth="repeat">
+      <a:schemeClr val="lt1"/>
+    </dgm:linClrLst>
+    <dgm:effectClrLst/>
+    <dgm:txLinClrLst/>
+    <dgm:txFillClrLst meth="repeat">
+      <a:schemeClr val="lt1"/>
+    </dgm:txFillClrLst>
+    <dgm:txEffectClrLst/>
+  </dgm:styleLbl>
+  <dgm:styleLbl name="sibTrans2D1">
+    <dgm:fillClrLst meth="repeat">
+      <a:schemeClr val="accent1">
+        <a:tint val="60000"/>
+      </a:schemeClr>
+    </dgm:fillClrLst>
+    <dgm:linClrLst meth="repeat">
+      <a:schemeClr val="accent1">
+        <a:tint val="60000"/>
+      </a:schemeClr>
+    </dgm:linClrLst>
+    <dgm:effectClrLst/>
+    <dgm:txLinClrLst/>
+    <dgm:txFillClrLst/>
+    <dgm:txEffectClrLst/>
+  </dgm:styleLbl>
+  <dgm:styleLbl name="fgSibTrans2D1">
+    <dgm:fillClrLst meth="repeat">
+      <a:schemeClr val="accent1">
+        <a:tint val="60000"/>
+      </a:schemeClr>
+    </dgm:fillClrLst>
+    <dgm:linClrLst meth="repeat">
+      <a:schemeClr val="accent1">
+        <a:tint val="60000"/>
+      </a:schemeClr>
+    </dgm:linClrLst>
+    <dgm:effectClrLst/>
+    <dgm:txLinClrLst/>
+    <dgm:txFillClrLst/>
+    <dgm:txEffectClrLst/>
+  </dgm:styleLbl>
+  <dgm:styleLbl name="bgSibTrans2D1">
+    <dgm:fillClrLst meth="repeat">
+      <a:schemeClr val="accent1">
+        <a:tint val="60000"/>
+      </a:schemeClr>
+    </dgm:fillClrLst>
+    <dgm:linClrLst meth="repeat">
+      <a:schemeClr val="accent1">
+        <a:tint val="60000"/>
+      </a:schemeClr>
+    </dgm:linClrLst>
+    <dgm:effectClrLst/>
+    <dgm:txLinClrLst/>
+    <dgm:txFillClrLst/>
+    <dgm:txEffectClrLst/>
+  </dgm:styleLbl>
+  <dgm:styleLbl name="sibTrans1D1">
+    <dgm:fillClrLst meth="repeat">
+      <a:schemeClr val="accent1"/>
+    </dgm:fillClrLst>
+    <dgm:linClrLst meth="repeat">
+      <a:schemeClr val="accent1"/>
+    </dgm:linClrLst>
+    <dgm:effectClrLst/>
+    <dgm:txLinClrLst/>
+    <dgm:txFillClrLst meth="repeat">
+      <a:schemeClr val="tx1"/>
+    </dgm:txFillClrLst>
+    <dgm:txEffectClrLst/>
+  </dgm:styleLbl>
+  <dgm:styleLbl name="callout">
+    <dgm:fillClrLst meth="repeat">
+      <a:schemeClr val="accent1"/>
+    </dgm:fillClrLst>
+    <dgm:linClrLst meth="repeat">
+      <a:schemeClr val="accent1">
+        <a:tint val="50000"/>
+      </a:schemeClr>
+    </dgm:linClrLst>
+    <dgm:effectClrLst/>
+    <dgm:txLinClrLst/>
+    <dgm:txFillClrLst meth="repeat">
+      <a:schemeClr val="tx1"/>
+    </dgm:txFillClrLst>
+    <dgm:txEffectClrLst/>
+  </dgm:styleLbl>
+  <dgm:styleLbl name="asst0">
+    <dgm:fillClrLst meth="repeat">
+      <a:schemeClr val="accent1"/>
+    </dgm:fillClrLst>
+    <dgm:linClrLst meth="repeat">
+      <a:schemeClr val="lt1"/>
+    </dgm:linClrLst>
+    <dgm:effectClrLst/>
+    <dgm:txLinClrLst/>
+    <dgm:txFillClrLst/>
+    <dgm:txEffectClrLst/>
+  </dgm:styleLbl>
+  <dgm:styleLbl name="asst1">
+    <dgm:fillClrLst meth="repeat">
+      <a:schemeClr val="accent1"/>
+    </dgm:fillClrLst>
+    <dgm:linClrLst meth="repeat">
+      <a:schemeClr val="lt1"/>
+    </dgm:linClrLst>
+    <dgm:effectClrLst/>
+    <dgm:txLinClrLst/>
+    <dgm:txFillClrLst/>
+    <dgm:txEffectClrLst/>
+  </dgm:styleLbl>
+  <dgm:styleLbl name="asst2">
+    <dgm:fillClrLst meth="repeat">
+      <a:schemeClr val="accent1"/>
+    </dgm:fillClrLst>
+    <dgm:linClrLst meth="repeat">
+      <a:schemeClr val="lt1"/>
+    </dgm:linClrLst>
+    <dgm:effectClrLst/>
+    <dgm:txLinClrLst/>
+    <dgm:txFillClrLst/>
+    <dgm:txEffectClrLst/>
+  </dgm:styleLbl>
+  <dgm:styleLbl name="asst3">
+    <dgm:fillClrLst meth="repeat">
+      <a:schemeClr val="accent1"/>
+    </dgm:fillClrLst>
+    <dgm:linClrLst meth="repeat">
+      <a:schemeClr val="lt1"/>
+    </dgm:linClrLst>
+    <dgm:effectClrLst/>
+    <dgm:txLinClrLst/>
+    <dgm:txFillClrLst/>
+    <dgm:txEffectClrLst/>
+  </dgm:styleLbl>
+  <dgm:styleLbl name="asst4">
+    <dgm:fillClrLst meth="repeat">
+      <a:schemeClr val="accent1"/>
+    </dgm:fillClrLst>
+    <dgm:linClrLst meth="repeat">
+      <a:schemeClr val="lt1"/>
+    </dgm:linClrLst>
+    <dgm:effectClrLst/>
+    <dgm:txLinClrLst/>
+    <dgm:txFillClrLst/>
+    <dgm:txEffectClrLst/>
+  </dgm:styleLbl>
+  <dgm:styleLbl name="parChTrans2D1">
+    <dgm:fillClrLst meth="repeat">
+      <a:schemeClr val="accent1">
+        <a:tint val="60000"/>
+      </a:schemeClr>
+    </dgm:fillClrLst>
+    <dgm:linClrLst meth="repeat">
+      <a:schemeClr val="accent1">
+        <a:tint val="60000"/>
+      </a:schemeClr>
+    </dgm:linClrLst>
+    <dgm:effectClrLst/>
+    <dgm:txLinClrLst/>
+    <dgm:txFillClrLst meth="repeat">
+      <a:schemeClr val="lt1"/>
+    </dgm:txFillClrLst>
+    <dgm:txEffectClrLst/>
+  </dgm:styleLbl>
+  <dgm:styleLbl name="parChTrans2D2">
+    <dgm:fillClrLst meth="repeat">
+      <a:schemeClr val="accent1"/>
+    </dgm:fillClrLst>
+    <dgm:linClrLst meth="repeat">
+      <a:schemeClr val="accent1"/>
+    </dgm:linClrLst>
+    <dgm:effectClrLst/>
+    <dgm:txLinClrLst/>
+    <dgm:txFillClrLst meth="repeat">
+      <a:schemeClr val="lt1"/>
+    </dgm:txFillClrLst>
+    <dgm:txEffectClrLst/>
+  </dgm:styleLbl>
+  <dgm:styleLbl name="parChTrans2D3">
+    <dgm:fillClrLst meth="repeat">
+      <a:schemeClr val="accent1"/>
+    </dgm:fillClrLst>
+    <dgm:linClrLst meth="repeat">
+      <a:schemeClr val="accent1"/>
+    </dgm:linClrLst>
+    <dgm:effectClrLst/>
+    <dgm:txLinClrLst/>
+    <dgm:txFillClrLst meth="repeat">
+      <a:schemeClr val="lt1"/>
+    </dgm:txFillClrLst>
+    <dgm:txEffectClrLst/>
+  </dgm:styleLbl>
+  <dgm:styleLbl name="parChTrans2D4">
+    <dgm:fillClrLst meth="repeat">
+      <a:schemeClr val="accent1"/>
+    </dgm:fillClrLst>
+    <dgm:linClrLst meth="repeat">
+      <a:schemeClr val="accent1"/>
+    </dgm:linClrLst>
+    <dgm:effectClrLst/>
+    <dgm:txLinClrLst/>
+    <dgm:txFillClrLst meth="repeat">
+      <a:schemeClr val="lt1"/>
+    </dgm:txFillClrLst>
+    <dgm:txEffectClrLst/>
+  </dgm:styleLbl>
+  <dgm:styleLbl name="parChTrans1D1">
+    <dgm:fillClrLst meth="repeat">
+      <a:schemeClr val="accent1"/>
+    </dgm:fillClrLst>
+    <dgm:linClrLst meth="repeat">
+      <a:schemeClr val="accent1">
+        <a:shade val="60000"/>
+      </a:schemeClr>
+    </dgm:linClrLst>
+    <dgm:effectClrLst/>
+    <dgm:txLinClrLst/>
+    <dgm:txFillClrLst meth="repeat">
+      <a:schemeClr val="tx1"/>
+    </dgm:txFillClrLst>
+    <dgm:txEffectClrLst/>
+  </dgm:styleLbl>
+  <dgm:styleLbl name="parChTrans1D2">
+    <dgm:fillClrLst meth="repeat">
+      <a:schemeClr val="accent1"/>
+    </dgm:fillClrLst>
+    <dgm:linClrLst meth="repeat">
+      <a:schemeClr val="accent1">
+        <a:shade val="60000"/>
+      </a:schemeClr>
+    </dgm:linClrLst>
+    <dgm:effectClrLst/>
+    <dgm:txLinClrLst/>
+    <dgm:txFillClrLst meth="repeat">
+      <a:schemeClr val="tx1"/>
+    </dgm:txFillClrLst>
+    <dgm:txEffectClrLst/>
+  </dgm:styleLbl>
+  <dgm:styleLbl name="parChTrans1D3">
+    <dgm:fillClrLst meth="repeat">
+      <a:schemeClr val="accent1"/>
+    </dgm:fillClrLst>
+    <dgm:linClrLst meth="repeat">
+      <a:schemeClr val="accent1">
+        <a:shade val="80000"/>
+      </a:schemeClr>
+    </dgm:linClrLst>
+    <dgm:effectClrLst/>
+    <dgm:txLinClrLst/>
+    <dgm:txFillClrLst meth="repeat">
+      <a:schemeClr val="tx1"/>
+    </dgm:txFillClrLst>
+    <dgm:txEffectClrLst/>
+  </dgm:styleLbl>
+  <dgm:styleLbl name="parChTrans1D4">
+    <dgm:fillClrLst meth="repeat">
+      <a:schemeClr val="accent1"/>
+    </dgm:fillClrLst>
+    <dgm:linClrLst meth="repeat">
+      <a:schemeClr val="accent1">
+        <a:shade val="80000"/>
+      </a:schemeClr>
+    </dgm:linClrLst>
+    <dgm:effectClrLst/>
+    <dgm:txLinClrLst/>
+    <dgm:txFillClrLst meth="repeat">
+      <a:schemeClr val="tx1"/>
+    </dgm:txFillClrLst>
+    <dgm:txEffectClrLst/>
+  </dgm:styleLbl>
+  <dgm:styleLbl name="fgAcc1">
+    <dgm:fillClrLst meth="repeat">
+      <a:schemeClr val="lt1">
+        <a:alpha val="90000"/>
+      </a:schemeClr>
+    </dgm:fillClrLst>
+    <dgm:linClrLst meth="repeat">
+      <a:schemeClr val="accent1"/>
+    </dgm:linClrLst>
+    <dgm:effectClrLst/>
+    <dgm:txLinClrLst/>
+    <dgm:txFillClrLst meth="repeat">
+      <a:schemeClr val="dk1"/>
+    </dgm:txFillClrLst>
+    <dgm:txEffectClrLst/>
+  </dgm:styleLbl>
+  <dgm:styleLbl name="conFgAcc1">
+    <dgm:fillClrLst meth="repeat">
+      <a:schemeClr val="lt1">
+        <a:alpha val="90000"/>
+      </a:schemeClr>
+    </dgm:fillClrLst>
+    <dgm:linClrLst meth="repeat">
+      <a:schemeClr val="accent1"/>
+    </dgm:linClrLst>
+    <dgm:effectClrLst/>
+    <dgm:txLinClrLst/>
+    <dgm:txFillClrLst meth="repeat">
+      <a:schemeClr val="dk1"/>
+    </dgm:txFillClrLst>
+    <dgm:txEffectClrLst/>
+  </dgm:styleLbl>
+  <dgm:styleLbl name="alignAcc1">
+    <dgm:fillClrLst meth="repeat">
+      <a:schemeClr val="lt1">
+        <a:alpha val="90000"/>
+      </a:schemeClr>
+    </dgm:fillClrLst>
+    <dgm:linClrLst meth="repeat">
+      <a:schemeClr val="accent1"/>
+    </dgm:linClrLst>
+    <dgm:effectClrLst/>
+    <dgm:txLinClrLst/>
+    <dgm:txFillClrLst meth="repeat">
+      <a:schemeClr val="dk1"/>
+    </dgm:txFillClrLst>
+    <dgm:txEffectClrLst/>
+  </dgm:styleLbl>
+  <dgm:styleLbl name="trAlignAcc1">
+    <dgm:fillClrLst meth="repeat">
+      <a:schemeClr val="lt1">
+        <a:alpha val="40000"/>
+      </a:schemeClr>
+    </dgm:fillClrLst>
+    <dgm:linClrLst meth="repeat">
+      <a:schemeClr val="accent1"/>
+    </dgm:linClrLst>
+    <dgm:effectClrLst/>
+    <dgm:txLinClrLst/>
+    <dgm:txFillClrLst meth="repeat">
+      <a:schemeClr val="dk1"/>
+    </dgm:txFillClrLst>
+    <dgm:txEffectClrLst/>
+  </dgm:styleLbl>
+  <dgm:styleLbl name="bgAcc1">
+    <dgm:fillClrLst meth="repeat">
+      <a:schemeClr val="lt1">
+        <a:alpha val="90000"/>
+      </a:schemeClr>
+    </dgm:fillClrLst>
+    <dgm:linClrLst meth="repeat">
+      <a:schemeClr val="accent1"/>
+    </dgm:linClrLst>
+    <dgm:effectClrLst/>
+    <dgm:txLinClrLst/>
+    <dgm:txFillClrLst meth="repeat">
+      <a:schemeClr val="dk1"/>
+    </dgm:txFillClrLst>
+    <dgm:txEffectClrLst/>
+  </dgm:styleLbl>
+  <dgm:styleLbl name="solidFgAcc1">
+    <dgm:fillClrLst meth="repeat">
+      <a:schemeClr val="lt1"/>
+    </dgm:fillClrLst>
+    <dgm:linClrLst meth="repeat">
+      <a:schemeClr val="accent1"/>
+    </dgm:linClrLst>
+    <dgm:effectClrLst/>
+    <dgm:txLinClrLst/>
+    <dgm:txFillClrLst meth="repeat">
+      <a:schemeClr val="dk1"/>
+    </dgm:txFillClrLst>
+    <dgm:txEffectClrLst/>
+  </dgm:styleLbl>
+  <dgm:styleLbl name="solidAlignAcc1">
+    <dgm:fillClrLst meth="repeat">
+      <a:schemeClr val="lt1"/>
+    </dgm:fillClrLst>
+    <dgm:linClrLst meth="repeat">
+      <a:schemeClr val="accent1"/>
+    </dgm:linClrLst>
+    <dgm:effectClrLst/>
+    <dgm:txLinClrLst/>
+    <dgm:txFillClrLst meth="repeat">
+      <a:schemeClr val="dk1"/>
+    </dgm:txFillClrLst>
+    <dgm:txEffectClrLst/>
+  </dgm:styleLbl>
+  <dgm:styleLbl name="solidBgAcc1">
+    <dgm:fillClrLst meth="repeat">
+      <a:schemeClr val="lt1"/>
+    </dgm:fillClrLst>
+    <dgm:linClrLst meth="repeat">
+      <a:schemeClr val="accent1"/>
+    </dgm:linClrLst>
+    <dgm:effectClrLst/>
+    <dgm:txLinClrLst/>
+    <dgm:txFillClrLst meth="repeat">
+      <a:schemeClr val="dk1"/>
+    </dgm:txFillClrLst>
+    <dgm:txEffectClrLst/>
+  </dgm:styleLbl>
+  <dgm:styleLbl name="fgAccFollowNode1">
+    <dgm:fillClrLst meth="repeat">
+      <a:schemeClr val="accent1">
+        <a:alpha val="90000"/>
+        <a:tint val="40000"/>
+      </a:schemeClr>
+    </dgm:fillClrLst>
+    <dgm:linClrLst meth="repeat">
+      <a:schemeClr val="accent1">
+        <a:alpha val="90000"/>
+        <a:tint val="40000"/>
+      </a:schemeClr>
+    </dgm:linClrLst>
+    <dgm:effectClrLst/>
+    <dgm:txLinClrLst/>
+    <dgm:txFillClrLst meth="repeat">
+      <a:schemeClr val="dk1"/>
+    </dgm:txFillClrLst>
+    <dgm:txEffectClrLst/>
+  </dgm:styleLbl>
+  <dgm:styleLbl name="alignAccFollowNode1">
+    <dgm:fillClrLst meth="repeat">
+      <a:schemeClr val="accent1">
+        <a:alpha val="90000"/>
+        <a:tint val="40000"/>
+      </a:schemeClr>
+    </dgm:fillClrLst>
+    <dgm:linClrLst meth="repeat">
+      <a:schemeClr val="accent1">
+        <a:alpha val="90000"/>
+        <a:tint val="40000"/>
+      </a:schemeClr>
+    </dgm:linClrLst>
+    <dgm:effectClrLst/>
+    <dgm:txLinClrLst/>
+    <dgm:txFillClrLst meth="repeat">
+      <a:schemeClr val="dk1"/>
+    </dgm:txFillClrLst>
+    <dgm:txEffectClrLst/>
+  </dgm:styleLbl>
+  <dgm:styleLbl name="bgAccFollowNode1">
+    <dgm:fillClrLst meth="repeat">
+      <a:schemeClr val="accent1">
+        <a:alpha val="90000"/>
+        <a:tint val="40000"/>
+      </a:schemeClr>
+    </dgm:fillClrLst>
+    <dgm:linClrLst meth="repeat">
+      <a:schemeClr val="accent1">
+        <a:alpha val="90000"/>
+        <a:tint val="40000"/>
+      </a:schemeClr>
+    </dgm:linClrLst>
+    <dgm:effectClrLst/>
+    <dgm:txLinClrLst/>
+    <dgm:txFillClrLst meth="repeat">
+      <a:schemeClr val="dk1"/>
+    </dgm:txFillClrLst>
+    <dgm:txEffectClrLst/>
+  </dgm:styleLbl>
+  <dgm:styleLbl name="fgAcc0">
+    <dgm:fillClrLst meth="repeat">
+      <a:schemeClr val="lt1">
+        <a:alpha val="90000"/>
+      </a:schemeClr>
+    </dgm:fillClrLst>
+    <dgm:linClrLst meth="repeat">
+      <a:schemeClr val="accent1"/>
+    </dgm:linClrLst>
+    <dgm:effectClrLst/>
+    <dgm:txLinClrLst/>
+    <dgm:txFillClrLst meth="repeat">
+      <a:schemeClr val="dk1"/>
+    </dgm:txFillClrLst>
+    <dgm:txEffectClrLst/>
+  </dgm:styleLbl>
+  <dgm:styleLbl name="fgAcc2">
+    <dgm:fillClrLst meth="repeat">
+      <a:schemeClr val="lt1">
+        <a:alpha val="90000"/>
+      </a:schemeClr>
+    </dgm:fillClrLst>
+    <dgm:linClrLst meth="repeat">
+      <a:schemeClr val="accent1"/>
+    </dgm:linClrLst>
+    <dgm:effectClrLst/>
+    <dgm:txLinClrLst/>
+    <dgm:txFillClrLst meth="repeat">
+      <a:schemeClr val="dk1"/>
+    </dgm:txFillClrLst>
+    <dgm:txEffectClrLst/>
+  </dgm:styleLbl>
+  <dgm:styleLbl name="fgAcc3">
+    <dgm:fillClrLst meth="repeat">
+      <a:schemeClr val="lt1">
+        <a:alpha val="90000"/>
+      </a:schemeClr>
+    </dgm:fillClrLst>
+    <dgm:linClrLst meth="repeat">
+      <a:schemeClr val="accent1"/>
+    </dgm:linClrLst>
+    <dgm:effectClrLst/>
+    <dgm:txLinClrLst/>
+    <dgm:txFillClrLst meth="repeat">
+      <a:schemeClr val="dk1"/>
+    </dgm:txFillClrLst>
+    <dgm:txEffectClrLst/>
+  </dgm:styleLbl>
+  <dgm:styleLbl name="fgAcc4">
+    <dgm:fillClrLst meth="repeat">
+      <a:schemeClr val="lt1">
+        <a:alpha val="90000"/>
+      </a:schemeClr>
+    </dgm:fillClrLst>
+    <dgm:linClrLst meth="repeat">
+      <a:schemeClr val="accent1"/>
+    </dgm:linClrLst>
+    <dgm:effectClrLst/>
+    <dgm:txLinClrLst/>
+    <dgm:txFillClrLst meth="repeat">
+      <a:schemeClr val="dk1"/>
+    </dgm:txFillClrLst>
+    <dgm:txEffectClrLst/>
+  </dgm:styleLbl>
+  <dgm:styleLbl name="bgShp">
+    <dgm:fillClrLst meth="repeat">
+      <a:schemeClr val="accent1">
+        <a:tint val="40000"/>
+      </a:schemeClr>
+    </dgm:fillClrLst>
+    <dgm:linClrLst meth="repeat">
+      <a:schemeClr val="accent1"/>
+    </dgm:linClrLst>
+    <dgm:effectClrLst/>
+    <dgm:txLinClrLst/>
+    <dgm:txFillClrLst meth="repeat">
+      <a:schemeClr val="dk1"/>
+    </dgm:txFillClrLst>
+    <dgm:txEffectClrLst/>
+  </dgm:styleLbl>
+  <dgm:styleLbl name="dkBgShp">
+    <dgm:fillClrLst meth="repeat">
+      <a:schemeClr val="accent1">
+        <a:shade val="80000"/>
+      </a:schemeClr>
+    </dgm:fillClrLst>
+    <dgm:linClrLst meth="repeat">
+      <a:schemeClr val="accent1"/>
+    </dgm:linClrLst>
+    <dgm:effectClrLst/>
+    <dgm:txLinClrLst/>
+    <dgm:txFillClrLst meth="repeat">
+      <a:schemeClr val="lt1"/>
+    </dgm:txFillClrLst>
+    <dgm:txEffectClrLst/>
+  </dgm:styleLbl>
+  <dgm:styleLbl name="trBgShp">
+    <dgm:fillClrLst meth="repeat">
+      <a:schemeClr val="accent1">
+        <a:tint val="50000"/>
+        <a:alpha val="40000"/>
+      </a:schemeClr>
+    </dgm:fillClrLst>
+    <dgm:linClrLst meth="repeat">
+      <a:schemeClr val="accent1"/>
+    </dgm:linClrLst>
+    <dgm:effectClrLst/>
+    <dgm:txLinClrLst/>
+    <dgm:txFillClrLst meth="repeat">
+      <a:schemeClr val="lt1"/>
+    </dgm:txFillClrLst>
+    <dgm:txEffectClrLst/>
+  </dgm:styleLbl>
+  <dgm:styleLbl name="fgShp">
+    <dgm:fillClrLst meth="repeat">
+      <a:schemeClr val="accent1">
+        <a:tint val="60000"/>
+      </a:schemeClr>
+    </dgm:fillClrLst>
+    <dgm:linClrLst meth="repeat">
+      <a:schemeClr val="lt1"/>
+    </dgm:linClrLst>
+    <dgm:effectClrLst/>
+    <dgm:txLinClrLst/>
+    <dgm:txFillClrLst meth="repeat">
+      <a:schemeClr val="dk1"/>
+    </dgm:txFillClrLst>
+    <dgm:txEffectClrLst/>
+  </dgm:styleLbl>
+  <dgm:styleLbl name="revTx">
+    <dgm:fillClrLst meth="repeat">
+      <a:schemeClr val="lt1">
+        <a:alpha val="0"/>
+      </a:schemeClr>
+    </dgm:fillClrLst>
+    <dgm:linClrLst meth="repeat">
+      <a:schemeClr val="dk1">
+        <a:alpha val="0"/>
+      </a:schemeClr>
+    </dgm:linClrLst>
+    <dgm:effectClrLst/>
+    <dgm:txLinClrLst/>
+    <dgm:txFillClrLst meth="repeat">
+      <a:schemeClr val="tx1"/>
+    </dgm:txFillClrLst>
+    <dgm:txEffectClrLst/>
+  </dgm:styleLbl>
+</dgm:colorsDef>
+</file>
+
+<file path=ppt/diagrams/data1.xml><?xml version="1.0" encoding="utf-8"?>
+<dgm:dataModel xmlns:dgm="http://schemas.openxmlformats.org/drawingml/2006/diagram" xmlns:a="http://schemas.openxmlformats.org/drawingml/2006/main">
+  <dgm:ptLst>
+    <dgm:pt modelId="{F7C5EFBD-5463-4CDB-8CFF-EE93A634B7AB}" type="doc">
+      <dgm:prSet loTypeId="urn:microsoft.com/office/officeart/2005/8/layout/cycle3" loCatId="cycle" qsTypeId="urn:microsoft.com/office/officeart/2005/8/quickstyle/simple1" qsCatId="simple" csTypeId="urn:microsoft.com/office/officeart/2005/8/colors/accent1_2" csCatId="accent1" phldr="1"/>
+      <dgm:spPr/>
+      <dgm:t>
+        <a:bodyPr/>
+        <a:lstStyle/>
+        <a:p>
+          <a:endParaRPr kumimoji="1" lang="ja-JP" altLang="en-US"/>
+        </a:p>
+      </dgm:t>
+    </dgm:pt>
+    <dgm:pt modelId="{62B4F315-FD3B-42A5-BF4E-BFA06B8791F8}">
+      <dgm:prSet phldrT="[テキスト]"/>
+      <dgm:spPr/>
+      <dgm:t>
+        <a:bodyPr/>
+        <a:lstStyle/>
+        <a:p>
+          <a:r>
+            <a:rPr kumimoji="1" lang="en-US" altLang="ja-JP" dirty="0"/>
+            <a:t>1</a:t>
+          </a:r>
+          <a:endParaRPr kumimoji="1" lang="ja-JP" altLang="en-US" dirty="0"/>
+        </a:p>
+      </dgm:t>
+    </dgm:pt>
+    <dgm:pt modelId="{703E5516-91ED-4B41-8D28-C4B4A9B7F45D}" type="parTrans" cxnId="{C7CFF46C-D996-4DC6-A054-748A6804EF21}">
+      <dgm:prSet/>
+      <dgm:spPr/>
+      <dgm:t>
+        <a:bodyPr/>
+        <a:lstStyle/>
+        <a:p>
+          <a:endParaRPr kumimoji="1" lang="ja-JP" altLang="en-US"/>
+        </a:p>
+      </dgm:t>
+    </dgm:pt>
+    <dgm:pt modelId="{6DC2D27C-74C2-4B59-BDBB-ECD93E641FF9}" type="sibTrans" cxnId="{C7CFF46C-D996-4DC6-A054-748A6804EF21}">
+      <dgm:prSet/>
+      <dgm:spPr/>
+      <dgm:t>
+        <a:bodyPr/>
+        <a:lstStyle/>
+        <a:p>
+          <a:endParaRPr kumimoji="1" lang="ja-JP" altLang="en-US"/>
+        </a:p>
+      </dgm:t>
+    </dgm:pt>
+    <dgm:pt modelId="{829CFF1E-E485-4DE9-B532-301E302CC60A}">
+      <dgm:prSet phldrT="[テキスト]"/>
+      <dgm:spPr/>
+      <dgm:t>
+        <a:bodyPr/>
+        <a:lstStyle/>
+        <a:p>
+          <a:r>
+            <a:rPr kumimoji="1" lang="en-US" altLang="ja-JP" dirty="0"/>
+            <a:t>2</a:t>
+          </a:r>
+          <a:endParaRPr kumimoji="1" lang="ja-JP" altLang="en-US" dirty="0"/>
+        </a:p>
+      </dgm:t>
+    </dgm:pt>
+    <dgm:pt modelId="{800972D0-B4C7-45C2-81D6-CB280000A8E5}" type="parTrans" cxnId="{821CAD4F-3753-4EA1-9DFE-3121D8DB49BB}">
+      <dgm:prSet/>
+      <dgm:spPr/>
+      <dgm:t>
+        <a:bodyPr/>
+        <a:lstStyle/>
+        <a:p>
+          <a:endParaRPr kumimoji="1" lang="ja-JP" altLang="en-US"/>
+        </a:p>
+      </dgm:t>
+    </dgm:pt>
+    <dgm:pt modelId="{3DA881E5-5A07-401F-BE8A-B3EB3A5741DA}" type="sibTrans" cxnId="{821CAD4F-3753-4EA1-9DFE-3121D8DB49BB}">
+      <dgm:prSet/>
+      <dgm:spPr/>
+      <dgm:t>
+        <a:bodyPr/>
+        <a:lstStyle/>
+        <a:p>
+          <a:endParaRPr kumimoji="1" lang="ja-JP" altLang="en-US"/>
+        </a:p>
+      </dgm:t>
+    </dgm:pt>
+    <dgm:pt modelId="{B93A2F3E-9725-4161-91D0-61505DA42616}">
+      <dgm:prSet phldrT="[テキスト]"/>
+      <dgm:spPr/>
+      <dgm:t>
+        <a:bodyPr/>
+        <a:lstStyle/>
+        <a:p>
+          <a:r>
+            <a:rPr kumimoji="1" lang="en-US" altLang="ja-JP" dirty="0"/>
+            <a:t>3</a:t>
+          </a:r>
+          <a:endParaRPr kumimoji="1" lang="ja-JP" altLang="en-US" dirty="0"/>
+        </a:p>
+      </dgm:t>
+    </dgm:pt>
+    <dgm:pt modelId="{0F98434E-5D0C-4F4D-B003-A902A004CDDE}" type="parTrans" cxnId="{DB994D3B-D260-4A67-A33D-BFD80EEED76B}">
+      <dgm:prSet/>
+      <dgm:spPr/>
+      <dgm:t>
+        <a:bodyPr/>
+        <a:lstStyle/>
+        <a:p>
+          <a:endParaRPr kumimoji="1" lang="ja-JP" altLang="en-US"/>
+        </a:p>
+      </dgm:t>
+    </dgm:pt>
+    <dgm:pt modelId="{DA323A34-959D-49E7-879E-670DB5A75BAD}" type="sibTrans" cxnId="{DB994D3B-D260-4A67-A33D-BFD80EEED76B}">
+      <dgm:prSet/>
+      <dgm:spPr/>
+      <dgm:t>
+        <a:bodyPr/>
+        <a:lstStyle/>
+        <a:p>
+          <a:endParaRPr kumimoji="1" lang="ja-JP" altLang="en-US"/>
+        </a:p>
+      </dgm:t>
+    </dgm:pt>
+    <dgm:pt modelId="{216888F6-C4EF-4861-96E4-6477558B5B26}">
+      <dgm:prSet phldrT="[テキスト]"/>
+      <dgm:spPr/>
+      <dgm:t>
+        <a:bodyPr/>
+        <a:lstStyle/>
+        <a:p>
+          <a:r>
+            <a:rPr kumimoji="1" lang="en-US" altLang="ja-JP" dirty="0"/>
+            <a:t>4</a:t>
+          </a:r>
+          <a:endParaRPr kumimoji="1" lang="ja-JP" altLang="en-US" dirty="0"/>
+        </a:p>
+      </dgm:t>
+    </dgm:pt>
+    <dgm:pt modelId="{B1B79112-1AE9-47E9-A29C-111E316B4F49}" type="parTrans" cxnId="{C8FBBE73-44A0-47EB-AE88-528357C067FC}">
+      <dgm:prSet/>
+      <dgm:spPr/>
+      <dgm:t>
+        <a:bodyPr/>
+        <a:lstStyle/>
+        <a:p>
+          <a:endParaRPr kumimoji="1" lang="ja-JP" altLang="en-US"/>
+        </a:p>
+      </dgm:t>
+    </dgm:pt>
+    <dgm:pt modelId="{113DFD94-73BE-47C8-A2C0-BE7D79D9890A}" type="sibTrans" cxnId="{C8FBBE73-44A0-47EB-AE88-528357C067FC}">
+      <dgm:prSet/>
+      <dgm:spPr/>
+      <dgm:t>
+        <a:bodyPr/>
+        <a:lstStyle/>
+        <a:p>
+          <a:endParaRPr kumimoji="1" lang="ja-JP" altLang="en-US"/>
+        </a:p>
+      </dgm:t>
+    </dgm:pt>
+    <dgm:pt modelId="{F5ECAF9E-824D-46E9-8FE3-4352369E703A}">
+      <dgm:prSet phldrT="[テキスト]"/>
+      <dgm:spPr/>
+      <dgm:t>
+        <a:bodyPr/>
+        <a:lstStyle/>
+        <a:p>
+          <a:r>
+            <a:rPr kumimoji="1" lang="en-US" altLang="ja-JP" dirty="0"/>
+            <a:t>5</a:t>
+          </a:r>
+          <a:endParaRPr kumimoji="1" lang="ja-JP" altLang="en-US" dirty="0"/>
+        </a:p>
+      </dgm:t>
+    </dgm:pt>
+    <dgm:pt modelId="{F2B31CBD-09DC-4B37-AF1B-CE0EE5025DB4}" type="parTrans" cxnId="{C0D83F16-63DD-450A-9F83-289DA5471F39}">
+      <dgm:prSet/>
+      <dgm:spPr/>
+      <dgm:t>
+        <a:bodyPr/>
+        <a:lstStyle/>
+        <a:p>
+          <a:endParaRPr kumimoji="1" lang="ja-JP" altLang="en-US"/>
+        </a:p>
+      </dgm:t>
+    </dgm:pt>
+    <dgm:pt modelId="{1927E378-7588-42DD-98B0-59B51D54D2AC}" type="sibTrans" cxnId="{C0D83F16-63DD-450A-9F83-289DA5471F39}">
+      <dgm:prSet/>
+      <dgm:spPr/>
+      <dgm:t>
+        <a:bodyPr/>
+        <a:lstStyle/>
+        <a:p>
+          <a:endParaRPr kumimoji="1" lang="ja-JP" altLang="en-US"/>
+        </a:p>
+      </dgm:t>
+    </dgm:pt>
+    <dgm:pt modelId="{263E01C0-FD71-4B23-8FB4-5FB65B229AE5}">
+      <dgm:prSet phldrT="[テキスト]"/>
+      <dgm:spPr/>
+      <dgm:t>
+        <a:bodyPr/>
+        <a:lstStyle/>
+        <a:p>
+          <a:r>
+            <a:rPr kumimoji="1" lang="en-US" altLang="ja-JP" dirty="0"/>
+            <a:t>6</a:t>
+          </a:r>
+          <a:endParaRPr kumimoji="1" lang="ja-JP" altLang="en-US" dirty="0"/>
+        </a:p>
+      </dgm:t>
+    </dgm:pt>
+    <dgm:pt modelId="{C476A05D-859C-4E33-93C7-87414124FE51}" type="parTrans" cxnId="{7FD71208-C61C-488C-A68C-9E96322BAB9B}">
+      <dgm:prSet/>
+      <dgm:spPr/>
+      <dgm:t>
+        <a:bodyPr/>
+        <a:lstStyle/>
+        <a:p>
+          <a:endParaRPr kumimoji="1" lang="ja-JP" altLang="en-US"/>
+        </a:p>
+      </dgm:t>
+    </dgm:pt>
+    <dgm:pt modelId="{0F7845B3-63D4-4223-98BE-3271C3EAC2FD}" type="sibTrans" cxnId="{7FD71208-C61C-488C-A68C-9E96322BAB9B}">
+      <dgm:prSet/>
+      <dgm:spPr/>
+      <dgm:t>
+        <a:bodyPr/>
+        <a:lstStyle/>
+        <a:p>
+          <a:endParaRPr kumimoji="1" lang="ja-JP" altLang="en-US"/>
+        </a:p>
+      </dgm:t>
+    </dgm:pt>
+    <dgm:pt modelId="{4BAFDF7E-3BC3-43B1-AAF7-38E1BC9F28E6}">
+      <dgm:prSet phldrT="[テキスト]"/>
+      <dgm:spPr/>
+      <dgm:t>
+        <a:bodyPr/>
+        <a:lstStyle/>
+        <a:p>
+          <a:r>
+            <a:rPr kumimoji="1" lang="en-US" altLang="ja-JP" dirty="0"/>
+            <a:t>7</a:t>
+          </a:r>
+          <a:endParaRPr kumimoji="1" lang="ja-JP" altLang="en-US" dirty="0"/>
+        </a:p>
+      </dgm:t>
+    </dgm:pt>
+    <dgm:pt modelId="{2362CCE9-178F-496B-8B1A-60304CC075C2}" type="parTrans" cxnId="{E098865D-3EF4-4D95-8927-99EE61553AE8}">
+      <dgm:prSet/>
+      <dgm:spPr/>
+      <dgm:t>
+        <a:bodyPr/>
+        <a:lstStyle/>
+        <a:p>
+          <a:endParaRPr kumimoji="1" lang="ja-JP" altLang="en-US"/>
+        </a:p>
+      </dgm:t>
+    </dgm:pt>
+    <dgm:pt modelId="{B92255DB-2346-4AAF-A1BC-5177C2AD4208}" type="sibTrans" cxnId="{E098865D-3EF4-4D95-8927-99EE61553AE8}">
+      <dgm:prSet/>
+      <dgm:spPr/>
+      <dgm:t>
+        <a:bodyPr/>
+        <a:lstStyle/>
+        <a:p>
+          <a:endParaRPr kumimoji="1" lang="ja-JP" altLang="en-US"/>
+        </a:p>
+      </dgm:t>
+    </dgm:pt>
+    <dgm:pt modelId="{89BFB83B-8D94-42B2-A244-A7C9305F0924}">
+      <dgm:prSet phldrT="[テキスト]"/>
+      <dgm:spPr/>
+      <dgm:t>
+        <a:bodyPr/>
+        <a:lstStyle/>
+        <a:p>
+          <a:r>
+            <a:rPr kumimoji="1" lang="en-US" altLang="ja-JP" dirty="0"/>
+            <a:t>8</a:t>
+          </a:r>
+          <a:endParaRPr kumimoji="1" lang="ja-JP" altLang="en-US" dirty="0"/>
+        </a:p>
+      </dgm:t>
+    </dgm:pt>
+    <dgm:pt modelId="{70363986-AB7E-4B65-B37F-C27BAA8A5683}" type="parTrans" cxnId="{461F18CC-5B0D-47A1-AFED-5C6AEB530B0F}">
+      <dgm:prSet/>
+      <dgm:spPr/>
+      <dgm:t>
+        <a:bodyPr/>
+        <a:lstStyle/>
+        <a:p>
+          <a:endParaRPr kumimoji="1" lang="ja-JP" altLang="en-US"/>
+        </a:p>
+      </dgm:t>
+    </dgm:pt>
+    <dgm:pt modelId="{6A5C1B6E-ECCD-471A-AAA8-AF582E3B2AF5}" type="sibTrans" cxnId="{461F18CC-5B0D-47A1-AFED-5C6AEB530B0F}">
+      <dgm:prSet/>
+      <dgm:spPr/>
+      <dgm:t>
+        <a:bodyPr/>
+        <a:lstStyle/>
+        <a:p>
+          <a:endParaRPr kumimoji="1" lang="ja-JP" altLang="en-US"/>
+        </a:p>
+      </dgm:t>
+    </dgm:pt>
+    <dgm:pt modelId="{DB39345B-E9F1-4DE0-B34E-471679C57D5F}">
+      <dgm:prSet phldrT="[テキスト]"/>
+      <dgm:spPr/>
+      <dgm:t>
+        <a:bodyPr/>
+        <a:lstStyle/>
+        <a:p>
+          <a:r>
+            <a:rPr kumimoji="1" lang="en-US" altLang="ja-JP" dirty="0"/>
+            <a:t>9</a:t>
+          </a:r>
+          <a:endParaRPr kumimoji="1" lang="ja-JP" altLang="en-US" dirty="0"/>
+        </a:p>
+      </dgm:t>
+    </dgm:pt>
+    <dgm:pt modelId="{ACD4CB3D-907A-4D36-AE5E-040C5BB335F9}" type="parTrans" cxnId="{54A6665F-317E-47E8-8C11-EC326E20B0F3}">
+      <dgm:prSet/>
+      <dgm:spPr/>
+      <dgm:t>
+        <a:bodyPr/>
+        <a:lstStyle/>
+        <a:p>
+          <a:endParaRPr kumimoji="1" lang="ja-JP" altLang="en-US"/>
+        </a:p>
+      </dgm:t>
+    </dgm:pt>
+    <dgm:pt modelId="{2DDAAF53-D165-4B59-A015-2E87F27C903A}" type="sibTrans" cxnId="{54A6665F-317E-47E8-8C11-EC326E20B0F3}">
+      <dgm:prSet/>
+      <dgm:spPr/>
+      <dgm:t>
+        <a:bodyPr/>
+        <a:lstStyle/>
+        <a:p>
+          <a:endParaRPr kumimoji="1" lang="ja-JP" altLang="en-US"/>
+        </a:p>
+      </dgm:t>
+    </dgm:pt>
+    <dgm:pt modelId="{9D51C0C9-CDF5-4F2F-AF89-18B1ECC17196}" type="pres">
+      <dgm:prSet presAssocID="{F7C5EFBD-5463-4CDB-8CFF-EE93A634B7AB}" presName="Name0" presStyleCnt="0">
+        <dgm:presLayoutVars>
+          <dgm:dir/>
+          <dgm:resizeHandles val="exact"/>
+        </dgm:presLayoutVars>
+      </dgm:prSet>
+      <dgm:spPr/>
+    </dgm:pt>
+    <dgm:pt modelId="{F4E95477-6384-44B8-9E54-3F421D5694AE}" type="pres">
+      <dgm:prSet presAssocID="{F7C5EFBD-5463-4CDB-8CFF-EE93A634B7AB}" presName="cycle" presStyleCnt="0"/>
+      <dgm:spPr/>
+    </dgm:pt>
+    <dgm:pt modelId="{AFA987D1-D90A-428D-996C-07CB0B57C012}" type="pres">
+      <dgm:prSet presAssocID="{62B4F315-FD3B-42A5-BF4E-BFA06B8791F8}" presName="nodeFirstNode" presStyleLbl="node1" presStyleIdx="0" presStyleCnt="9">
+        <dgm:presLayoutVars>
+          <dgm:bulletEnabled val="1"/>
+        </dgm:presLayoutVars>
+      </dgm:prSet>
+      <dgm:spPr/>
+    </dgm:pt>
+    <dgm:pt modelId="{24DB2683-561E-4097-9EC7-EFBB15D3BD1E}" type="pres">
+      <dgm:prSet presAssocID="{6DC2D27C-74C2-4B59-BDBB-ECD93E641FF9}" presName="sibTransFirstNode" presStyleLbl="bgShp" presStyleIdx="0" presStyleCnt="1"/>
+      <dgm:spPr/>
+    </dgm:pt>
+    <dgm:pt modelId="{5AD671D9-8673-414A-83B2-2F405639B25C}" type="pres">
+      <dgm:prSet presAssocID="{829CFF1E-E485-4DE9-B532-301E302CC60A}" presName="nodeFollowingNodes" presStyleLbl="node1" presStyleIdx="1" presStyleCnt="9">
+        <dgm:presLayoutVars>
+          <dgm:bulletEnabled val="1"/>
+        </dgm:presLayoutVars>
+      </dgm:prSet>
+      <dgm:spPr/>
+    </dgm:pt>
+    <dgm:pt modelId="{FBEC2146-B9FC-4A00-A4F0-F96DBAB7AAA3}" type="pres">
+      <dgm:prSet presAssocID="{B93A2F3E-9725-4161-91D0-61505DA42616}" presName="nodeFollowingNodes" presStyleLbl="node1" presStyleIdx="2" presStyleCnt="9">
+        <dgm:presLayoutVars>
+          <dgm:bulletEnabled val="1"/>
+        </dgm:presLayoutVars>
+      </dgm:prSet>
+      <dgm:spPr/>
+    </dgm:pt>
+    <dgm:pt modelId="{EBD1F666-6F54-40CB-98EE-4038FF9827FE}" type="pres">
+      <dgm:prSet presAssocID="{216888F6-C4EF-4861-96E4-6477558B5B26}" presName="nodeFollowingNodes" presStyleLbl="node1" presStyleIdx="3" presStyleCnt="9">
+        <dgm:presLayoutVars>
+          <dgm:bulletEnabled val="1"/>
+        </dgm:presLayoutVars>
+      </dgm:prSet>
+      <dgm:spPr/>
+    </dgm:pt>
+    <dgm:pt modelId="{39E8ED91-F71F-4325-83B9-79E79B9977F0}" type="pres">
+      <dgm:prSet presAssocID="{F5ECAF9E-824D-46E9-8FE3-4352369E703A}" presName="nodeFollowingNodes" presStyleLbl="node1" presStyleIdx="4" presStyleCnt="9">
+        <dgm:presLayoutVars>
+          <dgm:bulletEnabled val="1"/>
+        </dgm:presLayoutVars>
+      </dgm:prSet>
+      <dgm:spPr/>
+    </dgm:pt>
+    <dgm:pt modelId="{9C8DABAF-03A3-4404-A5A6-D2A9F88F1874}" type="pres">
+      <dgm:prSet presAssocID="{263E01C0-FD71-4B23-8FB4-5FB65B229AE5}" presName="nodeFollowingNodes" presStyleLbl="node1" presStyleIdx="5" presStyleCnt="9">
+        <dgm:presLayoutVars>
+          <dgm:bulletEnabled val="1"/>
+        </dgm:presLayoutVars>
+      </dgm:prSet>
+      <dgm:spPr/>
+    </dgm:pt>
+    <dgm:pt modelId="{8D70B406-1605-422E-93B0-8363A9E613F1}" type="pres">
+      <dgm:prSet presAssocID="{4BAFDF7E-3BC3-43B1-AAF7-38E1BC9F28E6}" presName="nodeFollowingNodes" presStyleLbl="node1" presStyleIdx="6" presStyleCnt="9">
+        <dgm:presLayoutVars>
+          <dgm:bulletEnabled val="1"/>
+        </dgm:presLayoutVars>
+      </dgm:prSet>
+      <dgm:spPr/>
+    </dgm:pt>
+    <dgm:pt modelId="{BA498E70-02E6-4F97-AA00-549F7FE611A7}" type="pres">
+      <dgm:prSet presAssocID="{89BFB83B-8D94-42B2-A244-A7C9305F0924}" presName="nodeFollowingNodes" presStyleLbl="node1" presStyleIdx="7" presStyleCnt="9">
+        <dgm:presLayoutVars>
+          <dgm:bulletEnabled val="1"/>
+        </dgm:presLayoutVars>
+      </dgm:prSet>
+      <dgm:spPr/>
+    </dgm:pt>
+    <dgm:pt modelId="{7C7E7F0C-9CA7-4826-A51D-4F27D8FA055C}" type="pres">
+      <dgm:prSet presAssocID="{DB39345B-E9F1-4DE0-B34E-471679C57D5F}" presName="nodeFollowingNodes" presStyleLbl="node1" presStyleIdx="8" presStyleCnt="9">
+        <dgm:presLayoutVars>
+          <dgm:bulletEnabled val="1"/>
+        </dgm:presLayoutVars>
+      </dgm:prSet>
+      <dgm:spPr/>
+    </dgm:pt>
+  </dgm:ptLst>
+  <dgm:cxnLst>
+    <dgm:cxn modelId="{7FD71208-C61C-488C-A68C-9E96322BAB9B}" srcId="{F7C5EFBD-5463-4CDB-8CFF-EE93A634B7AB}" destId="{263E01C0-FD71-4B23-8FB4-5FB65B229AE5}" srcOrd="5" destOrd="0" parTransId="{C476A05D-859C-4E33-93C7-87414124FE51}" sibTransId="{0F7845B3-63D4-4223-98BE-3271C3EAC2FD}"/>
+    <dgm:cxn modelId="{C0D83F16-63DD-450A-9F83-289DA5471F39}" srcId="{F7C5EFBD-5463-4CDB-8CFF-EE93A634B7AB}" destId="{F5ECAF9E-824D-46E9-8FE3-4352369E703A}" srcOrd="4" destOrd="0" parTransId="{F2B31CBD-09DC-4B37-AF1B-CE0EE5025DB4}" sibTransId="{1927E378-7588-42DD-98B0-59B51D54D2AC}"/>
+    <dgm:cxn modelId="{81FA8D35-A4F7-447E-9342-4988853720D9}" type="presOf" srcId="{216888F6-C4EF-4861-96E4-6477558B5B26}" destId="{EBD1F666-6F54-40CB-98EE-4038FF9827FE}" srcOrd="0" destOrd="0" presId="urn:microsoft.com/office/officeart/2005/8/layout/cycle3"/>
+    <dgm:cxn modelId="{C749EF38-D5EB-44B4-A608-CA16C316EDF0}" type="presOf" srcId="{62B4F315-FD3B-42A5-BF4E-BFA06B8791F8}" destId="{AFA987D1-D90A-428D-996C-07CB0B57C012}" srcOrd="0" destOrd="0" presId="urn:microsoft.com/office/officeart/2005/8/layout/cycle3"/>
+    <dgm:cxn modelId="{DB994D3B-D260-4A67-A33D-BFD80EEED76B}" srcId="{F7C5EFBD-5463-4CDB-8CFF-EE93A634B7AB}" destId="{B93A2F3E-9725-4161-91D0-61505DA42616}" srcOrd="2" destOrd="0" parTransId="{0F98434E-5D0C-4F4D-B003-A902A004CDDE}" sibTransId="{DA323A34-959D-49E7-879E-670DB5A75BAD}"/>
+    <dgm:cxn modelId="{E098865D-3EF4-4D95-8927-99EE61553AE8}" srcId="{F7C5EFBD-5463-4CDB-8CFF-EE93A634B7AB}" destId="{4BAFDF7E-3BC3-43B1-AAF7-38E1BC9F28E6}" srcOrd="6" destOrd="0" parTransId="{2362CCE9-178F-496B-8B1A-60304CC075C2}" sibTransId="{B92255DB-2346-4AAF-A1BC-5177C2AD4208}"/>
+    <dgm:cxn modelId="{54A6665F-317E-47E8-8C11-EC326E20B0F3}" srcId="{F7C5EFBD-5463-4CDB-8CFF-EE93A634B7AB}" destId="{DB39345B-E9F1-4DE0-B34E-471679C57D5F}" srcOrd="8" destOrd="0" parTransId="{ACD4CB3D-907A-4D36-AE5E-040C5BB335F9}" sibTransId="{2DDAAF53-D165-4B59-A015-2E87F27C903A}"/>
+    <dgm:cxn modelId="{51B25941-88D6-41A4-AF87-9BF1ACB2A4EC}" type="presOf" srcId="{DB39345B-E9F1-4DE0-B34E-471679C57D5F}" destId="{7C7E7F0C-9CA7-4826-A51D-4F27D8FA055C}" srcOrd="0" destOrd="0" presId="urn:microsoft.com/office/officeart/2005/8/layout/cycle3"/>
+    <dgm:cxn modelId="{C7CFF46C-D996-4DC6-A054-748A6804EF21}" srcId="{F7C5EFBD-5463-4CDB-8CFF-EE93A634B7AB}" destId="{62B4F315-FD3B-42A5-BF4E-BFA06B8791F8}" srcOrd="0" destOrd="0" parTransId="{703E5516-91ED-4B41-8D28-C4B4A9B7F45D}" sibTransId="{6DC2D27C-74C2-4B59-BDBB-ECD93E641FF9}"/>
+    <dgm:cxn modelId="{821CAD4F-3753-4EA1-9DFE-3121D8DB49BB}" srcId="{F7C5EFBD-5463-4CDB-8CFF-EE93A634B7AB}" destId="{829CFF1E-E485-4DE9-B532-301E302CC60A}" srcOrd="1" destOrd="0" parTransId="{800972D0-B4C7-45C2-81D6-CB280000A8E5}" sibTransId="{3DA881E5-5A07-401F-BE8A-B3EB3A5741DA}"/>
+    <dgm:cxn modelId="{C8FBBE73-44A0-47EB-AE88-528357C067FC}" srcId="{F7C5EFBD-5463-4CDB-8CFF-EE93A634B7AB}" destId="{216888F6-C4EF-4861-96E4-6477558B5B26}" srcOrd="3" destOrd="0" parTransId="{B1B79112-1AE9-47E9-A29C-111E316B4F49}" sibTransId="{113DFD94-73BE-47C8-A2C0-BE7D79D9890A}"/>
+    <dgm:cxn modelId="{68387056-3382-4B0A-8492-BB9F03F0C4AB}" type="presOf" srcId="{B93A2F3E-9725-4161-91D0-61505DA42616}" destId="{FBEC2146-B9FC-4A00-A4F0-F96DBAB7AAA3}" srcOrd="0" destOrd="0" presId="urn:microsoft.com/office/officeart/2005/8/layout/cycle3"/>
+    <dgm:cxn modelId="{59BCCFAD-5CD9-4ACF-AE4A-53EBB2627DA1}" type="presOf" srcId="{6DC2D27C-74C2-4B59-BDBB-ECD93E641FF9}" destId="{24DB2683-561E-4097-9EC7-EFBB15D3BD1E}" srcOrd="0" destOrd="0" presId="urn:microsoft.com/office/officeart/2005/8/layout/cycle3"/>
+    <dgm:cxn modelId="{461F18CC-5B0D-47A1-AFED-5C6AEB530B0F}" srcId="{F7C5EFBD-5463-4CDB-8CFF-EE93A634B7AB}" destId="{89BFB83B-8D94-42B2-A244-A7C9305F0924}" srcOrd="7" destOrd="0" parTransId="{70363986-AB7E-4B65-B37F-C27BAA8A5683}" sibTransId="{6A5C1B6E-ECCD-471A-AAA8-AF582E3B2AF5}"/>
+    <dgm:cxn modelId="{914C32CE-4D3D-4E6A-B058-C0C7D3F6AC8C}" type="presOf" srcId="{F5ECAF9E-824D-46E9-8FE3-4352369E703A}" destId="{39E8ED91-F71F-4325-83B9-79E79B9977F0}" srcOrd="0" destOrd="0" presId="urn:microsoft.com/office/officeart/2005/8/layout/cycle3"/>
+    <dgm:cxn modelId="{849CB9CF-7C93-461D-98DD-05FF6BCE2816}" type="presOf" srcId="{F7C5EFBD-5463-4CDB-8CFF-EE93A634B7AB}" destId="{9D51C0C9-CDF5-4F2F-AF89-18B1ECC17196}" srcOrd="0" destOrd="0" presId="urn:microsoft.com/office/officeart/2005/8/layout/cycle3"/>
+    <dgm:cxn modelId="{FB501FD1-2AD5-4801-B557-12BF721CBE11}" type="presOf" srcId="{829CFF1E-E485-4DE9-B532-301E302CC60A}" destId="{5AD671D9-8673-414A-83B2-2F405639B25C}" srcOrd="0" destOrd="0" presId="urn:microsoft.com/office/officeart/2005/8/layout/cycle3"/>
+    <dgm:cxn modelId="{4532A2D6-0A5D-42AA-8E65-25B63DA7A0AB}" type="presOf" srcId="{263E01C0-FD71-4B23-8FB4-5FB65B229AE5}" destId="{9C8DABAF-03A3-4404-A5A6-D2A9F88F1874}" srcOrd="0" destOrd="0" presId="urn:microsoft.com/office/officeart/2005/8/layout/cycle3"/>
+    <dgm:cxn modelId="{D5CBDCE1-9E35-484B-8FB9-F5B9AE9E323C}" type="presOf" srcId="{4BAFDF7E-3BC3-43B1-AAF7-38E1BC9F28E6}" destId="{8D70B406-1605-422E-93B0-8363A9E613F1}" srcOrd="0" destOrd="0" presId="urn:microsoft.com/office/officeart/2005/8/layout/cycle3"/>
+    <dgm:cxn modelId="{EE1CABE6-9889-4EFE-A96C-5FED06594F41}" type="presOf" srcId="{89BFB83B-8D94-42B2-A244-A7C9305F0924}" destId="{BA498E70-02E6-4F97-AA00-549F7FE611A7}" srcOrd="0" destOrd="0" presId="urn:microsoft.com/office/officeart/2005/8/layout/cycle3"/>
+    <dgm:cxn modelId="{0F77EF04-B3E2-4C63-AE0D-0F5CECCB7149}" type="presParOf" srcId="{9D51C0C9-CDF5-4F2F-AF89-18B1ECC17196}" destId="{F4E95477-6384-44B8-9E54-3F421D5694AE}" srcOrd="0" destOrd="0" presId="urn:microsoft.com/office/officeart/2005/8/layout/cycle3"/>
+    <dgm:cxn modelId="{5FBEB6DF-AF87-43F5-BA3E-61D9E7AADCD2}" type="presParOf" srcId="{F4E95477-6384-44B8-9E54-3F421D5694AE}" destId="{AFA987D1-D90A-428D-996C-07CB0B57C012}" srcOrd="0" destOrd="0" presId="urn:microsoft.com/office/officeart/2005/8/layout/cycle3"/>
+    <dgm:cxn modelId="{E54D664E-4434-4679-AF23-589659D040BE}" type="presParOf" srcId="{F4E95477-6384-44B8-9E54-3F421D5694AE}" destId="{24DB2683-561E-4097-9EC7-EFBB15D3BD1E}" srcOrd="1" destOrd="0" presId="urn:microsoft.com/office/officeart/2005/8/layout/cycle3"/>
+    <dgm:cxn modelId="{828CFA3F-C58B-4285-B867-A29D4E97910A}" type="presParOf" srcId="{F4E95477-6384-44B8-9E54-3F421D5694AE}" destId="{5AD671D9-8673-414A-83B2-2F405639B25C}" srcOrd="2" destOrd="0" presId="urn:microsoft.com/office/officeart/2005/8/layout/cycle3"/>
+    <dgm:cxn modelId="{7BFBAFBD-F91E-4207-9172-91D702661AB5}" type="presParOf" srcId="{F4E95477-6384-44B8-9E54-3F421D5694AE}" destId="{FBEC2146-B9FC-4A00-A4F0-F96DBAB7AAA3}" srcOrd="3" destOrd="0" presId="urn:microsoft.com/office/officeart/2005/8/layout/cycle3"/>
+    <dgm:cxn modelId="{B808E53B-BE99-4B12-A8E2-1F1414E1AA2D}" type="presParOf" srcId="{F4E95477-6384-44B8-9E54-3F421D5694AE}" destId="{EBD1F666-6F54-40CB-98EE-4038FF9827FE}" srcOrd="4" destOrd="0" presId="urn:microsoft.com/office/officeart/2005/8/layout/cycle3"/>
+    <dgm:cxn modelId="{0B5FADEA-D605-46FF-9A47-1905AAA01D78}" type="presParOf" srcId="{F4E95477-6384-44B8-9E54-3F421D5694AE}" destId="{39E8ED91-F71F-4325-83B9-79E79B9977F0}" srcOrd="5" destOrd="0" presId="urn:microsoft.com/office/officeart/2005/8/layout/cycle3"/>
+    <dgm:cxn modelId="{01C8075C-F473-46D8-AFA6-6C0BEA379E12}" type="presParOf" srcId="{F4E95477-6384-44B8-9E54-3F421D5694AE}" destId="{9C8DABAF-03A3-4404-A5A6-D2A9F88F1874}" srcOrd="6" destOrd="0" presId="urn:microsoft.com/office/officeart/2005/8/layout/cycle3"/>
+    <dgm:cxn modelId="{237707DC-4A36-4D03-AD28-B71674C97E15}" type="presParOf" srcId="{F4E95477-6384-44B8-9E54-3F421D5694AE}" destId="{8D70B406-1605-422E-93B0-8363A9E613F1}" srcOrd="7" destOrd="0" presId="urn:microsoft.com/office/officeart/2005/8/layout/cycle3"/>
+    <dgm:cxn modelId="{B45A97E5-528A-4655-86F7-3913C6FC021A}" type="presParOf" srcId="{F4E95477-6384-44B8-9E54-3F421D5694AE}" destId="{BA498E70-02E6-4F97-AA00-549F7FE611A7}" srcOrd="8" destOrd="0" presId="urn:microsoft.com/office/officeart/2005/8/layout/cycle3"/>
+    <dgm:cxn modelId="{FD1BF8D3-F12E-4FBC-964B-997B4B2C9418}" type="presParOf" srcId="{F4E95477-6384-44B8-9E54-3F421D5694AE}" destId="{7C7E7F0C-9CA7-4826-A51D-4F27D8FA055C}" srcOrd="9" destOrd="0" presId="urn:microsoft.com/office/officeart/2005/8/layout/cycle3"/>
+  </dgm:cxnLst>
+  <dgm:bg/>
+  <dgm:whole/>
+  <dgm:extLst>
+    <a:ext uri="http://schemas.microsoft.com/office/drawing/2008/diagram">
+      <dsp:dataModelExt xmlns:dsp="http://schemas.microsoft.com/office/drawing/2008/diagram" relId="rId6" minVer="http://schemas.openxmlformats.org/drawingml/2006/diagram"/>
+    </a:ext>
+  </dgm:extLst>
+</dgm:dataModel>
+</file>
+
+<file path=ppt/diagrams/data2.xml><?xml version="1.0" encoding="utf-8"?>
+<dgm:dataModel xmlns:dgm="http://schemas.openxmlformats.org/drawingml/2006/diagram" xmlns:a="http://schemas.openxmlformats.org/drawingml/2006/main">
+  <dgm:ptLst>
+    <dgm:pt modelId="{BE40067E-2CB6-43FC-9168-727125824DAE}" type="doc">
+      <dgm:prSet loTypeId="urn:microsoft.com/office/officeart/2005/8/layout/StepDownProcess" loCatId="process" qsTypeId="urn:microsoft.com/office/officeart/2005/8/quickstyle/simple1" qsCatId="simple" csTypeId="urn:microsoft.com/office/officeart/2005/8/colors/accent1_2" csCatId="accent1" phldr="1"/>
+      <dgm:spPr/>
+      <dgm:t>
+        <a:bodyPr/>
+        <a:lstStyle/>
+        <a:p>
+          <a:endParaRPr kumimoji="1" lang="ja-JP" altLang="en-US"/>
+        </a:p>
+      </dgm:t>
+    </dgm:pt>
+    <dgm:pt modelId="{B1F87349-9B07-498D-82A9-C7118A8E41EC}">
+      <dgm:prSet phldrT="[テキスト]"/>
+      <dgm:spPr/>
+      <dgm:t>
+        <a:bodyPr/>
+        <a:lstStyle/>
+        <a:p>
+          <a:r>
+            <a:rPr kumimoji="1" lang="en-US" altLang="ja-JP" dirty="0" err="1"/>
+            <a:t>listHead</a:t>
+          </a:r>
+          <a:endParaRPr kumimoji="1" lang="ja-JP" altLang="en-US" dirty="0"/>
+        </a:p>
+      </dgm:t>
+    </dgm:pt>
+    <dgm:pt modelId="{F93819F6-E6E3-4A71-975B-BFECC17B6DDA}" type="parTrans" cxnId="{E0ACA809-C0D6-49B3-BF30-ADE3EE6C5937}">
+      <dgm:prSet/>
+      <dgm:spPr/>
+      <dgm:t>
+        <a:bodyPr/>
+        <a:lstStyle/>
+        <a:p>
+          <a:endParaRPr kumimoji="1" lang="ja-JP" altLang="en-US"/>
+        </a:p>
+      </dgm:t>
+    </dgm:pt>
+    <dgm:pt modelId="{30D6E476-2097-4F8E-9414-DFD6D2C2BA08}" type="sibTrans" cxnId="{E0ACA809-C0D6-49B3-BF30-ADE3EE6C5937}">
+      <dgm:prSet/>
+      <dgm:spPr/>
+      <dgm:t>
+        <a:bodyPr/>
+        <a:lstStyle/>
+        <a:p>
+          <a:endParaRPr kumimoji="1" lang="ja-JP" altLang="en-US"/>
+        </a:p>
+      </dgm:t>
+    </dgm:pt>
+    <dgm:pt modelId="{976E0715-C3F2-4256-9DFD-2D6BFBDC6F78}">
+      <dgm:prSet phldrT="[テキスト]"/>
+      <dgm:spPr/>
+      <dgm:t>
+        <a:bodyPr/>
+        <a:lstStyle/>
+        <a:p>
+          <a:r>
+            <a:rPr kumimoji="1" lang="ja-JP" altLang="en-US" dirty="0"/>
+            <a:t>次への参照</a:t>
+          </a:r>
+        </a:p>
+      </dgm:t>
+    </dgm:pt>
+    <dgm:pt modelId="{50E6C498-0218-4FF2-AD2C-88F66086BE8B}" type="parTrans" cxnId="{E1138A47-C4B3-4671-8FD6-D2D5311A7D2F}">
+      <dgm:prSet/>
+      <dgm:spPr/>
+      <dgm:t>
+        <a:bodyPr/>
+        <a:lstStyle/>
+        <a:p>
+          <a:endParaRPr kumimoji="1" lang="ja-JP" altLang="en-US"/>
+        </a:p>
+      </dgm:t>
+    </dgm:pt>
+    <dgm:pt modelId="{9EDF1B42-87A3-45A8-B5F5-FC8A5086D838}" type="sibTrans" cxnId="{E1138A47-C4B3-4671-8FD6-D2D5311A7D2F}">
+      <dgm:prSet/>
+      <dgm:spPr/>
+      <dgm:t>
+        <a:bodyPr/>
+        <a:lstStyle/>
+        <a:p>
+          <a:endParaRPr kumimoji="1" lang="ja-JP" altLang="en-US"/>
+        </a:p>
+      </dgm:t>
+    </dgm:pt>
+    <dgm:pt modelId="{69C894C4-415B-4E38-BCB7-7B179E122200}">
+      <dgm:prSet phldrT="[テキスト]"/>
+      <dgm:spPr/>
+      <dgm:t>
+        <a:bodyPr/>
+        <a:lstStyle/>
+        <a:p>
+          <a:r>
+            <a:rPr kumimoji="1" lang="ja-JP" altLang="en-US" dirty="0"/>
+            <a:t>要素</a:t>
+          </a:r>
+          <a:r>
+            <a:rPr kumimoji="1" lang="en-US" altLang="ja-JP" dirty="0"/>
+            <a:t>2</a:t>
+          </a:r>
+          <a:endParaRPr kumimoji="1" lang="ja-JP" altLang="en-US" dirty="0"/>
+        </a:p>
+      </dgm:t>
+    </dgm:pt>
+    <dgm:pt modelId="{3FF287AC-E957-4057-879C-D4809D065BB3}" type="parTrans" cxnId="{570483C0-FFD2-4BB2-A352-E155BB710336}">
+      <dgm:prSet/>
+      <dgm:spPr/>
+      <dgm:t>
+        <a:bodyPr/>
+        <a:lstStyle/>
+        <a:p>
+          <a:endParaRPr kumimoji="1" lang="ja-JP" altLang="en-US"/>
+        </a:p>
+      </dgm:t>
+    </dgm:pt>
+    <dgm:pt modelId="{0CD279FF-EAC8-40A2-8A29-1DDBAB6786A8}" type="sibTrans" cxnId="{570483C0-FFD2-4BB2-A352-E155BB710336}">
+      <dgm:prSet/>
+      <dgm:spPr/>
+      <dgm:t>
+        <a:bodyPr/>
+        <a:lstStyle/>
+        <a:p>
+          <a:endParaRPr kumimoji="1" lang="ja-JP" altLang="en-US"/>
+        </a:p>
+      </dgm:t>
+    </dgm:pt>
+    <dgm:pt modelId="{770431F9-8030-4BBD-992A-E47D102BBAD4}">
+      <dgm:prSet phldrT="[テキスト]"/>
+      <dgm:spPr/>
+      <dgm:t>
+        <a:bodyPr/>
+        <a:lstStyle/>
+        <a:p>
+          <a:r>
+            <a:rPr kumimoji="1" lang="ja-JP" altLang="en-US" dirty="0"/>
+            <a:t>次への参照</a:t>
+          </a:r>
+        </a:p>
+      </dgm:t>
+    </dgm:pt>
+    <dgm:pt modelId="{93AF671D-C7B0-4E5D-BA8B-4ABF117A4B20}" type="parTrans" cxnId="{E52A23B1-2E0C-4882-9B19-82956DD85322}">
+      <dgm:prSet/>
+      <dgm:spPr/>
+      <dgm:t>
+        <a:bodyPr/>
+        <a:lstStyle/>
+        <a:p>
+          <a:endParaRPr kumimoji="1" lang="ja-JP" altLang="en-US"/>
+        </a:p>
+      </dgm:t>
+    </dgm:pt>
+    <dgm:pt modelId="{7E15F223-1F36-419D-BD0E-326F52523E83}" type="sibTrans" cxnId="{E52A23B1-2E0C-4882-9B19-82956DD85322}">
+      <dgm:prSet/>
+      <dgm:spPr/>
+      <dgm:t>
+        <a:bodyPr/>
+        <a:lstStyle/>
+        <a:p>
+          <a:endParaRPr kumimoji="1" lang="ja-JP" altLang="en-US"/>
+        </a:p>
+      </dgm:t>
+    </dgm:pt>
+    <dgm:pt modelId="{9537BDD0-29B0-4BF7-B8E2-819F8108367B}">
+      <dgm:prSet phldrT="[テキスト]"/>
+      <dgm:spPr/>
+      <dgm:t>
+        <a:bodyPr/>
+        <a:lstStyle/>
+        <a:p>
+          <a:r>
+            <a:rPr kumimoji="1" lang="ja-JP" altLang="en-US" dirty="0"/>
+            <a:t>要素</a:t>
+          </a:r>
+          <a:r>
+            <a:rPr kumimoji="1" lang="en-US" altLang="ja-JP" dirty="0"/>
+            <a:t>3</a:t>
+          </a:r>
+          <a:endParaRPr kumimoji="1" lang="ja-JP" altLang="en-US" dirty="0"/>
+        </a:p>
+      </dgm:t>
+    </dgm:pt>
+    <dgm:pt modelId="{DBE0D277-877D-4FC3-BFC7-EA10D7FB9435}" type="parTrans" cxnId="{92B2653B-AD21-4256-8580-5B19AEF835E8}">
+      <dgm:prSet/>
+      <dgm:spPr/>
+      <dgm:t>
+        <a:bodyPr/>
+        <a:lstStyle/>
+        <a:p>
+          <a:endParaRPr kumimoji="1" lang="ja-JP" altLang="en-US"/>
+        </a:p>
+      </dgm:t>
+    </dgm:pt>
+    <dgm:pt modelId="{24CDEA99-52CB-4F5F-9DBF-8FFF49D38D4F}" type="sibTrans" cxnId="{92B2653B-AD21-4256-8580-5B19AEF835E8}">
+      <dgm:prSet/>
+      <dgm:spPr/>
+      <dgm:t>
+        <a:bodyPr/>
+        <a:lstStyle/>
+        <a:p>
+          <a:endParaRPr kumimoji="1" lang="ja-JP" altLang="en-US"/>
+        </a:p>
+      </dgm:t>
+    </dgm:pt>
+    <dgm:pt modelId="{A5534216-3EF7-4A78-9927-3E1C5399D87D}">
+      <dgm:prSet phldrT="[テキスト]"/>
+      <dgm:spPr/>
+      <dgm:t>
+        <a:bodyPr/>
+        <a:lstStyle/>
+        <a:p>
+          <a:r>
+            <a:rPr kumimoji="1" lang="ja-JP" altLang="en-US" dirty="0"/>
+            <a:t>未定義</a:t>
+          </a:r>
+        </a:p>
+      </dgm:t>
+    </dgm:pt>
+    <dgm:pt modelId="{C2FB9871-5DF8-41CB-9FDC-2A8A6E9B6B90}" type="parTrans" cxnId="{A4F70BEC-CCDE-4729-9B9B-3B702A6F3D82}">
+      <dgm:prSet/>
+      <dgm:spPr/>
+      <dgm:t>
+        <a:bodyPr/>
+        <a:lstStyle/>
+        <a:p>
+          <a:endParaRPr kumimoji="1" lang="ja-JP" altLang="en-US"/>
+        </a:p>
+      </dgm:t>
+    </dgm:pt>
+    <dgm:pt modelId="{67675BDF-48EE-4EFB-9220-A97BD4E43EDD}" type="sibTrans" cxnId="{A4F70BEC-CCDE-4729-9B9B-3B702A6F3D82}">
+      <dgm:prSet/>
+      <dgm:spPr/>
+      <dgm:t>
+        <a:bodyPr/>
+        <a:lstStyle/>
+        <a:p>
+          <a:endParaRPr kumimoji="1" lang="ja-JP" altLang="en-US"/>
+        </a:p>
+      </dgm:t>
+    </dgm:pt>
+    <dgm:pt modelId="{480989EA-3328-4598-9BF9-0ABE16E72D22}" type="pres">
+      <dgm:prSet presAssocID="{BE40067E-2CB6-43FC-9168-727125824DAE}" presName="rootnode" presStyleCnt="0">
+        <dgm:presLayoutVars>
+          <dgm:chMax/>
+          <dgm:chPref/>
+          <dgm:dir/>
+          <dgm:animLvl val="lvl"/>
+        </dgm:presLayoutVars>
+      </dgm:prSet>
+      <dgm:spPr/>
+    </dgm:pt>
+    <dgm:pt modelId="{6F692D65-14A7-4A8C-9461-41B717D98BDE}" type="pres">
+      <dgm:prSet presAssocID="{B1F87349-9B07-498D-82A9-C7118A8E41EC}" presName="composite" presStyleCnt="0"/>
+      <dgm:spPr/>
+    </dgm:pt>
+    <dgm:pt modelId="{D1BBD500-0C5A-4E43-A630-CC93AED36B62}" type="pres">
+      <dgm:prSet presAssocID="{B1F87349-9B07-498D-82A9-C7118A8E41EC}" presName="bentUpArrow1" presStyleLbl="alignImgPlace1" presStyleIdx="0" presStyleCnt="2"/>
+      <dgm:spPr/>
+    </dgm:pt>
+    <dgm:pt modelId="{6706FD71-5EE3-46B5-91FC-5731B449432C}" type="pres">
+      <dgm:prSet presAssocID="{B1F87349-9B07-498D-82A9-C7118A8E41EC}" presName="ParentText" presStyleLbl="node1" presStyleIdx="0" presStyleCnt="3">
+        <dgm:presLayoutVars>
+          <dgm:chMax val="1"/>
+          <dgm:chPref val="1"/>
+          <dgm:bulletEnabled val="1"/>
+        </dgm:presLayoutVars>
+      </dgm:prSet>
+      <dgm:spPr/>
+    </dgm:pt>
+    <dgm:pt modelId="{884CA250-0DFB-4E7F-8C72-6D0A82B70C39}" type="pres">
+      <dgm:prSet presAssocID="{B1F87349-9B07-498D-82A9-C7118A8E41EC}" presName="ChildText" presStyleLbl="revTx" presStyleIdx="0" presStyleCnt="3">
+        <dgm:presLayoutVars>
+          <dgm:chMax val="0"/>
+          <dgm:chPref val="0"/>
+          <dgm:bulletEnabled val="1"/>
+        </dgm:presLayoutVars>
+      </dgm:prSet>
+      <dgm:spPr/>
+    </dgm:pt>
+    <dgm:pt modelId="{C63AF95A-3E2A-4EC5-B405-4E83BB0BFD40}" type="pres">
+      <dgm:prSet presAssocID="{30D6E476-2097-4F8E-9414-DFD6D2C2BA08}" presName="sibTrans" presStyleCnt="0"/>
+      <dgm:spPr/>
+    </dgm:pt>
+    <dgm:pt modelId="{12892DAE-6213-41AC-8519-957D944AF98A}" type="pres">
+      <dgm:prSet presAssocID="{69C894C4-415B-4E38-BCB7-7B179E122200}" presName="composite" presStyleCnt="0"/>
+      <dgm:spPr/>
+    </dgm:pt>
+    <dgm:pt modelId="{68104B2B-82FF-4DD5-A0D5-5C1B93E54737}" type="pres">
+      <dgm:prSet presAssocID="{69C894C4-415B-4E38-BCB7-7B179E122200}" presName="bentUpArrow1" presStyleLbl="alignImgPlace1" presStyleIdx="1" presStyleCnt="2"/>
+      <dgm:spPr/>
+    </dgm:pt>
+    <dgm:pt modelId="{0D1F8386-0D4D-4B8C-9554-7A5607658609}" type="pres">
+      <dgm:prSet presAssocID="{69C894C4-415B-4E38-BCB7-7B179E122200}" presName="ParentText" presStyleLbl="node1" presStyleIdx="1" presStyleCnt="3">
+        <dgm:presLayoutVars>
+          <dgm:chMax val="1"/>
+          <dgm:chPref val="1"/>
+          <dgm:bulletEnabled val="1"/>
+        </dgm:presLayoutVars>
+      </dgm:prSet>
+      <dgm:spPr/>
+    </dgm:pt>
+    <dgm:pt modelId="{EAB6310A-69A0-43AB-AB1F-5C172284DF98}" type="pres">
+      <dgm:prSet presAssocID="{69C894C4-415B-4E38-BCB7-7B179E122200}" presName="ChildText" presStyleLbl="revTx" presStyleIdx="1" presStyleCnt="3">
+        <dgm:presLayoutVars>
+          <dgm:chMax val="0"/>
+          <dgm:chPref val="0"/>
+          <dgm:bulletEnabled val="1"/>
+        </dgm:presLayoutVars>
+      </dgm:prSet>
+      <dgm:spPr/>
+    </dgm:pt>
+    <dgm:pt modelId="{8DB39584-6E59-4BFA-A599-1A511DA0056F}" type="pres">
+      <dgm:prSet presAssocID="{0CD279FF-EAC8-40A2-8A29-1DDBAB6786A8}" presName="sibTrans" presStyleCnt="0"/>
+      <dgm:spPr/>
+    </dgm:pt>
+    <dgm:pt modelId="{B6503FDD-13C9-43B7-8A95-F250C5C9E841}" type="pres">
+      <dgm:prSet presAssocID="{9537BDD0-29B0-4BF7-B8E2-819F8108367B}" presName="composite" presStyleCnt="0"/>
+      <dgm:spPr/>
+    </dgm:pt>
+    <dgm:pt modelId="{D7070662-D8F1-46DB-AF4A-CC922C5CEE7F}" type="pres">
+      <dgm:prSet presAssocID="{9537BDD0-29B0-4BF7-B8E2-819F8108367B}" presName="ParentText" presStyleLbl="node1" presStyleIdx="2" presStyleCnt="3">
+        <dgm:presLayoutVars>
+          <dgm:chMax val="1"/>
+          <dgm:chPref val="1"/>
+          <dgm:bulletEnabled val="1"/>
+        </dgm:presLayoutVars>
+      </dgm:prSet>
+      <dgm:spPr/>
+    </dgm:pt>
+    <dgm:pt modelId="{47AC1F21-9C96-426C-AD4C-F99814E613A9}" type="pres">
+      <dgm:prSet presAssocID="{9537BDD0-29B0-4BF7-B8E2-819F8108367B}" presName="FinalChildText" presStyleLbl="revTx" presStyleIdx="2" presStyleCnt="3">
+        <dgm:presLayoutVars>
+          <dgm:chMax val="0"/>
+          <dgm:chPref val="0"/>
+          <dgm:bulletEnabled val="1"/>
+        </dgm:presLayoutVars>
+      </dgm:prSet>
+      <dgm:spPr/>
+    </dgm:pt>
+  </dgm:ptLst>
+  <dgm:cxnLst>
+    <dgm:cxn modelId="{E0ACA809-C0D6-49B3-BF30-ADE3EE6C5937}" srcId="{BE40067E-2CB6-43FC-9168-727125824DAE}" destId="{B1F87349-9B07-498D-82A9-C7118A8E41EC}" srcOrd="0" destOrd="0" parTransId="{F93819F6-E6E3-4A71-975B-BFECC17B6DDA}" sibTransId="{30D6E476-2097-4F8E-9414-DFD6D2C2BA08}"/>
+    <dgm:cxn modelId="{C9B41A29-A60A-4364-8BC4-A9FCC479EEF6}" type="presOf" srcId="{69C894C4-415B-4E38-BCB7-7B179E122200}" destId="{0D1F8386-0D4D-4B8C-9554-7A5607658609}" srcOrd="0" destOrd="0" presId="urn:microsoft.com/office/officeart/2005/8/layout/StepDownProcess"/>
+    <dgm:cxn modelId="{92B2653B-AD21-4256-8580-5B19AEF835E8}" srcId="{BE40067E-2CB6-43FC-9168-727125824DAE}" destId="{9537BDD0-29B0-4BF7-B8E2-819F8108367B}" srcOrd="2" destOrd="0" parTransId="{DBE0D277-877D-4FC3-BFC7-EA10D7FB9435}" sibTransId="{24CDEA99-52CB-4F5F-9DBF-8FFF49D38D4F}"/>
+    <dgm:cxn modelId="{E1138A47-C4B3-4671-8FD6-D2D5311A7D2F}" srcId="{B1F87349-9B07-498D-82A9-C7118A8E41EC}" destId="{976E0715-C3F2-4256-9DFD-2D6BFBDC6F78}" srcOrd="0" destOrd="0" parTransId="{50E6C498-0218-4FF2-AD2C-88F66086BE8B}" sibTransId="{9EDF1B42-87A3-45A8-B5F5-FC8A5086D838}"/>
+    <dgm:cxn modelId="{81F16948-9A49-4A79-A4C0-C021FC71162F}" type="presOf" srcId="{B1F87349-9B07-498D-82A9-C7118A8E41EC}" destId="{6706FD71-5EE3-46B5-91FC-5731B449432C}" srcOrd="0" destOrd="0" presId="urn:microsoft.com/office/officeart/2005/8/layout/StepDownProcess"/>
+    <dgm:cxn modelId="{AE9E7175-DC49-4FE0-8529-885B021A598D}" type="presOf" srcId="{9537BDD0-29B0-4BF7-B8E2-819F8108367B}" destId="{D7070662-D8F1-46DB-AF4A-CC922C5CEE7F}" srcOrd="0" destOrd="0" presId="urn:microsoft.com/office/officeart/2005/8/layout/StepDownProcess"/>
+    <dgm:cxn modelId="{75DE4C8D-BF13-47D7-A80A-D28EAA2FD590}" type="presOf" srcId="{BE40067E-2CB6-43FC-9168-727125824DAE}" destId="{480989EA-3328-4598-9BF9-0ABE16E72D22}" srcOrd="0" destOrd="0" presId="urn:microsoft.com/office/officeart/2005/8/layout/StepDownProcess"/>
+    <dgm:cxn modelId="{8D2B5BAB-7879-4803-89CE-4E3BE920EE46}" type="presOf" srcId="{770431F9-8030-4BBD-992A-E47D102BBAD4}" destId="{EAB6310A-69A0-43AB-AB1F-5C172284DF98}" srcOrd="0" destOrd="0" presId="urn:microsoft.com/office/officeart/2005/8/layout/StepDownProcess"/>
+    <dgm:cxn modelId="{E52A23B1-2E0C-4882-9B19-82956DD85322}" srcId="{69C894C4-415B-4E38-BCB7-7B179E122200}" destId="{770431F9-8030-4BBD-992A-E47D102BBAD4}" srcOrd="0" destOrd="0" parTransId="{93AF671D-C7B0-4E5D-BA8B-4ABF117A4B20}" sibTransId="{7E15F223-1F36-419D-BD0E-326F52523E83}"/>
+    <dgm:cxn modelId="{570483C0-FFD2-4BB2-A352-E155BB710336}" srcId="{BE40067E-2CB6-43FC-9168-727125824DAE}" destId="{69C894C4-415B-4E38-BCB7-7B179E122200}" srcOrd="1" destOrd="0" parTransId="{3FF287AC-E957-4057-879C-D4809D065BB3}" sibTransId="{0CD279FF-EAC8-40A2-8A29-1DDBAB6786A8}"/>
+    <dgm:cxn modelId="{F2CD94D5-8724-42F6-B4E7-A6B9B4A5C6FB}" type="presOf" srcId="{976E0715-C3F2-4256-9DFD-2D6BFBDC6F78}" destId="{884CA250-0DFB-4E7F-8C72-6D0A82B70C39}" srcOrd="0" destOrd="0" presId="urn:microsoft.com/office/officeart/2005/8/layout/StepDownProcess"/>
+    <dgm:cxn modelId="{7AA88AE7-7A0D-4B0D-935E-602497268ED5}" type="presOf" srcId="{A5534216-3EF7-4A78-9927-3E1C5399D87D}" destId="{47AC1F21-9C96-426C-AD4C-F99814E613A9}" srcOrd="0" destOrd="0" presId="urn:microsoft.com/office/officeart/2005/8/layout/StepDownProcess"/>
+    <dgm:cxn modelId="{A4F70BEC-CCDE-4729-9B9B-3B702A6F3D82}" srcId="{9537BDD0-29B0-4BF7-B8E2-819F8108367B}" destId="{A5534216-3EF7-4A78-9927-3E1C5399D87D}" srcOrd="0" destOrd="0" parTransId="{C2FB9871-5DF8-41CB-9FDC-2A8A6E9B6B90}" sibTransId="{67675BDF-48EE-4EFB-9220-A97BD4E43EDD}"/>
+    <dgm:cxn modelId="{1F4F32F2-EA48-42A5-9019-BE948E525BFB}" type="presParOf" srcId="{480989EA-3328-4598-9BF9-0ABE16E72D22}" destId="{6F692D65-14A7-4A8C-9461-41B717D98BDE}" srcOrd="0" destOrd="0" presId="urn:microsoft.com/office/officeart/2005/8/layout/StepDownProcess"/>
+    <dgm:cxn modelId="{242DA4EE-7FC5-4F03-9D6F-82894B840BC9}" type="presParOf" srcId="{6F692D65-14A7-4A8C-9461-41B717D98BDE}" destId="{D1BBD500-0C5A-4E43-A630-CC93AED36B62}" srcOrd="0" destOrd="0" presId="urn:microsoft.com/office/officeart/2005/8/layout/StepDownProcess"/>
+    <dgm:cxn modelId="{9D4F4BA6-C811-4882-8A6C-9339A9DAA238}" type="presParOf" srcId="{6F692D65-14A7-4A8C-9461-41B717D98BDE}" destId="{6706FD71-5EE3-46B5-91FC-5731B449432C}" srcOrd="1" destOrd="0" presId="urn:microsoft.com/office/officeart/2005/8/layout/StepDownProcess"/>
+    <dgm:cxn modelId="{371622CC-7FA6-4382-8AD2-D8710EFA5996}" type="presParOf" srcId="{6F692D65-14A7-4A8C-9461-41B717D98BDE}" destId="{884CA250-0DFB-4E7F-8C72-6D0A82B70C39}" srcOrd="2" destOrd="0" presId="urn:microsoft.com/office/officeart/2005/8/layout/StepDownProcess"/>
+    <dgm:cxn modelId="{5260344B-9861-4919-A302-996FF9B90050}" type="presParOf" srcId="{480989EA-3328-4598-9BF9-0ABE16E72D22}" destId="{C63AF95A-3E2A-4EC5-B405-4E83BB0BFD40}" srcOrd="1" destOrd="0" presId="urn:microsoft.com/office/officeart/2005/8/layout/StepDownProcess"/>
+    <dgm:cxn modelId="{6B2447D0-53AC-4740-A718-49F440AB7D7B}" type="presParOf" srcId="{480989EA-3328-4598-9BF9-0ABE16E72D22}" destId="{12892DAE-6213-41AC-8519-957D944AF98A}" srcOrd="2" destOrd="0" presId="urn:microsoft.com/office/officeart/2005/8/layout/StepDownProcess"/>
+    <dgm:cxn modelId="{B5D32F90-08C0-4DE5-AD4C-C7AD4FC9C9BD}" type="presParOf" srcId="{12892DAE-6213-41AC-8519-957D944AF98A}" destId="{68104B2B-82FF-4DD5-A0D5-5C1B93E54737}" srcOrd="0" destOrd="0" presId="urn:microsoft.com/office/officeart/2005/8/layout/StepDownProcess"/>
+    <dgm:cxn modelId="{FDB17F1C-0940-4760-8E9C-80C379677BD8}" type="presParOf" srcId="{12892DAE-6213-41AC-8519-957D944AF98A}" destId="{0D1F8386-0D4D-4B8C-9554-7A5607658609}" srcOrd="1" destOrd="0" presId="urn:microsoft.com/office/officeart/2005/8/layout/StepDownProcess"/>
+    <dgm:cxn modelId="{EEFF6CD9-759A-4D2F-BEF8-31FDCFFA996C}" type="presParOf" srcId="{12892DAE-6213-41AC-8519-957D944AF98A}" destId="{EAB6310A-69A0-43AB-AB1F-5C172284DF98}" srcOrd="2" destOrd="0" presId="urn:microsoft.com/office/officeart/2005/8/layout/StepDownProcess"/>
+    <dgm:cxn modelId="{B06847BA-AB40-452A-8E92-0D0856D5FE00}" type="presParOf" srcId="{480989EA-3328-4598-9BF9-0ABE16E72D22}" destId="{8DB39584-6E59-4BFA-A599-1A511DA0056F}" srcOrd="3" destOrd="0" presId="urn:microsoft.com/office/officeart/2005/8/layout/StepDownProcess"/>
+    <dgm:cxn modelId="{6C02335D-813B-4ACD-8BE6-46927C81D812}" type="presParOf" srcId="{480989EA-3328-4598-9BF9-0ABE16E72D22}" destId="{B6503FDD-13C9-43B7-8A95-F250C5C9E841}" srcOrd="4" destOrd="0" presId="urn:microsoft.com/office/officeart/2005/8/layout/StepDownProcess"/>
+    <dgm:cxn modelId="{DCE67D4E-A53C-4564-AE02-141FC5291841}" type="presParOf" srcId="{B6503FDD-13C9-43B7-8A95-F250C5C9E841}" destId="{D7070662-D8F1-46DB-AF4A-CC922C5CEE7F}" srcOrd="0" destOrd="0" presId="urn:microsoft.com/office/officeart/2005/8/layout/StepDownProcess"/>
+    <dgm:cxn modelId="{06BFAA41-0DFD-4C5F-BC55-2D3934692F10}" type="presParOf" srcId="{B6503FDD-13C9-43B7-8A95-F250C5C9E841}" destId="{47AC1F21-9C96-426C-AD4C-F99814E613A9}" srcOrd="1" destOrd="0" presId="urn:microsoft.com/office/officeart/2005/8/layout/StepDownProcess"/>
+  </dgm:cxnLst>
+  <dgm:bg/>
+  <dgm:whole/>
+  <dgm:extLst>
+    <a:ext uri="http://schemas.microsoft.com/office/drawing/2008/diagram">
+      <dsp:dataModelExt xmlns:dsp="http://schemas.microsoft.com/office/drawing/2008/diagram" relId="rId6" minVer="http://schemas.openxmlformats.org/drawingml/2006/diagram"/>
+    </a:ext>
+  </dgm:extLst>
+</dgm:dataModel>
+</file>
+
+<file path=ppt/diagrams/drawing1.xml><?xml version="1.0" encoding="utf-8"?>
+<dsp:drawing xmlns:dgm="http://schemas.openxmlformats.org/drawingml/2006/diagram" xmlns:dsp="http://schemas.microsoft.com/office/drawing/2008/diagram" xmlns:a="http://schemas.openxmlformats.org/drawingml/2006/main">
+  <dsp:spTree>
+    <dsp:nvGrpSpPr>
+      <dsp:cNvPr id="0" name=""/>
+      <dsp:cNvGrpSpPr/>
+    </dsp:nvGrpSpPr>
+    <dsp:grpSpPr/>
+    <dsp:sp modelId="{24DB2683-561E-4097-9EC7-EFBB15D3BD1E}">
+      <dsp:nvSpPr>
+        <dsp:cNvPr id="0" name=""/>
+        <dsp:cNvSpPr/>
+      </dsp:nvSpPr>
+      <dsp:spPr>
+        <a:xfrm>
+          <a:off x="1293344" y="-26787"/>
+          <a:ext cx="2296460" cy="2296460"/>
+        </a:xfrm>
+        <a:prstGeom prst="circularArrow">
+          <a:avLst>
+            <a:gd name="adj1" fmla="val 5544"/>
+            <a:gd name="adj2" fmla="val 330680"/>
+            <a:gd name="adj3" fmla="val 14798385"/>
+            <a:gd name="adj4" fmla="val 16790059"/>
+            <a:gd name="adj5" fmla="val 5757"/>
+          </a:avLst>
+        </a:prstGeom>
+        <a:solidFill>
+          <a:schemeClr val="accent1">
+            <a:tint val="40000"/>
+            <a:hueOff val="0"/>
+            <a:satOff val="0"/>
+            <a:lumOff val="0"/>
+            <a:alphaOff val="0"/>
+          </a:schemeClr>
+        </a:solidFill>
+        <a:ln>
+          <a:noFill/>
+        </a:ln>
+        <a:effectLst/>
+      </dsp:spPr>
+      <dsp:style>
+        <a:lnRef idx="0">
+          <a:scrgbClr r="0" g="0" b="0"/>
+        </a:lnRef>
+        <a:fillRef idx="1">
+          <a:scrgbClr r="0" g="0" b="0"/>
+        </a:fillRef>
+        <a:effectRef idx="0">
+          <a:scrgbClr r="0" g="0" b="0"/>
+        </a:effectRef>
+        <a:fontRef idx="minor"/>
+      </dsp:style>
+    </dsp:sp>
+    <dsp:sp modelId="{AFA987D1-D90A-428D-996C-07CB0B57C012}">
+      <dsp:nvSpPr>
+        <dsp:cNvPr id="0" name=""/>
+        <dsp:cNvSpPr/>
+      </dsp:nvSpPr>
+      <dsp:spPr>
+        <a:xfrm>
+          <a:off x="2156645" y="1173"/>
+          <a:ext cx="569859" cy="284929"/>
+        </a:xfrm>
+        <a:prstGeom prst="roundRect">
+          <a:avLst/>
+        </a:prstGeom>
+        <a:solidFill>
+          <a:schemeClr val="accent1">
+            <a:hueOff val="0"/>
+            <a:satOff val="0"/>
+            <a:lumOff val="0"/>
+            <a:alphaOff val="0"/>
+          </a:schemeClr>
+        </a:solidFill>
+        <a:ln w="19050" cap="flat" cmpd="sng" algn="ctr">
+          <a:solidFill>
+            <a:schemeClr val="lt1">
+              <a:hueOff val="0"/>
+              <a:satOff val="0"/>
+              <a:lumOff val="0"/>
+              <a:alphaOff val="0"/>
+            </a:schemeClr>
+          </a:solidFill>
+          <a:prstDash val="solid"/>
+          <a:miter lim="800000"/>
+        </a:ln>
+        <a:effectLst/>
+      </dsp:spPr>
+      <dsp:style>
+        <a:lnRef idx="2">
+          <a:scrgbClr r="0" g="0" b="0"/>
+        </a:lnRef>
+        <a:fillRef idx="1">
+          <a:scrgbClr r="0" g="0" b="0"/>
+        </a:fillRef>
+        <a:effectRef idx="0">
+          <a:scrgbClr r="0" g="0" b="0"/>
+        </a:effectRef>
+        <a:fontRef idx="minor">
+          <a:schemeClr val="lt1"/>
+        </a:fontRef>
+      </dsp:style>
+      <dsp:txBody>
+        <a:bodyPr spcFirstLastPara="0" vert="horz" wrap="square" lIns="34290" tIns="34290" rIns="34290" bIns="34290" numCol="1" spcCol="1270" anchor="ctr" anchorCtr="0">
+          <a:noAutofit/>
+        </a:bodyPr>
+        <a:lstStyle/>
+        <a:p>
+          <a:pPr marL="0" lvl="0" indent="0" algn="ctr" defTabSz="400050">
+            <a:lnSpc>
+              <a:spcPct val="90000"/>
+            </a:lnSpc>
+            <a:spcBef>
+              <a:spcPct val="0"/>
+            </a:spcBef>
+            <a:spcAft>
+              <a:spcPct val="35000"/>
+            </a:spcAft>
+            <a:buNone/>
+          </a:pPr>
+          <a:r>
+            <a:rPr kumimoji="1" lang="en-US" altLang="ja-JP" sz="900" kern="1200" dirty="0"/>
+            <a:t>1</a:t>
+          </a:r>
+          <a:endParaRPr kumimoji="1" lang="ja-JP" altLang="en-US" sz="900" kern="1200" dirty="0"/>
+        </a:p>
+      </dsp:txBody>
+      <dsp:txXfrm>
+        <a:off x="2170554" y="15082"/>
+        <a:ext cx="542041" cy="257111"/>
+      </dsp:txXfrm>
+    </dsp:sp>
+    <dsp:sp modelId="{5AD671D9-8673-414A-83B2-2F405639B25C}">
+      <dsp:nvSpPr>
+        <dsp:cNvPr id="0" name=""/>
+        <dsp:cNvSpPr/>
+      </dsp:nvSpPr>
+      <dsp:spPr>
+        <a:xfrm>
+          <a:off x="2786127" y="230286"/>
+          <a:ext cx="569859" cy="284929"/>
+        </a:xfrm>
+        <a:prstGeom prst="roundRect">
+          <a:avLst/>
+        </a:prstGeom>
+        <a:solidFill>
+          <a:schemeClr val="accent1">
+            <a:hueOff val="0"/>
+            <a:satOff val="0"/>
+            <a:lumOff val="0"/>
+            <a:alphaOff val="0"/>
+          </a:schemeClr>
+        </a:solidFill>
+        <a:ln w="19050" cap="flat" cmpd="sng" algn="ctr">
+          <a:solidFill>
+            <a:schemeClr val="lt1">
+              <a:hueOff val="0"/>
+              <a:satOff val="0"/>
+              <a:lumOff val="0"/>
+              <a:alphaOff val="0"/>
+            </a:schemeClr>
+          </a:solidFill>
+          <a:prstDash val="solid"/>
+          <a:miter lim="800000"/>
+        </a:ln>
+        <a:effectLst/>
+      </dsp:spPr>
+      <dsp:style>
+        <a:lnRef idx="2">
+          <a:scrgbClr r="0" g="0" b="0"/>
+        </a:lnRef>
+        <a:fillRef idx="1">
+          <a:scrgbClr r="0" g="0" b="0"/>
+        </a:fillRef>
+        <a:effectRef idx="0">
+          <a:scrgbClr r="0" g="0" b="0"/>
+        </a:effectRef>
+        <a:fontRef idx="minor">
+          <a:schemeClr val="lt1"/>
+        </a:fontRef>
+      </dsp:style>
+      <dsp:txBody>
+        <a:bodyPr spcFirstLastPara="0" vert="horz" wrap="square" lIns="34290" tIns="34290" rIns="34290" bIns="34290" numCol="1" spcCol="1270" anchor="ctr" anchorCtr="0">
+          <a:noAutofit/>
+        </a:bodyPr>
+        <a:lstStyle/>
+        <a:p>
+          <a:pPr marL="0" lvl="0" indent="0" algn="ctr" defTabSz="400050">
+            <a:lnSpc>
+              <a:spcPct val="90000"/>
+            </a:lnSpc>
+            <a:spcBef>
+              <a:spcPct val="0"/>
+            </a:spcBef>
+            <a:spcAft>
+              <a:spcPct val="35000"/>
+            </a:spcAft>
+            <a:buNone/>
+          </a:pPr>
+          <a:r>
+            <a:rPr kumimoji="1" lang="en-US" altLang="ja-JP" sz="900" kern="1200" dirty="0"/>
+            <a:t>2</a:t>
+          </a:r>
+          <a:endParaRPr kumimoji="1" lang="ja-JP" altLang="en-US" sz="900" kern="1200" dirty="0"/>
+        </a:p>
+      </dsp:txBody>
+      <dsp:txXfrm>
+        <a:off x="2800036" y="244195"/>
+        <a:ext cx="542041" cy="257111"/>
+      </dsp:txXfrm>
+    </dsp:sp>
+    <dsp:sp modelId="{FBEC2146-B9FC-4A00-A4F0-F96DBAB7AAA3}">
+      <dsp:nvSpPr>
+        <dsp:cNvPr id="0" name=""/>
+        <dsp:cNvSpPr/>
+      </dsp:nvSpPr>
+      <dsp:spPr>
+        <a:xfrm>
+          <a:off x="3121068" y="810420"/>
+          <a:ext cx="569859" cy="284929"/>
+        </a:xfrm>
+        <a:prstGeom prst="roundRect">
+          <a:avLst/>
+        </a:prstGeom>
+        <a:solidFill>
+          <a:schemeClr val="accent1">
+            <a:hueOff val="0"/>
+            <a:satOff val="0"/>
+            <a:lumOff val="0"/>
+            <a:alphaOff val="0"/>
+          </a:schemeClr>
+        </a:solidFill>
+        <a:ln w="19050" cap="flat" cmpd="sng" algn="ctr">
+          <a:solidFill>
+            <a:schemeClr val="lt1">
+              <a:hueOff val="0"/>
+              <a:satOff val="0"/>
+              <a:lumOff val="0"/>
+              <a:alphaOff val="0"/>
+            </a:schemeClr>
+          </a:solidFill>
+          <a:prstDash val="solid"/>
+          <a:miter lim="800000"/>
+        </a:ln>
+        <a:effectLst/>
+      </dsp:spPr>
+      <dsp:style>
+        <a:lnRef idx="2">
+          <a:scrgbClr r="0" g="0" b="0"/>
+        </a:lnRef>
+        <a:fillRef idx="1">
+          <a:scrgbClr r="0" g="0" b="0"/>
+        </a:fillRef>
+        <a:effectRef idx="0">
+          <a:scrgbClr r="0" g="0" b="0"/>
+        </a:effectRef>
+        <a:fontRef idx="minor">
+          <a:schemeClr val="lt1"/>
+        </a:fontRef>
+      </dsp:style>
+      <dsp:txBody>
+        <a:bodyPr spcFirstLastPara="0" vert="horz" wrap="square" lIns="34290" tIns="34290" rIns="34290" bIns="34290" numCol="1" spcCol="1270" anchor="ctr" anchorCtr="0">
+          <a:noAutofit/>
+        </a:bodyPr>
+        <a:lstStyle/>
+        <a:p>
+          <a:pPr marL="0" lvl="0" indent="0" algn="ctr" defTabSz="400050">
+            <a:lnSpc>
+              <a:spcPct val="90000"/>
+            </a:lnSpc>
+            <a:spcBef>
+              <a:spcPct val="0"/>
+            </a:spcBef>
+            <a:spcAft>
+              <a:spcPct val="35000"/>
+            </a:spcAft>
+            <a:buNone/>
+          </a:pPr>
+          <a:r>
+            <a:rPr kumimoji="1" lang="en-US" altLang="ja-JP" sz="900" kern="1200" dirty="0"/>
+            <a:t>3</a:t>
+          </a:r>
+          <a:endParaRPr kumimoji="1" lang="ja-JP" altLang="en-US" sz="900" kern="1200" dirty="0"/>
+        </a:p>
+      </dsp:txBody>
+      <dsp:txXfrm>
+        <a:off x="3134977" y="824329"/>
+        <a:ext cx="542041" cy="257111"/>
+      </dsp:txXfrm>
+    </dsp:sp>
+    <dsp:sp modelId="{EBD1F666-6F54-40CB-98EE-4038FF9827FE}">
+      <dsp:nvSpPr>
+        <dsp:cNvPr id="0" name=""/>
+        <dsp:cNvSpPr/>
+      </dsp:nvSpPr>
+      <dsp:spPr>
+        <a:xfrm>
+          <a:off x="3004744" y="1470124"/>
+          <a:ext cx="569859" cy="284929"/>
+        </a:xfrm>
+        <a:prstGeom prst="roundRect">
+          <a:avLst/>
+        </a:prstGeom>
+        <a:solidFill>
+          <a:schemeClr val="accent1">
+            <a:hueOff val="0"/>
+            <a:satOff val="0"/>
+            <a:lumOff val="0"/>
+            <a:alphaOff val="0"/>
+          </a:schemeClr>
+        </a:solidFill>
+        <a:ln w="19050" cap="flat" cmpd="sng" algn="ctr">
+          <a:solidFill>
+            <a:schemeClr val="lt1">
+              <a:hueOff val="0"/>
+              <a:satOff val="0"/>
+              <a:lumOff val="0"/>
+              <a:alphaOff val="0"/>
+            </a:schemeClr>
+          </a:solidFill>
+          <a:prstDash val="solid"/>
+          <a:miter lim="800000"/>
+        </a:ln>
+        <a:effectLst/>
+      </dsp:spPr>
+      <dsp:style>
+        <a:lnRef idx="2">
+          <a:scrgbClr r="0" g="0" b="0"/>
+        </a:lnRef>
+        <a:fillRef idx="1">
+          <a:scrgbClr r="0" g="0" b="0"/>
+        </a:fillRef>
+        <a:effectRef idx="0">
+          <a:scrgbClr r="0" g="0" b="0"/>
+        </a:effectRef>
+        <a:fontRef idx="minor">
+          <a:schemeClr val="lt1"/>
+        </a:fontRef>
+      </dsp:style>
+      <dsp:txBody>
+        <a:bodyPr spcFirstLastPara="0" vert="horz" wrap="square" lIns="34290" tIns="34290" rIns="34290" bIns="34290" numCol="1" spcCol="1270" anchor="ctr" anchorCtr="0">
+          <a:noAutofit/>
+        </a:bodyPr>
+        <a:lstStyle/>
+        <a:p>
+          <a:pPr marL="0" lvl="0" indent="0" algn="ctr" defTabSz="400050">
+            <a:lnSpc>
+              <a:spcPct val="90000"/>
+            </a:lnSpc>
+            <a:spcBef>
+              <a:spcPct val="0"/>
+            </a:spcBef>
+            <a:spcAft>
+              <a:spcPct val="35000"/>
+            </a:spcAft>
+            <a:buNone/>
+          </a:pPr>
+          <a:r>
+            <a:rPr kumimoji="1" lang="en-US" altLang="ja-JP" sz="900" kern="1200" dirty="0"/>
+            <a:t>4</a:t>
+          </a:r>
+          <a:endParaRPr kumimoji="1" lang="ja-JP" altLang="en-US" sz="900" kern="1200" dirty="0"/>
+        </a:p>
+      </dsp:txBody>
+      <dsp:txXfrm>
+        <a:off x="3018653" y="1484033"/>
+        <a:ext cx="542041" cy="257111"/>
+      </dsp:txXfrm>
+    </dsp:sp>
+    <dsp:sp modelId="{39E8ED91-F71F-4325-83B9-79E79B9977F0}">
+      <dsp:nvSpPr>
+        <dsp:cNvPr id="0" name=""/>
+        <dsp:cNvSpPr/>
+      </dsp:nvSpPr>
+      <dsp:spPr>
+        <a:xfrm>
+          <a:off x="2491585" y="1900715"/>
+          <a:ext cx="569859" cy="284929"/>
+        </a:xfrm>
+        <a:prstGeom prst="roundRect">
+          <a:avLst/>
+        </a:prstGeom>
+        <a:solidFill>
+          <a:schemeClr val="accent1">
+            <a:hueOff val="0"/>
+            <a:satOff val="0"/>
+            <a:lumOff val="0"/>
+            <a:alphaOff val="0"/>
+          </a:schemeClr>
+        </a:solidFill>
+        <a:ln w="19050" cap="flat" cmpd="sng" algn="ctr">
+          <a:solidFill>
+            <a:schemeClr val="lt1">
+              <a:hueOff val="0"/>
+              <a:satOff val="0"/>
+              <a:lumOff val="0"/>
+              <a:alphaOff val="0"/>
+            </a:schemeClr>
+          </a:solidFill>
+          <a:prstDash val="solid"/>
+          <a:miter lim="800000"/>
+        </a:ln>
+        <a:effectLst/>
+      </dsp:spPr>
+      <dsp:style>
+        <a:lnRef idx="2">
+          <a:scrgbClr r="0" g="0" b="0"/>
+        </a:lnRef>
+        <a:fillRef idx="1">
+          <a:scrgbClr r="0" g="0" b="0"/>
+        </a:fillRef>
+        <a:effectRef idx="0">
+          <a:scrgbClr r="0" g="0" b="0"/>
+        </a:effectRef>
+        <a:fontRef idx="minor">
+          <a:schemeClr val="lt1"/>
+        </a:fontRef>
+      </dsp:style>
+      <dsp:txBody>
+        <a:bodyPr spcFirstLastPara="0" vert="horz" wrap="square" lIns="34290" tIns="34290" rIns="34290" bIns="34290" numCol="1" spcCol="1270" anchor="ctr" anchorCtr="0">
+          <a:noAutofit/>
+        </a:bodyPr>
+        <a:lstStyle/>
+        <a:p>
+          <a:pPr marL="0" lvl="0" indent="0" algn="ctr" defTabSz="400050">
+            <a:lnSpc>
+              <a:spcPct val="90000"/>
+            </a:lnSpc>
+            <a:spcBef>
+              <a:spcPct val="0"/>
+            </a:spcBef>
+            <a:spcAft>
+              <a:spcPct val="35000"/>
+            </a:spcAft>
+            <a:buNone/>
+          </a:pPr>
+          <a:r>
+            <a:rPr kumimoji="1" lang="en-US" altLang="ja-JP" sz="900" kern="1200" dirty="0"/>
+            <a:t>5</a:t>
+          </a:r>
+          <a:endParaRPr kumimoji="1" lang="ja-JP" altLang="en-US" sz="900" kern="1200" dirty="0"/>
+        </a:p>
+      </dsp:txBody>
+      <dsp:txXfrm>
+        <a:off x="2505494" y="1914624"/>
+        <a:ext cx="542041" cy="257111"/>
+      </dsp:txXfrm>
+    </dsp:sp>
+    <dsp:sp modelId="{9C8DABAF-03A3-4404-A5A6-D2A9F88F1874}">
+      <dsp:nvSpPr>
+        <dsp:cNvPr id="0" name=""/>
+        <dsp:cNvSpPr/>
+      </dsp:nvSpPr>
+      <dsp:spPr>
+        <a:xfrm>
+          <a:off x="1821704" y="1900715"/>
+          <a:ext cx="569859" cy="284929"/>
+        </a:xfrm>
+        <a:prstGeom prst="roundRect">
+          <a:avLst/>
+        </a:prstGeom>
+        <a:solidFill>
+          <a:schemeClr val="accent1">
+            <a:hueOff val="0"/>
+            <a:satOff val="0"/>
+            <a:lumOff val="0"/>
+            <a:alphaOff val="0"/>
+          </a:schemeClr>
+        </a:solidFill>
+        <a:ln w="19050" cap="flat" cmpd="sng" algn="ctr">
+          <a:solidFill>
+            <a:schemeClr val="lt1">
+              <a:hueOff val="0"/>
+              <a:satOff val="0"/>
+              <a:lumOff val="0"/>
+              <a:alphaOff val="0"/>
+            </a:schemeClr>
+          </a:solidFill>
+          <a:prstDash val="solid"/>
+          <a:miter lim="800000"/>
+        </a:ln>
+        <a:effectLst/>
+      </dsp:spPr>
+      <dsp:style>
+        <a:lnRef idx="2">
+          <a:scrgbClr r="0" g="0" b="0"/>
+        </a:lnRef>
+        <a:fillRef idx="1">
+          <a:scrgbClr r="0" g="0" b="0"/>
+        </a:fillRef>
+        <a:effectRef idx="0">
+          <a:scrgbClr r="0" g="0" b="0"/>
+        </a:effectRef>
+        <a:fontRef idx="minor">
+          <a:schemeClr val="lt1"/>
+        </a:fontRef>
+      </dsp:style>
+      <dsp:txBody>
+        <a:bodyPr spcFirstLastPara="0" vert="horz" wrap="square" lIns="34290" tIns="34290" rIns="34290" bIns="34290" numCol="1" spcCol="1270" anchor="ctr" anchorCtr="0">
+          <a:noAutofit/>
+        </a:bodyPr>
+        <a:lstStyle/>
+        <a:p>
+          <a:pPr marL="0" lvl="0" indent="0" algn="ctr" defTabSz="400050">
+            <a:lnSpc>
+              <a:spcPct val="90000"/>
+            </a:lnSpc>
+            <a:spcBef>
+              <a:spcPct val="0"/>
+            </a:spcBef>
+            <a:spcAft>
+              <a:spcPct val="35000"/>
+            </a:spcAft>
+            <a:buNone/>
+          </a:pPr>
+          <a:r>
+            <a:rPr kumimoji="1" lang="en-US" altLang="ja-JP" sz="900" kern="1200" dirty="0"/>
+            <a:t>6</a:t>
+          </a:r>
+          <a:endParaRPr kumimoji="1" lang="ja-JP" altLang="en-US" sz="900" kern="1200" dirty="0"/>
+        </a:p>
+      </dsp:txBody>
+      <dsp:txXfrm>
+        <a:off x="1835613" y="1914624"/>
+        <a:ext cx="542041" cy="257111"/>
+      </dsp:txXfrm>
+    </dsp:sp>
+    <dsp:sp modelId="{8D70B406-1605-422E-93B0-8363A9E613F1}">
+      <dsp:nvSpPr>
+        <dsp:cNvPr id="0" name=""/>
+        <dsp:cNvSpPr/>
+      </dsp:nvSpPr>
+      <dsp:spPr>
+        <a:xfrm>
+          <a:off x="1308545" y="1470124"/>
+          <a:ext cx="569859" cy="284929"/>
+        </a:xfrm>
+        <a:prstGeom prst="roundRect">
+          <a:avLst/>
+        </a:prstGeom>
+        <a:solidFill>
+          <a:schemeClr val="accent1">
+            <a:hueOff val="0"/>
+            <a:satOff val="0"/>
+            <a:lumOff val="0"/>
+            <a:alphaOff val="0"/>
+          </a:schemeClr>
+        </a:solidFill>
+        <a:ln w="19050" cap="flat" cmpd="sng" algn="ctr">
+          <a:solidFill>
+            <a:schemeClr val="lt1">
+              <a:hueOff val="0"/>
+              <a:satOff val="0"/>
+              <a:lumOff val="0"/>
+              <a:alphaOff val="0"/>
+            </a:schemeClr>
+          </a:solidFill>
+          <a:prstDash val="solid"/>
+          <a:miter lim="800000"/>
+        </a:ln>
+        <a:effectLst/>
+      </dsp:spPr>
+      <dsp:style>
+        <a:lnRef idx="2">
+          <a:scrgbClr r="0" g="0" b="0"/>
+        </a:lnRef>
+        <a:fillRef idx="1">
+          <a:scrgbClr r="0" g="0" b="0"/>
+        </a:fillRef>
+        <a:effectRef idx="0">
+          <a:scrgbClr r="0" g="0" b="0"/>
+        </a:effectRef>
+        <a:fontRef idx="minor">
+          <a:schemeClr val="lt1"/>
+        </a:fontRef>
+      </dsp:style>
+      <dsp:txBody>
+        <a:bodyPr spcFirstLastPara="0" vert="horz" wrap="square" lIns="34290" tIns="34290" rIns="34290" bIns="34290" numCol="1" spcCol="1270" anchor="ctr" anchorCtr="0">
+          <a:noAutofit/>
+        </a:bodyPr>
+        <a:lstStyle/>
+        <a:p>
+          <a:pPr marL="0" lvl="0" indent="0" algn="ctr" defTabSz="400050">
+            <a:lnSpc>
+              <a:spcPct val="90000"/>
+            </a:lnSpc>
+            <a:spcBef>
+              <a:spcPct val="0"/>
+            </a:spcBef>
+            <a:spcAft>
+              <a:spcPct val="35000"/>
+            </a:spcAft>
+            <a:buNone/>
+          </a:pPr>
+          <a:r>
+            <a:rPr kumimoji="1" lang="en-US" altLang="ja-JP" sz="900" kern="1200" dirty="0"/>
+            <a:t>7</a:t>
+          </a:r>
+          <a:endParaRPr kumimoji="1" lang="ja-JP" altLang="en-US" sz="900" kern="1200" dirty="0"/>
+        </a:p>
+      </dsp:txBody>
+      <dsp:txXfrm>
+        <a:off x="1322454" y="1484033"/>
+        <a:ext cx="542041" cy="257111"/>
+      </dsp:txXfrm>
+    </dsp:sp>
+    <dsp:sp modelId="{BA498E70-02E6-4F97-AA00-549F7FE611A7}">
+      <dsp:nvSpPr>
+        <dsp:cNvPr id="0" name=""/>
+        <dsp:cNvSpPr/>
+      </dsp:nvSpPr>
+      <dsp:spPr>
+        <a:xfrm>
+          <a:off x="1192221" y="810420"/>
+          <a:ext cx="569859" cy="284929"/>
+        </a:xfrm>
+        <a:prstGeom prst="roundRect">
+          <a:avLst/>
+        </a:prstGeom>
+        <a:solidFill>
+          <a:schemeClr val="accent1">
+            <a:hueOff val="0"/>
+            <a:satOff val="0"/>
+            <a:lumOff val="0"/>
+            <a:alphaOff val="0"/>
+          </a:schemeClr>
+        </a:solidFill>
+        <a:ln w="19050" cap="flat" cmpd="sng" algn="ctr">
+          <a:solidFill>
+            <a:schemeClr val="lt1">
+              <a:hueOff val="0"/>
+              <a:satOff val="0"/>
+              <a:lumOff val="0"/>
+              <a:alphaOff val="0"/>
+            </a:schemeClr>
+          </a:solidFill>
+          <a:prstDash val="solid"/>
+          <a:miter lim="800000"/>
+        </a:ln>
+        <a:effectLst/>
+      </dsp:spPr>
+      <dsp:style>
+        <a:lnRef idx="2">
+          <a:scrgbClr r="0" g="0" b="0"/>
+        </a:lnRef>
+        <a:fillRef idx="1">
+          <a:scrgbClr r="0" g="0" b="0"/>
+        </a:fillRef>
+        <a:effectRef idx="0">
+          <a:scrgbClr r="0" g="0" b="0"/>
+        </a:effectRef>
+        <a:fontRef idx="minor">
+          <a:schemeClr val="lt1"/>
+        </a:fontRef>
+      </dsp:style>
+      <dsp:txBody>
+        <a:bodyPr spcFirstLastPara="0" vert="horz" wrap="square" lIns="34290" tIns="34290" rIns="34290" bIns="34290" numCol="1" spcCol="1270" anchor="ctr" anchorCtr="0">
+          <a:noAutofit/>
+        </a:bodyPr>
+        <a:lstStyle/>
+        <a:p>
+          <a:pPr marL="0" lvl="0" indent="0" algn="ctr" defTabSz="400050">
+            <a:lnSpc>
+              <a:spcPct val="90000"/>
+            </a:lnSpc>
+            <a:spcBef>
+              <a:spcPct val="0"/>
+            </a:spcBef>
+            <a:spcAft>
+              <a:spcPct val="35000"/>
+            </a:spcAft>
+            <a:buNone/>
+          </a:pPr>
+          <a:r>
+            <a:rPr kumimoji="1" lang="en-US" altLang="ja-JP" sz="900" kern="1200" dirty="0"/>
+            <a:t>8</a:t>
+          </a:r>
+          <a:endParaRPr kumimoji="1" lang="ja-JP" altLang="en-US" sz="900" kern="1200" dirty="0"/>
+        </a:p>
+      </dsp:txBody>
+      <dsp:txXfrm>
+        <a:off x="1206130" y="824329"/>
+        <a:ext cx="542041" cy="257111"/>
+      </dsp:txXfrm>
+    </dsp:sp>
+    <dsp:sp modelId="{7C7E7F0C-9CA7-4826-A51D-4F27D8FA055C}">
+      <dsp:nvSpPr>
+        <dsp:cNvPr id="0" name=""/>
+        <dsp:cNvSpPr/>
+      </dsp:nvSpPr>
+      <dsp:spPr>
+        <a:xfrm>
+          <a:off x="1527162" y="230286"/>
+          <a:ext cx="569859" cy="284929"/>
+        </a:xfrm>
+        <a:prstGeom prst="roundRect">
+          <a:avLst/>
+        </a:prstGeom>
+        <a:solidFill>
+          <a:schemeClr val="accent1">
+            <a:hueOff val="0"/>
+            <a:satOff val="0"/>
+            <a:lumOff val="0"/>
+            <a:alphaOff val="0"/>
+          </a:schemeClr>
+        </a:solidFill>
+        <a:ln w="19050" cap="flat" cmpd="sng" algn="ctr">
+          <a:solidFill>
+            <a:schemeClr val="lt1">
+              <a:hueOff val="0"/>
+              <a:satOff val="0"/>
+              <a:lumOff val="0"/>
+              <a:alphaOff val="0"/>
+            </a:schemeClr>
+          </a:solidFill>
+          <a:prstDash val="solid"/>
+          <a:miter lim="800000"/>
+        </a:ln>
+        <a:effectLst/>
+      </dsp:spPr>
+      <dsp:style>
+        <a:lnRef idx="2">
+          <a:scrgbClr r="0" g="0" b="0"/>
+        </a:lnRef>
+        <a:fillRef idx="1">
+          <a:scrgbClr r="0" g="0" b="0"/>
+        </a:fillRef>
+        <a:effectRef idx="0">
+          <a:scrgbClr r="0" g="0" b="0"/>
+        </a:effectRef>
+        <a:fontRef idx="minor">
+          <a:schemeClr val="lt1"/>
+        </a:fontRef>
+      </dsp:style>
+      <dsp:txBody>
+        <a:bodyPr spcFirstLastPara="0" vert="horz" wrap="square" lIns="34290" tIns="34290" rIns="34290" bIns="34290" numCol="1" spcCol="1270" anchor="ctr" anchorCtr="0">
+          <a:noAutofit/>
+        </a:bodyPr>
+        <a:lstStyle/>
+        <a:p>
+          <a:pPr marL="0" lvl="0" indent="0" algn="ctr" defTabSz="400050">
+            <a:lnSpc>
+              <a:spcPct val="90000"/>
+            </a:lnSpc>
+            <a:spcBef>
+              <a:spcPct val="0"/>
+            </a:spcBef>
+            <a:spcAft>
+              <a:spcPct val="35000"/>
+            </a:spcAft>
+            <a:buNone/>
+          </a:pPr>
+          <a:r>
+            <a:rPr kumimoji="1" lang="en-US" altLang="ja-JP" sz="900" kern="1200" dirty="0"/>
+            <a:t>9</a:t>
+          </a:r>
+          <a:endParaRPr kumimoji="1" lang="ja-JP" altLang="en-US" sz="900" kern="1200" dirty="0"/>
+        </a:p>
+      </dsp:txBody>
+      <dsp:txXfrm>
+        <a:off x="1541071" y="244195"/>
+        <a:ext cx="542041" cy="257111"/>
+      </dsp:txXfrm>
+    </dsp:sp>
+  </dsp:spTree>
+</dsp:drawing>
+</file>
+
+<file path=ppt/diagrams/drawing2.xml><?xml version="1.0" encoding="utf-8"?>
+<dsp:drawing xmlns:dgm="http://schemas.openxmlformats.org/drawingml/2006/diagram" xmlns:dsp="http://schemas.microsoft.com/office/drawing/2008/diagram" xmlns:a="http://schemas.openxmlformats.org/drawingml/2006/main">
+  <dsp:spTree>
+    <dsp:nvGrpSpPr>
+      <dsp:cNvPr id="0" name=""/>
+      <dsp:cNvGrpSpPr/>
+    </dsp:nvGrpSpPr>
+    <dsp:grpSpPr/>
+    <dsp:sp modelId="{D1BBD500-0C5A-4E43-A630-CC93AED36B62}">
+      <dsp:nvSpPr>
+        <dsp:cNvPr id="0" name=""/>
+        <dsp:cNvSpPr/>
+      </dsp:nvSpPr>
+      <dsp:spPr>
+        <a:xfrm rot="5400000">
+          <a:off x="2092965" y="479102"/>
+          <a:ext cx="423724" cy="482395"/>
+        </a:xfrm>
+        <a:prstGeom prst="bentUpArrow">
+          <a:avLst>
+            <a:gd name="adj1" fmla="val 32840"/>
+            <a:gd name="adj2" fmla="val 25000"/>
+            <a:gd name="adj3" fmla="val 35780"/>
+          </a:avLst>
+        </a:prstGeom>
+        <a:solidFill>
+          <a:schemeClr val="accent1">
+            <a:tint val="50000"/>
+            <a:hueOff val="0"/>
+            <a:satOff val="0"/>
+            <a:lumOff val="0"/>
+            <a:alphaOff val="0"/>
+          </a:schemeClr>
+        </a:solidFill>
+        <a:ln w="19050" cap="flat" cmpd="sng" algn="ctr">
+          <a:solidFill>
+            <a:schemeClr val="lt1">
+              <a:hueOff val="0"/>
+              <a:satOff val="0"/>
+              <a:lumOff val="0"/>
+              <a:alphaOff val="0"/>
+            </a:schemeClr>
+          </a:solidFill>
+          <a:prstDash val="solid"/>
+          <a:miter lim="800000"/>
+        </a:ln>
+        <a:effectLst/>
+      </dsp:spPr>
+      <dsp:style>
+        <a:lnRef idx="2">
+          <a:scrgbClr r="0" g="0" b="0"/>
+        </a:lnRef>
+        <a:fillRef idx="1">
+          <a:scrgbClr r="0" g="0" b="0"/>
+        </a:fillRef>
+        <a:effectRef idx="0">
+          <a:scrgbClr r="0" g="0" b="0"/>
+        </a:effectRef>
+        <a:fontRef idx="minor"/>
+      </dsp:style>
+    </dsp:sp>
+    <dsp:sp modelId="{6706FD71-5EE3-46B5-91FC-5731B449432C}">
+      <dsp:nvSpPr>
+        <dsp:cNvPr id="0" name=""/>
+        <dsp:cNvSpPr/>
+      </dsp:nvSpPr>
+      <dsp:spPr>
+        <a:xfrm>
+          <a:off x="1980703" y="9395"/>
+          <a:ext cx="713303" cy="499289"/>
+        </a:xfrm>
+        <a:prstGeom prst="roundRect">
+          <a:avLst>
+            <a:gd name="adj" fmla="val 16670"/>
+          </a:avLst>
+        </a:prstGeom>
+        <a:solidFill>
+          <a:schemeClr val="accent1">
+            <a:hueOff val="0"/>
+            <a:satOff val="0"/>
+            <a:lumOff val="0"/>
+            <a:alphaOff val="0"/>
+          </a:schemeClr>
+        </a:solidFill>
+        <a:ln w="19050" cap="flat" cmpd="sng" algn="ctr">
+          <a:solidFill>
+            <a:schemeClr val="lt1">
+              <a:hueOff val="0"/>
+              <a:satOff val="0"/>
+              <a:lumOff val="0"/>
+              <a:alphaOff val="0"/>
+            </a:schemeClr>
+          </a:solidFill>
+          <a:prstDash val="solid"/>
+          <a:miter lim="800000"/>
+        </a:ln>
+        <a:effectLst/>
+      </dsp:spPr>
+      <dsp:style>
+        <a:lnRef idx="2">
+          <a:scrgbClr r="0" g="0" b="0"/>
+        </a:lnRef>
+        <a:fillRef idx="1">
+          <a:scrgbClr r="0" g="0" b="0"/>
+        </a:fillRef>
+        <a:effectRef idx="0">
+          <a:scrgbClr r="0" g="0" b="0"/>
+        </a:effectRef>
+        <a:fontRef idx="minor">
+          <a:schemeClr val="lt1"/>
+        </a:fontRef>
+      </dsp:style>
+      <dsp:txBody>
+        <a:bodyPr spcFirstLastPara="0" vert="horz" wrap="square" lIns="41910" tIns="41910" rIns="41910" bIns="41910" numCol="1" spcCol="1270" anchor="ctr" anchorCtr="0">
+          <a:noAutofit/>
+        </a:bodyPr>
+        <a:lstStyle/>
+        <a:p>
+          <a:pPr marL="0" lvl="0" indent="0" algn="ctr" defTabSz="488950">
+            <a:lnSpc>
+              <a:spcPct val="90000"/>
+            </a:lnSpc>
+            <a:spcBef>
+              <a:spcPct val="0"/>
+            </a:spcBef>
+            <a:spcAft>
+              <a:spcPct val="35000"/>
+            </a:spcAft>
+            <a:buNone/>
+          </a:pPr>
+          <a:r>
+            <a:rPr kumimoji="1" lang="en-US" altLang="ja-JP" sz="1100" kern="1200" dirty="0" err="1"/>
+            <a:t>listHead</a:t>
+          </a:r>
+          <a:endParaRPr kumimoji="1" lang="ja-JP" altLang="en-US" sz="1100" kern="1200" dirty="0"/>
+        </a:p>
+      </dsp:txBody>
+      <dsp:txXfrm>
+        <a:off x="2005081" y="33773"/>
+        <a:ext cx="664547" cy="450533"/>
+      </dsp:txXfrm>
+    </dsp:sp>
+    <dsp:sp modelId="{884CA250-0DFB-4E7F-8C72-6D0A82B70C39}">
+      <dsp:nvSpPr>
+        <dsp:cNvPr id="0" name=""/>
+        <dsp:cNvSpPr/>
+      </dsp:nvSpPr>
+      <dsp:spPr>
+        <a:xfrm>
+          <a:off x="2694007" y="57013"/>
+          <a:ext cx="518788" cy="403547"/>
+        </a:xfrm>
+        <a:prstGeom prst="rect">
+          <a:avLst/>
+        </a:prstGeom>
+        <a:noFill/>
+        <a:ln>
+          <a:noFill/>
+        </a:ln>
+        <a:effectLst/>
+      </dsp:spPr>
+      <dsp:style>
+        <a:lnRef idx="0">
+          <a:scrgbClr r="0" g="0" b="0"/>
+        </a:lnRef>
+        <a:fillRef idx="0">
+          <a:scrgbClr r="0" g="0" b="0"/>
+        </a:fillRef>
+        <a:effectRef idx="0">
+          <a:scrgbClr r="0" g="0" b="0"/>
+        </a:effectRef>
+        <a:fontRef idx="minor"/>
+      </dsp:style>
+      <dsp:txBody>
+        <a:bodyPr spcFirstLastPara="0" vert="horz" wrap="square" lIns="38100" tIns="38100" rIns="38100" bIns="38100" numCol="1" spcCol="1270" anchor="ctr" anchorCtr="0">
+          <a:noAutofit/>
+        </a:bodyPr>
+        <a:lstStyle/>
+        <a:p>
+          <a:pPr marL="57150" lvl="1" indent="-57150" algn="l" defTabSz="355600">
+            <a:lnSpc>
+              <a:spcPct val="90000"/>
+            </a:lnSpc>
+            <a:spcBef>
+              <a:spcPct val="0"/>
+            </a:spcBef>
+            <a:spcAft>
+              <a:spcPct val="15000"/>
+            </a:spcAft>
+            <a:buChar char="•"/>
+          </a:pPr>
+          <a:r>
+            <a:rPr kumimoji="1" lang="ja-JP" altLang="en-US" sz="800" kern="1200" dirty="0"/>
+            <a:t>次への参照</a:t>
+          </a:r>
+        </a:p>
+      </dsp:txBody>
+      <dsp:txXfrm>
+        <a:off x="2694007" y="57013"/>
+        <a:ext cx="518788" cy="403547"/>
+      </dsp:txXfrm>
+    </dsp:sp>
+    <dsp:sp modelId="{68104B2B-82FF-4DD5-A0D5-5C1B93E54737}">
+      <dsp:nvSpPr>
+        <dsp:cNvPr id="0" name=""/>
+        <dsp:cNvSpPr/>
+      </dsp:nvSpPr>
+      <dsp:spPr>
+        <a:xfrm rot="5400000">
+          <a:off x="2684369" y="1039968"/>
+          <a:ext cx="423724" cy="482395"/>
+        </a:xfrm>
+        <a:prstGeom prst="bentUpArrow">
+          <a:avLst>
+            <a:gd name="adj1" fmla="val 32840"/>
+            <a:gd name="adj2" fmla="val 25000"/>
+            <a:gd name="adj3" fmla="val 35780"/>
+          </a:avLst>
+        </a:prstGeom>
+        <a:solidFill>
+          <a:schemeClr val="accent1">
+            <a:tint val="50000"/>
+            <a:hueOff val="0"/>
+            <a:satOff val="0"/>
+            <a:lumOff val="0"/>
+            <a:alphaOff val="0"/>
+          </a:schemeClr>
+        </a:solidFill>
+        <a:ln w="19050" cap="flat" cmpd="sng" algn="ctr">
+          <a:solidFill>
+            <a:schemeClr val="lt1">
+              <a:hueOff val="0"/>
+              <a:satOff val="0"/>
+              <a:lumOff val="0"/>
+              <a:alphaOff val="0"/>
+            </a:schemeClr>
+          </a:solidFill>
+          <a:prstDash val="solid"/>
+          <a:miter lim="800000"/>
+        </a:ln>
+        <a:effectLst/>
+      </dsp:spPr>
+      <dsp:style>
+        <a:lnRef idx="2">
+          <a:scrgbClr r="0" g="0" b="0"/>
+        </a:lnRef>
+        <a:fillRef idx="1">
+          <a:scrgbClr r="0" g="0" b="0"/>
+        </a:fillRef>
+        <a:effectRef idx="0">
+          <a:scrgbClr r="0" g="0" b="0"/>
+        </a:effectRef>
+        <a:fontRef idx="minor"/>
+      </dsp:style>
+    </dsp:sp>
+    <dsp:sp modelId="{0D1F8386-0D4D-4B8C-9554-7A5607658609}">
+      <dsp:nvSpPr>
+        <dsp:cNvPr id="0" name=""/>
+        <dsp:cNvSpPr/>
+      </dsp:nvSpPr>
+      <dsp:spPr>
+        <a:xfrm>
+          <a:off x="2572107" y="570261"/>
+          <a:ext cx="713303" cy="499289"/>
+        </a:xfrm>
+        <a:prstGeom prst="roundRect">
+          <a:avLst>
+            <a:gd name="adj" fmla="val 16670"/>
+          </a:avLst>
+        </a:prstGeom>
+        <a:solidFill>
+          <a:schemeClr val="accent1">
+            <a:hueOff val="0"/>
+            <a:satOff val="0"/>
+            <a:lumOff val="0"/>
+            <a:alphaOff val="0"/>
+          </a:schemeClr>
+        </a:solidFill>
+        <a:ln w="19050" cap="flat" cmpd="sng" algn="ctr">
+          <a:solidFill>
+            <a:schemeClr val="lt1">
+              <a:hueOff val="0"/>
+              <a:satOff val="0"/>
+              <a:lumOff val="0"/>
+              <a:alphaOff val="0"/>
+            </a:schemeClr>
+          </a:solidFill>
+          <a:prstDash val="solid"/>
+          <a:miter lim="800000"/>
+        </a:ln>
+        <a:effectLst/>
+      </dsp:spPr>
+      <dsp:style>
+        <a:lnRef idx="2">
+          <a:scrgbClr r="0" g="0" b="0"/>
+        </a:lnRef>
+        <a:fillRef idx="1">
+          <a:scrgbClr r="0" g="0" b="0"/>
+        </a:fillRef>
+        <a:effectRef idx="0">
+          <a:scrgbClr r="0" g="0" b="0"/>
+        </a:effectRef>
+        <a:fontRef idx="minor">
+          <a:schemeClr val="lt1"/>
+        </a:fontRef>
+      </dsp:style>
+      <dsp:txBody>
+        <a:bodyPr spcFirstLastPara="0" vert="horz" wrap="square" lIns="41910" tIns="41910" rIns="41910" bIns="41910" numCol="1" spcCol="1270" anchor="ctr" anchorCtr="0">
+          <a:noAutofit/>
+        </a:bodyPr>
+        <a:lstStyle/>
+        <a:p>
+          <a:pPr marL="0" lvl="0" indent="0" algn="ctr" defTabSz="488950">
+            <a:lnSpc>
+              <a:spcPct val="90000"/>
+            </a:lnSpc>
+            <a:spcBef>
+              <a:spcPct val="0"/>
+            </a:spcBef>
+            <a:spcAft>
+              <a:spcPct val="35000"/>
+            </a:spcAft>
+            <a:buNone/>
+          </a:pPr>
+          <a:r>
+            <a:rPr kumimoji="1" lang="ja-JP" altLang="en-US" sz="1100" kern="1200" dirty="0"/>
+            <a:t>要素</a:t>
+          </a:r>
+          <a:r>
+            <a:rPr kumimoji="1" lang="en-US" altLang="ja-JP" sz="1100" kern="1200" dirty="0"/>
+            <a:t>2</a:t>
+          </a:r>
+          <a:endParaRPr kumimoji="1" lang="ja-JP" altLang="en-US" sz="1100" kern="1200" dirty="0"/>
+        </a:p>
+      </dsp:txBody>
+      <dsp:txXfrm>
+        <a:off x="2596485" y="594639"/>
+        <a:ext cx="664547" cy="450533"/>
+      </dsp:txXfrm>
+    </dsp:sp>
+    <dsp:sp modelId="{EAB6310A-69A0-43AB-AB1F-5C172284DF98}">
+      <dsp:nvSpPr>
+        <dsp:cNvPr id="0" name=""/>
+        <dsp:cNvSpPr/>
+      </dsp:nvSpPr>
+      <dsp:spPr>
+        <a:xfrm>
+          <a:off x="3285411" y="617880"/>
+          <a:ext cx="518788" cy="403547"/>
+        </a:xfrm>
+        <a:prstGeom prst="rect">
+          <a:avLst/>
+        </a:prstGeom>
+        <a:noFill/>
+        <a:ln>
+          <a:noFill/>
+        </a:ln>
+        <a:effectLst/>
+      </dsp:spPr>
+      <dsp:style>
+        <a:lnRef idx="0">
+          <a:scrgbClr r="0" g="0" b="0"/>
+        </a:lnRef>
+        <a:fillRef idx="0">
+          <a:scrgbClr r="0" g="0" b="0"/>
+        </a:fillRef>
+        <a:effectRef idx="0">
+          <a:scrgbClr r="0" g="0" b="0"/>
+        </a:effectRef>
+        <a:fontRef idx="minor"/>
+      </dsp:style>
+      <dsp:txBody>
+        <a:bodyPr spcFirstLastPara="0" vert="horz" wrap="square" lIns="38100" tIns="38100" rIns="38100" bIns="38100" numCol="1" spcCol="1270" anchor="ctr" anchorCtr="0">
+          <a:noAutofit/>
+        </a:bodyPr>
+        <a:lstStyle/>
+        <a:p>
+          <a:pPr marL="57150" lvl="1" indent="-57150" algn="l" defTabSz="355600">
+            <a:lnSpc>
+              <a:spcPct val="90000"/>
+            </a:lnSpc>
+            <a:spcBef>
+              <a:spcPct val="0"/>
+            </a:spcBef>
+            <a:spcAft>
+              <a:spcPct val="15000"/>
+            </a:spcAft>
+            <a:buChar char="•"/>
+          </a:pPr>
+          <a:r>
+            <a:rPr kumimoji="1" lang="ja-JP" altLang="en-US" sz="800" kern="1200" dirty="0"/>
+            <a:t>次への参照</a:t>
+          </a:r>
+        </a:p>
+      </dsp:txBody>
+      <dsp:txXfrm>
+        <a:off x="3285411" y="617880"/>
+        <a:ext cx="518788" cy="403547"/>
+      </dsp:txXfrm>
+    </dsp:sp>
+    <dsp:sp modelId="{D7070662-D8F1-46DB-AF4A-CC922C5CEE7F}">
+      <dsp:nvSpPr>
+        <dsp:cNvPr id="0" name=""/>
+        <dsp:cNvSpPr/>
+      </dsp:nvSpPr>
+      <dsp:spPr>
+        <a:xfrm>
+          <a:off x="3163512" y="1131127"/>
+          <a:ext cx="713303" cy="499289"/>
+        </a:xfrm>
+        <a:prstGeom prst="roundRect">
+          <a:avLst>
+            <a:gd name="adj" fmla="val 16670"/>
+          </a:avLst>
+        </a:prstGeom>
+        <a:solidFill>
+          <a:schemeClr val="accent1">
+            <a:hueOff val="0"/>
+            <a:satOff val="0"/>
+            <a:lumOff val="0"/>
+            <a:alphaOff val="0"/>
+          </a:schemeClr>
+        </a:solidFill>
+        <a:ln w="19050" cap="flat" cmpd="sng" algn="ctr">
+          <a:solidFill>
+            <a:schemeClr val="lt1">
+              <a:hueOff val="0"/>
+              <a:satOff val="0"/>
+              <a:lumOff val="0"/>
+              <a:alphaOff val="0"/>
+            </a:schemeClr>
+          </a:solidFill>
+          <a:prstDash val="solid"/>
+          <a:miter lim="800000"/>
+        </a:ln>
+        <a:effectLst/>
+      </dsp:spPr>
+      <dsp:style>
+        <a:lnRef idx="2">
+          <a:scrgbClr r="0" g="0" b="0"/>
+        </a:lnRef>
+        <a:fillRef idx="1">
+          <a:scrgbClr r="0" g="0" b="0"/>
+        </a:fillRef>
+        <a:effectRef idx="0">
+          <a:scrgbClr r="0" g="0" b="0"/>
+        </a:effectRef>
+        <a:fontRef idx="minor">
+          <a:schemeClr val="lt1"/>
+        </a:fontRef>
+      </dsp:style>
+      <dsp:txBody>
+        <a:bodyPr spcFirstLastPara="0" vert="horz" wrap="square" lIns="41910" tIns="41910" rIns="41910" bIns="41910" numCol="1" spcCol="1270" anchor="ctr" anchorCtr="0">
+          <a:noAutofit/>
+        </a:bodyPr>
+        <a:lstStyle/>
+        <a:p>
+          <a:pPr marL="0" lvl="0" indent="0" algn="ctr" defTabSz="488950">
+            <a:lnSpc>
+              <a:spcPct val="90000"/>
+            </a:lnSpc>
+            <a:spcBef>
+              <a:spcPct val="0"/>
+            </a:spcBef>
+            <a:spcAft>
+              <a:spcPct val="35000"/>
+            </a:spcAft>
+            <a:buNone/>
+          </a:pPr>
+          <a:r>
+            <a:rPr kumimoji="1" lang="ja-JP" altLang="en-US" sz="1100" kern="1200" dirty="0"/>
+            <a:t>要素</a:t>
+          </a:r>
+          <a:r>
+            <a:rPr kumimoji="1" lang="en-US" altLang="ja-JP" sz="1100" kern="1200" dirty="0"/>
+            <a:t>3</a:t>
+          </a:r>
+          <a:endParaRPr kumimoji="1" lang="ja-JP" altLang="en-US" sz="1100" kern="1200" dirty="0"/>
+        </a:p>
+      </dsp:txBody>
+      <dsp:txXfrm>
+        <a:off x="3187890" y="1155505"/>
+        <a:ext cx="664547" cy="450533"/>
+      </dsp:txXfrm>
+    </dsp:sp>
+    <dsp:sp modelId="{47AC1F21-9C96-426C-AD4C-F99814E613A9}">
+      <dsp:nvSpPr>
+        <dsp:cNvPr id="0" name=""/>
+        <dsp:cNvSpPr/>
+      </dsp:nvSpPr>
+      <dsp:spPr>
+        <a:xfrm>
+          <a:off x="3876815" y="1178746"/>
+          <a:ext cx="518788" cy="403547"/>
+        </a:xfrm>
+        <a:prstGeom prst="rect">
+          <a:avLst/>
+        </a:prstGeom>
+        <a:noFill/>
+        <a:ln>
+          <a:noFill/>
+        </a:ln>
+        <a:effectLst/>
+      </dsp:spPr>
+      <dsp:style>
+        <a:lnRef idx="0">
+          <a:scrgbClr r="0" g="0" b="0"/>
+        </a:lnRef>
+        <a:fillRef idx="0">
+          <a:scrgbClr r="0" g="0" b="0"/>
+        </a:fillRef>
+        <a:effectRef idx="0">
+          <a:scrgbClr r="0" g="0" b="0"/>
+        </a:effectRef>
+        <a:fontRef idx="minor"/>
+      </dsp:style>
+      <dsp:txBody>
+        <a:bodyPr spcFirstLastPara="0" vert="horz" wrap="square" lIns="45720" tIns="45720" rIns="45720" bIns="45720" numCol="1" spcCol="1270" anchor="ctr" anchorCtr="0">
+          <a:noAutofit/>
+        </a:bodyPr>
+        <a:lstStyle/>
+        <a:p>
+          <a:pPr marL="57150" lvl="1" indent="-57150" algn="l" defTabSz="400050">
+            <a:lnSpc>
+              <a:spcPct val="90000"/>
+            </a:lnSpc>
+            <a:spcBef>
+              <a:spcPct val="0"/>
+            </a:spcBef>
+            <a:spcAft>
+              <a:spcPct val="15000"/>
+            </a:spcAft>
+            <a:buChar char="•"/>
+          </a:pPr>
+          <a:r>
+            <a:rPr kumimoji="1" lang="ja-JP" altLang="en-US" sz="900" kern="1200" dirty="0"/>
+            <a:t>未定義</a:t>
+          </a:r>
+        </a:p>
+      </dsp:txBody>
+      <dsp:txXfrm>
+        <a:off x="3876815" y="1178746"/>
+        <a:ext cx="518788" cy="403547"/>
+      </dsp:txXfrm>
+    </dsp:sp>
+  </dsp:spTree>
+</dsp:drawing>
+</file>
+
+<file path=ppt/diagrams/layout1.xml><?xml version="1.0" encoding="utf-8"?>
+<dgm:layoutDef xmlns:dgm="http://schemas.openxmlformats.org/drawingml/2006/diagram" xmlns:a="http://schemas.openxmlformats.org/drawingml/2006/main" uniqueId="urn:microsoft.com/office/officeart/2005/8/layout/cycle3">
+  <dgm:title val=""/>
+  <dgm:desc val=""/>
+  <dgm:catLst>
+    <dgm:cat type="cycle" pri="5000"/>
+  </dgm:catLst>
+  <dgm:sampData>
+    <dgm:dataModel>
+      <dgm:ptLst>
+        <dgm:pt modelId="0" type="doc"/>
+        <dgm:pt modelId="1">
+          <dgm:prSet phldr="1"/>
+        </dgm:pt>
+        <dgm:pt modelId="2">
+          <dgm:prSet phldr="1"/>
+        </dgm:pt>
+        <dgm:pt modelId="3">
+          <dgm:prSet phldr="1"/>
+        </dgm:pt>
+        <dgm:pt modelId="4">
+          <dgm:prSet phldr="1"/>
+        </dgm:pt>
+        <dgm:pt modelId="5">
+          <dgm:prSet phldr="1"/>
+        </dgm:pt>
+      </dgm:ptLst>
+      <dgm:cxnLst>
+        <dgm:cxn modelId="6" srcId="0" destId="1" srcOrd="0" destOrd="0"/>
+        <dgm:cxn modelId="7" srcId="0" destId="2" srcOrd="1" destOrd="0"/>
+        <dgm:cxn modelId="8" srcId="0" destId="3" srcOrd="2" destOrd="0"/>
+        <dgm:cxn modelId="9" srcId="0" destId="4" srcOrd="3" destOrd="0"/>
+        <dgm:cxn modelId="10" srcId="0" destId="5" srcOrd="4" destOrd="0"/>
+      </dgm:cxnLst>
+      <dgm:bg/>
+      <dgm:whole/>
+    </dgm:dataModel>
+  </dgm:sampData>
+  <dgm:styleData>
+    <dgm:dataModel>
+      <dgm:ptLst>
+        <dgm:pt modelId="0" type="doc"/>
+        <dgm:pt modelId="1"/>
+        <dgm:pt modelId="2"/>
+        <dgm:pt modelId="3"/>
+      </dgm:ptLst>
+      <dgm:cxnLst>
+        <dgm:cxn modelId="4" srcId="0" destId="1" srcOrd="0" destOrd="0"/>
+        <dgm:cxn modelId="5" srcId="0" destId="2" srcOrd="1" destOrd="0"/>
+        <dgm:cxn modelId="6" srcId="0" destId="3" srcOrd="2" destOrd="0"/>
+      </dgm:cxnLst>
+      <dgm:bg/>
+      <dgm:whole/>
+    </dgm:dataModel>
+  </dgm:styleData>
+  <dgm:clrData>
+    <dgm:dataModel>
+      <dgm:ptLst>
+        <dgm:pt modelId="0" type="doc"/>
+        <dgm:pt modelId="1"/>
+        <dgm:pt modelId="2"/>
+        <dgm:pt modelId="3"/>
+        <dgm:pt modelId="4"/>
+        <dgm:pt modelId="5"/>
+        <dgm:pt modelId="6"/>
+      </dgm:ptLst>
+      <dgm:cxnLst>
+        <dgm:cxn modelId="7" srcId="0" destId="1" srcOrd="0" destOrd="0"/>
+        <dgm:cxn modelId="8" srcId="0" destId="2" srcOrd="1" destOrd="0"/>
+        <dgm:cxn modelId="9" srcId="0" destId="3" srcOrd="2" destOrd="0"/>
+        <dgm:cxn modelId="10" srcId="0" destId="4" srcOrd="3" destOrd="0"/>
+        <dgm:cxn modelId="11" srcId="0" destId="5" srcOrd="4" destOrd="0"/>
+        <dgm:cxn modelId="12" srcId="0" destId="6" srcOrd="5" destOrd="0"/>
+      </dgm:cxnLst>
+      <dgm:bg/>
+      <dgm:whole/>
+    </dgm:dataModel>
+  </dgm:clrData>
+  <dgm:layoutNode name="Name0">
+    <dgm:varLst>
+      <dgm:dir/>
+      <dgm:resizeHandles val="exact"/>
+    </dgm:varLst>
+    <dgm:choose name="Name1">
+      <dgm:if name="Name2" axis="ch" ptType="node" func="cnt" op="equ" val="2">
+        <dgm:alg type="composite">
+          <dgm:param type="ar" val="0.9"/>
+        </dgm:alg>
+        <dgm:shape xmlns:r="http://schemas.openxmlformats.org/officeDocument/2006/relationships" r:blip="">
+          <dgm:adjLst/>
+        </dgm:shape>
+        <dgm:presOf/>
+        <dgm:constrLst>
+          <dgm:constr type="primFontSz" for="ch" ptType="node" op="equ" val="65"/>
+          <dgm:constr type="ctrX" for="ch" forName="node1" refType="w" fact="0.5"/>
+          <dgm:constr type="t" for="ch" forName="node1"/>
+          <dgm:constr type="w" for="ch" forName="node1" refType="w" fact="0.8"/>
+          <dgm:constr type="h" for="ch" forName="node1" refType="w" refFor="ch" refForName="node1" fact="0.5"/>
+          <dgm:constr type="ctrX" for="ch" forName="sibTrans" refType="w" fact="0.5"/>
+          <dgm:constr type="t" for="ch" forName="sibTrans"/>
+          <dgm:constr type="w" for="ch" forName="sibTrans" refType="w" fact="0.8"/>
+          <dgm:constr type="h" for="ch" forName="sibTrans" refType="w" refFor="ch" refForName="node1" fact="0.5"/>
+          <dgm:constr type="userA" for="ch" forName="sibTrans" refType="w" fact="1.07"/>
+          <dgm:constr type="ctrX" for="ch" forName="node2" refType="w" fact="0.5"/>
+          <dgm:constr type="b" for="ch" forName="node2" refType="h"/>
+          <dgm:constr type="w" for="ch" forName="node2" refType="w" fact="0.8"/>
+          <dgm:constr type="h" for="ch" forName="node2" refType="w" refFor="ch" refForName="node1" fact="0.5"/>
+          <dgm:constr type="l" for="ch" forName="sp1"/>
+          <dgm:constr type="t" for="ch" forName="sp1" refType="h" fact="0.5"/>
+          <dgm:constr type="w" for="ch" forName="sp1" val="1"/>
+          <dgm:constr type="h" for="ch" forName="sp1" val="1"/>
+          <dgm:constr type="r" for="ch" forName="sp2" refType="w"/>
+          <dgm:constr type="t" for="ch" forName="sp2" refType="h" fact="0.5"/>
+          <dgm:constr type="w" for="ch" forName="sp2" val="1"/>
+          <dgm:constr type="h" for="ch" forName="sp2" val="1"/>
+        </dgm:constrLst>
+        <dgm:ruleLst/>
+      </dgm:if>
+      <dgm:else name="Name3">
+        <dgm:alg type="composite"/>
+        <dgm:shape xmlns:r="http://schemas.openxmlformats.org/officeDocument/2006/relationships" r:blip="">
+          <dgm:adjLst/>
+        </dgm:shape>
+        <dgm:presOf/>
+        <dgm:constrLst>
+          <dgm:constr type="primFontSz" for="ch" ptType="node" op="equ" val="65"/>
+        </dgm:constrLst>
+        <dgm:ruleLst/>
+      </dgm:else>
+    </dgm:choose>
+    <dgm:choose name="Name4">
+      <dgm:if name="Name5" axis="ch" ptType="node" func="cnt" op="equ" val="2">
+        <dgm:layoutNode name="node1">
+          <dgm:varLst>
+            <dgm:bulletEnabled val="1"/>
+          </dgm:varLst>
+          <dgm:alg type="tx"/>
+          <dgm:shape xmlns:r="http://schemas.openxmlformats.org/officeDocument/2006/relationships" type="roundRect" r:blip="">
+            <dgm:adjLst/>
+          </dgm:shape>
+          <dgm:presOf axis="ch desOrSelf" ptType="node node" st="1 1" cnt="1 0"/>
+          <dgm:constrLst>
+            <dgm:constr type="tMarg" refType="primFontSz" fact="0.3"/>
+            <dgm:constr type="bMarg" refType="primFontSz" fact="0.3"/>
+            <dgm:constr type="lMarg" refType="primFontSz" fact="0.3"/>
+            <dgm:constr type="rMarg" refType="primFontSz" fact="0.3"/>
+          </dgm:constrLst>
+          <dgm:ruleLst>
+            <dgm:rule type="primFontSz" val="5" fact="NaN" max="NaN"/>
+          </dgm:ruleLst>
+        </dgm:layoutNode>
+        <dgm:layoutNode name="sibTrans" styleLbl="bgShp">
+          <dgm:choose name="Name6">
+            <dgm:if name="Name7" func="var" arg="dir" op="equ" val="norm">
+              <dgm:alg type="conn">
+                <dgm:param type="connRout" val="longCurve"/>
+                <dgm:param type="begPts" val="midR"/>
+                <dgm:param type="endPts" val="midL"/>
+                <dgm:param type="dstNode" val="node1"/>
+              </dgm:alg>
+              <dgm:shape xmlns:r="http://schemas.openxmlformats.org/officeDocument/2006/relationships" type="conn" r:blip="" zOrderOff="-2">
+                <dgm:adjLst/>
+              </dgm:shape>
+              <dgm:presOf axis="ch" ptType="sibTrans"/>
+              <dgm:constrLst>
+                <dgm:constr type="userA"/>
+                <dgm:constr type="diam" refType="userA" fact="-1"/>
+                <dgm:constr type="wArH" refType="userA" fact="0.05"/>
+                <dgm:constr type="hArH" refType="userA" fact="0.1"/>
+                <dgm:constr type="stemThick" refType="userA" fact="0.06"/>
+                <dgm:constr type="begPad" refType="connDist" fact="-0.2"/>
+                <dgm:constr type="endPad" refType="connDist" fact="0.05"/>
+              </dgm:constrLst>
+            </dgm:if>
+            <dgm:else name="Name8">
+              <dgm:alg type="conn">
+                <dgm:param type="connRout" val="longCurve"/>
+                <dgm:param type="begPts" val="midL"/>
+                <dgm:param type="endPts" val="midR"/>
+                <dgm:param type="dstNode" val="node1"/>
+              </dgm:alg>
+              <dgm:shape xmlns:r="http://schemas.openxmlformats.org/officeDocument/2006/relationships" type="conn" r:blip="" zOrderOff="-2">
+                <dgm:adjLst/>
+              </dgm:shape>
+              <dgm:presOf axis="ch" ptType="sibTrans"/>
+              <dgm:constrLst>
+                <dgm:constr type="userA"/>
+                <dgm:constr type="diam" refType="userA"/>
+                <dgm:constr type="wArH" refType="userA" fact="0.05"/>
+                <dgm:constr type="hArH" refType="userA" fact="0.1"/>
+                <dgm:constr type="stemThick" refType="userA" fact="0.06"/>
+                <dgm:constr type="begPad" refType="connDist" fact="-0.2"/>
+                <dgm:constr type="endPad" refType="connDist" fact="0.05"/>
+              </dgm:constrLst>
+            </dgm:else>
+          </dgm:choose>
+          <dgm:ruleLst/>
+        </dgm:layoutNode>
+        <dgm:layoutNode name="node2">
+          <dgm:varLst>
+            <dgm:bulletEnabled val="1"/>
+          </dgm:varLst>
+          <dgm:alg type="tx"/>
+          <dgm:shape xmlns:r="http://schemas.openxmlformats.org/officeDocument/2006/relationships" type="roundRect" r:blip="">
+            <dgm:adjLst/>
+          </dgm:shape>
+          <dgm:presOf axis="ch desOrSelf" ptType="node node" st="2 1" cnt="1 0"/>
+          <dgm:constrLst>
+            <dgm:constr type="tMarg" refType="primFontSz" fact="0.3"/>
+            <dgm:constr type="bMarg" refType="primFontSz" fact="0.3"/>
+            <dgm:constr type="lMarg" refType="primFontSz" fact="0.3"/>
+            <dgm:constr type="rMarg" refType="primFontSz" fact="0.3"/>
+          </dgm:constrLst>
+          <dgm:ruleLst>
+            <dgm:rule type="primFontSz" val="5" fact="NaN" max="NaN"/>
+          </dgm:ruleLst>
+        </dgm:layoutNode>
+        <dgm:layoutNode name="sp1">
+          <dgm:alg type="sp"/>
+          <dgm:shape xmlns:r="http://schemas.openxmlformats.org/officeDocument/2006/relationships" r:blip="">
+            <dgm:adjLst/>
+          </dgm:shape>
+          <dgm:presOf/>
+          <dgm:constrLst/>
+          <dgm:ruleLst/>
+        </dgm:layoutNode>
+        <dgm:layoutNode name="sp2">
+          <dgm:alg type="sp"/>
+          <dgm:shape xmlns:r="http://schemas.openxmlformats.org/officeDocument/2006/relationships" r:blip="">
+            <dgm:adjLst/>
+          </dgm:shape>
+          <dgm:presOf/>
+          <dgm:constrLst/>
+          <dgm:ruleLst/>
+        </dgm:layoutNode>
+      </dgm:if>
+      <dgm:else name="Name9">
+        <dgm:layoutNode name="cycle">
+          <dgm:choose name="Name10">
+            <dgm:if name="Name11" func="var" arg="dir" op="equ" val="norm">
+              <dgm:alg type="cycle">
+                <dgm:param type="stAng" val="0"/>
+                <dgm:param type="spanAng" val="360"/>
+              </dgm:alg>
+              <dgm:shape xmlns:r="http://schemas.openxmlformats.org/officeDocument/2006/relationships" r:blip="">
+                <dgm:adjLst/>
+              </dgm:shape>
+              <dgm:presOf/>
+              <dgm:constrLst>
+                <dgm:constr type="diam" refType="w"/>
+                <dgm:constr type="w" for="ch" ptType="node" refType="w"/>
+                <dgm:constr type="sibSp" val="15"/>
+                <dgm:constr type="userA" for="ch" ptType="sibTrans" refType="diam" op="equ" fact="-1"/>
+                <dgm:constr type="wArH" for="ch" ptType="sibTrans" refType="diam" op="equ" fact="0.05"/>
+                <dgm:constr type="hArH" for="ch" ptType="sibTrans" refType="diam" op="equ" fact="0.1"/>
+                <dgm:constr type="stemThick" for="ch" ptType="sibTrans" refType="diam" op="equ" fact="0.065"/>
+                <dgm:constr type="primFontSz" for="ch" ptType="node" op="equ"/>
+              </dgm:constrLst>
+            </dgm:if>
+            <dgm:else name="Name12">
+              <dgm:alg type="cycle">
+                <dgm:param type="stAng" val="0"/>
+                <dgm:param type="spanAng" val="-360"/>
+              </dgm:alg>
+              <dgm:shape xmlns:r="http://schemas.openxmlformats.org/officeDocument/2006/relationships" r:blip="">
+                <dgm:adjLst/>
+              </dgm:shape>
+              <dgm:presOf/>
+              <dgm:constrLst>
+                <dgm:constr type="diam" refType="w"/>
+                <dgm:constr type="w" for="ch" ptType="node" refType="w"/>
+                <dgm:constr type="sibSp" val="15"/>
+                <dgm:constr type="userA" for="ch" ptType="sibTrans" refType="diam" op="equ"/>
+                <dgm:constr type="wArH" for="ch" ptType="sibTrans" refType="diam" op="equ" fact="0.05"/>
+                <dgm:constr type="hArH" for="ch" ptType="sibTrans" refType="diam" op="equ" fact="0.1"/>
+                <dgm:constr type="stemThick" for="ch" ptType="sibTrans" refType="diam" op="equ" fact="0.065"/>
+                <dgm:constr type="primFontSz" for="ch" ptType="node" op="equ"/>
+              </dgm:constrLst>
+            </dgm:else>
+          </dgm:choose>
+          <dgm:ruleLst/>
+          <dgm:forEach name="nodesFirstNodeForEach" axis="ch" ptType="node" cnt="1">
+            <dgm:layoutNode name="nodeFirstNode">
+              <dgm:varLst>
+                <dgm:bulletEnabled val="1"/>
+              </dgm:varLst>
+              <dgm:alg type="tx"/>
+              <dgm:shape xmlns:r="http://schemas.openxmlformats.org/officeDocument/2006/relationships" type="roundRect" r:blip="">
+                <dgm:adjLst/>
+              </dgm:shape>
+              <dgm:presOf axis="desOrSelf" ptType="node"/>
+              <dgm:constrLst>
+                <dgm:constr type="h" refType="w" fact="0.5"/>
+                <dgm:constr type="primFontSz" val="65"/>
+                <dgm:constr type="tMarg" refType="primFontSz" fact="0.3"/>
+                <dgm:constr type="bMarg" refType="primFontSz" fact="0.3"/>
+                <dgm:constr type="lMarg" refType="primFontSz" fact="0.3"/>
+                <dgm:constr type="rMarg" refType="primFontSz" fact="0.3"/>
+              </dgm:constrLst>
+              <dgm:ruleLst>
+                <dgm:rule type="primFontSz" val="5" fact="NaN" max="NaN"/>
+              </dgm:ruleLst>
+            </dgm:layoutNode>
+            <dgm:forEach name="sibTransForEach" axis="followSib" ptType="sibTrans" cnt="1">
+              <dgm:layoutNode name="sibTransFirstNode" styleLbl="bgShp">
+                <dgm:choose name="Name13">
+                  <dgm:if name="Name14" func="var" arg="dir" op="equ" val="norm">
+                    <dgm:alg type="conn">
+                      <dgm:param type="connRout" val="longCurve"/>
+                      <dgm:param type="begPts" val="midR"/>
+                      <dgm:param type="endPts" val="midL"/>
+                      <dgm:param type="dstNode" val="nodeFirstNode"/>
+                    </dgm:alg>
+                  </dgm:if>
+                  <dgm:else name="Name15">
+                    <dgm:alg type="conn">
+                      <dgm:param type="connRout" val="longCurve"/>
+                      <dgm:param type="begPts" val="midL"/>
+                      <dgm:param type="endPts" val="midR"/>
+                      <dgm:param type="dstNode" val="nodeFirstNode"/>
+                    </dgm:alg>
+                  </dgm:else>
+                </dgm:choose>
+                <dgm:shape xmlns:r="http://schemas.openxmlformats.org/officeDocument/2006/relationships" type="conn" r:blip="" zOrderOff="-2">
+                  <dgm:adjLst/>
+                </dgm:shape>
+                <dgm:presOf axis="self"/>
+                <dgm:choose name="Name16">
+                  <dgm:if name="Name17" axis="par ch" ptType="doc node" func="cnt" op="equ" val="3">
+                    <dgm:constrLst>
+                      <dgm:constr type="userA"/>
+                      <dgm:constr type="diam" refType="userA" fact="1.01"/>
+                      <dgm:constr type="begPad" refType="connDist" fact="-0.2"/>
+                      <dgm:constr type="endPad" refType="connDist" fact="0.05"/>
+                    </dgm:constrLst>
+                  </dgm:if>
+                  <dgm:if name="Name18" axis="par ch" ptType="doc node" func="cnt" op="equ" val="4">
+                    <dgm:constrLst>
+                      <dgm:constr type="userA"/>
+                      <dgm:constr type="diam" refType="userA" fact="1.26"/>
+                      <dgm:constr type="begPad" refType="connDist" fact="-0.2"/>
+                      <dgm:constr type="endPad" refType="connDist" fact="0.05"/>
+                    </dgm:constrLst>
+                  </dgm:if>
+                  <dgm:if name="Name19" axis="par ch" ptType="doc node" func="cnt" op="equ" val="5">
+                    <dgm:constrLst>
+                      <dgm:constr type="userA"/>
+                      <dgm:constr type="diam" refType="userA" fact="1.04"/>
+                      <dgm:constr type="begPad" refType="connDist" fact="-0.2"/>
+                      <dgm:constr type="endPad" refType="connDist" fact="0.05"/>
+                    </dgm:constrLst>
+                  </dgm:if>
+                  <dgm:if name="Name20" axis="par ch" ptType="doc node" func="cnt" op="equ" val="6">
+                    <dgm:constrLst>
+                      <dgm:constr type="userA"/>
+                      <dgm:constr type="diam" refType="userA" fact="1.1"/>
+                      <dgm:constr type="begPad" refType="connDist" fact="-0.2"/>
+                      <dgm:constr type="endPad" refType="connDist" fact="0.05"/>
+                    </dgm:constrLst>
+                  </dgm:if>
+                  <dgm:else name="Name21">
+                    <dgm:constrLst>
+                      <dgm:constr type="userA"/>
+                      <dgm:constr type="diam" refType="userA" fact="1.04"/>
+                      <dgm:constr type="begPad" refType="connDist" fact="-0.2"/>
+                      <dgm:constr type="endPad" refType="connDist" fact="0.05"/>
+                    </dgm:constrLst>
+                  </dgm:else>
+                </dgm:choose>
+                <dgm:ruleLst/>
+              </dgm:layoutNode>
+            </dgm:forEach>
+          </dgm:forEach>
+          <dgm:forEach name="followingNodesForEach" axis="ch" ptType="node" st="2">
+            <dgm:layoutNode name="nodeFollowingNodes">
+              <dgm:varLst>
+                <dgm:bulletEnabled val="1"/>
+              </dgm:varLst>
+              <dgm:alg type="tx"/>
+              <dgm:shape xmlns:r="http://schemas.openxmlformats.org/officeDocument/2006/relationships" type="roundRect" r:blip="">
+                <dgm:adjLst/>
+              </dgm:shape>
+              <dgm:presOf axis="desOrSelf" ptType="node"/>
+              <dgm:constrLst>
+                <dgm:constr type="h" refType="w" fact="0.5"/>
+                <dgm:constr type="primFontSz" val="65"/>
+                <dgm:constr type="tMarg" refType="primFontSz" fact="0.3"/>
+                <dgm:constr type="bMarg" refType="primFontSz" fact="0.3"/>
+                <dgm:constr type="lMarg" refType="primFontSz" fact="0.3"/>
+                <dgm:constr type="rMarg" refType="primFontSz" fact="0.3"/>
+              </dgm:constrLst>
+              <dgm:ruleLst>
+                <dgm:rule type="primFontSz" val="5" fact="NaN" max="NaN"/>
+              </dgm:ruleLst>
+            </dgm:layoutNode>
+          </dgm:forEach>
+        </dgm:layoutNode>
+      </dgm:else>
+    </dgm:choose>
+  </dgm:layoutNode>
+</dgm:layoutDef>
+</file>
+
+<file path=ppt/diagrams/layout2.xml><?xml version="1.0" encoding="utf-8"?>
+<dgm:layoutDef xmlns:dgm="http://schemas.openxmlformats.org/drawingml/2006/diagram" xmlns:a="http://schemas.openxmlformats.org/drawingml/2006/main" uniqueId="urn:microsoft.com/office/officeart/2005/8/layout/StepDownProcess">
+  <dgm:title val=""/>
+  <dgm:desc val=""/>
+  <dgm:catLst>
+    <dgm:cat type="process" pri="1600"/>
+  </dgm:catLst>
+  <dgm:sampData>
+    <dgm:dataModel>
+      <dgm:ptLst>
+        <dgm:pt modelId="0" type="doc"/>
+        <dgm:pt modelId="10">
+          <dgm:prSet phldr="1"/>
+        </dgm:pt>
+        <dgm:pt modelId="11">
+          <dgm:prSet phldr="1"/>
+        </dgm:pt>
+        <dgm:pt modelId="20">
+          <dgm:prSet phldr="1"/>
+        </dgm:pt>
+        <dgm:pt modelId="21">
+          <dgm:prSet phldr="1"/>
+        </dgm:pt>
+        <dgm:pt modelId="30">
+          <dgm:prSet phldr="1"/>
+        </dgm:pt>
+        <dgm:pt modelId="31">
+          <dgm:prSet phldr="1"/>
+        </dgm:pt>
+      </dgm:ptLst>
+      <dgm:cxnLst>
+        <dgm:cxn modelId="60" srcId="0" destId="10" srcOrd="0" destOrd="0"/>
+        <dgm:cxn modelId="12" srcId="10" destId="11" srcOrd="0" destOrd="0"/>
+        <dgm:cxn modelId="70" srcId="0" destId="20" srcOrd="1" destOrd="0"/>
+        <dgm:cxn modelId="22" srcId="20" destId="21" srcOrd="0" destOrd="0"/>
+        <dgm:cxn modelId="80" srcId="0" destId="30" srcOrd="2" destOrd="0"/>
+        <dgm:cxn modelId="32" srcId="30" destId="31" srcOrd="0" destOrd="0"/>
+      </dgm:cxnLst>
+      <dgm:bg/>
+      <dgm:whole/>
+    </dgm:dataModel>
+  </dgm:sampData>
+  <dgm:styleData>
+    <dgm:dataModel>
+      <dgm:ptLst>
+        <dgm:pt modelId="0" type="doc"/>
+        <dgm:pt modelId="10">
+          <dgm:prSet phldr="1"/>
+        </dgm:pt>
+        <dgm:pt modelId="20">
+          <dgm:prSet phldr="1"/>
+        </dgm:pt>
+      </dgm:ptLst>
+      <dgm:cxnLst>
+        <dgm:cxn modelId="60" srcId="0" destId="10" srcOrd="0" destOrd="0"/>
+        <dgm:cxn modelId="70" srcId="0" destId="20" srcOrd="1" destOrd="0"/>
+      </dgm:cxnLst>
+      <dgm:bg/>
+      <dgm:whole/>
+    </dgm:dataModel>
+  </dgm:styleData>
+  <dgm:clrData>
+    <dgm:dataModel>
+      <dgm:ptLst>
+        <dgm:pt modelId="0" type="doc"/>
+        <dgm:pt modelId="10">
+          <dgm:prSet phldr="1"/>
+        </dgm:pt>
+        <dgm:pt modelId="20">
+          <dgm:prSet phldr="1"/>
+        </dgm:pt>
+        <dgm:pt modelId="30">
+          <dgm:prSet phldr="1"/>
+        </dgm:pt>
+        <dgm:pt modelId="40">
+          <dgm:prSet phldr="1"/>
+        </dgm:pt>
+      </dgm:ptLst>
+      <dgm:cxnLst>
+        <dgm:cxn modelId="60" srcId="0" destId="10" srcOrd="0" destOrd="0"/>
+        <dgm:cxn modelId="70" srcId="0" destId="20" srcOrd="1" destOrd="0"/>
+        <dgm:cxn modelId="80" srcId="0" destId="30" srcOrd="2" destOrd="0"/>
+        <dgm:cxn modelId="90" srcId="0" destId="40" srcOrd="3" destOrd="0"/>
+      </dgm:cxnLst>
+      <dgm:bg/>
+      <dgm:whole/>
+    </dgm:dataModel>
+  </dgm:clrData>
+  <dgm:layoutNode name="rootnode">
+    <dgm:varLst>
+      <dgm:chMax/>
+      <dgm:chPref/>
+      <dgm:dir/>
+      <dgm:animLvl val="lvl"/>
+    </dgm:varLst>
+    <dgm:choose name="Name0">
+      <dgm:if name="Name1" func="var" arg="dir" op="equ" val="norm">
+        <dgm:alg type="snake">
+          <dgm:param type="grDir" val="tL"/>
+          <dgm:param type="flowDir" val="row"/>
+          <dgm:param type="off" val="off"/>
+          <dgm:param type="bkpt" val="fixed"/>
+          <dgm:param type="bkPtFixedVal" val="1"/>
+        </dgm:alg>
+      </dgm:if>
+      <dgm:else name="Name2">
+        <dgm:alg type="snake">
+          <dgm:param type="grDir" val="tR"/>
+          <dgm:param type="flowDir" val="row"/>
+          <dgm:param type="off" val="off"/>
+          <dgm:param type="bkpt" val="fixed"/>
+          <dgm:param type="bkPtFixedVal" val="1"/>
+        </dgm:alg>
+      </dgm:else>
+    </dgm:choose>
+    <dgm:shape xmlns:r="http://schemas.openxmlformats.org/officeDocument/2006/relationships" r:blip="">
+      <dgm:adjLst/>
+    </dgm:shape>
+    <dgm:choose name="Name3">
+      <dgm:if name="Name4" func="var" arg="dir" op="equ" val="norm">
+        <dgm:constrLst>
+          <dgm:constr type="alignOff" forName="rootnode" val="0.48"/>
+          <dgm:constr type="primFontSz" for="des" forName="ParentText" val="65"/>
+          <dgm:constr type="primFontSz" for="des" forName="ChildText" refType="primFontSz" refFor="des" refForName="ParentText" op="lte"/>
+          <dgm:constr type="w" for="ch" forName="composite" refType="w"/>
+          <dgm:constr type="h" for="ch" forName="composite" refType="h"/>
+          <dgm:constr type="sp" refType="h" refFor="ch" refForName="composite" op="equ" fact="-0.38"/>
+        </dgm:constrLst>
+      </dgm:if>
+      <dgm:else name="Name5">
+        <dgm:constrLst>
+          <dgm:constr type="alignOff" forName="rootnode" val="0.48"/>
+          <dgm:constr type="primFontSz" for="des" forName="ParentText" val="65"/>
+          <dgm:constr type="primFontSz" for="des" forName="ChildText" refType="primFontSz" refFor="des" refForName="ParentText" op="lte"/>
+          <dgm:constr type="w" for="ch" forName="composite" refType="w"/>
+          <dgm:constr type="h" for="ch" forName="composite" refType="h"/>
+          <dgm:constr type="sp" refType="h" refFor="ch" refForName="composite" op="equ" fact="-0.38"/>
+        </dgm:constrLst>
+      </dgm:else>
+    </dgm:choose>
+    <dgm:forEach name="nodesForEach" axis="ch" ptType="node">
+      <dgm:layoutNode name="composite">
+        <dgm:alg type="composite">
+          <dgm:param type="ar" val="1.2439"/>
+        </dgm:alg>
+        <dgm:shape xmlns:r="http://schemas.openxmlformats.org/officeDocument/2006/relationships" r:blip="">
+          <dgm:adjLst/>
+        </dgm:shape>
+        <dgm:choose name="Name6">
+          <dgm:if name="Name7" func="var" arg="dir" op="equ" val="norm">
+            <dgm:constrLst>
+              <dgm:constr type="l" for="ch" forName="bentUpArrow1" refType="w" fact="0.07"/>
+              <dgm:constr type="t" for="ch" forName="bentUpArrow1" refType="h" fact="0.524"/>
+              <dgm:constr type="w" for="ch" forName="bentUpArrow1" refType="w" fact="0.3844"/>
+              <dgm:constr type="h" for="ch" forName="bentUpArrow1" refType="h" fact="0.42"/>
+              <dgm:constr type="l" for="ch" forName="ParentText" refType="w" fact="0"/>
+              <dgm:constr type="t" for="ch" forName="ParentText" refType="h" fact="0"/>
+              <dgm:constr type="w" for="ch" forName="ParentText" refType="w" fact="0.5684"/>
+              <dgm:constr type="h" for="ch" forName="ParentText" refType="h" fact="0.4949"/>
+              <dgm:constr type="l" for="ch" forName="ChildText" refType="w" refFor="ch" refForName="ParentText"/>
+              <dgm:constr type="t" for="ch" forName="ChildText" refType="h" fact="0.05"/>
+              <dgm:constr type="w" for="ch" forName="ChildText" refType="w" fact="0.4134"/>
+              <dgm:constr type="h" for="ch" forName="ChildText" refType="h" fact="0.4"/>
+              <dgm:constr type="l" for="ch" forName="FinalChildText" refType="w" refFor="ch" refForName="ParentText"/>
+              <dgm:constr type="t" for="ch" forName="FinalChildText" refType="h" fact="0.05"/>
+              <dgm:constr type="w" for="ch" forName="FinalChildText" refType="w" fact="0.4134"/>
+              <dgm:constr type="h" for="ch" forName="FinalChildText" refType="h" fact="0.4"/>
+            </dgm:constrLst>
+          </dgm:if>
+          <dgm:else name="Name8">
+            <dgm:constrLst>
+              <dgm:constr type="r" for="ch" forName="bentUpArrow1" refType="w" fact="0.97"/>
+              <dgm:constr type="t" for="ch" forName="bentUpArrow1" refType="h" fact="0.524"/>
+              <dgm:constr type="w" for="ch" forName="bentUpArrow1" refType="w" fact="0.3844"/>
+              <dgm:constr type="h" for="ch" forName="bentUpArrow1" refType="h" fact="0.42"/>
+              <dgm:constr type="l" for="ch" forName="ParentText" refType="w" fact="0.4316"/>
+              <dgm:constr type="t" for="ch" forName="ParentText" refType="h" fact="0"/>
+              <dgm:constr type="w" for="ch" forName="ParentText" refType="w" fact="0.5684"/>
+              <dgm:constr type="h" for="ch" forName="ParentText" refType="h" fact="0.4949"/>
+              <dgm:constr type="l" for="ch" forName="ChildText" refType="w" fact="0"/>
+              <dgm:constr type="t" for="ch" forName="ChildText" refType="h" fact="0.05"/>
+              <dgm:constr type="w" for="ch" forName="ChildText" refType="w" fact="0.4134"/>
+              <dgm:constr type="h" for="ch" forName="ChildText" refType="h" fact="0.4"/>
+              <dgm:constr type="l" for="ch" forName="FinalChildText" refType="w" fact="0"/>
+              <dgm:constr type="t" for="ch" forName="FinalChildText" refType="h" fact="0.05"/>
+              <dgm:constr type="w" for="ch" forName="FinalChildText" refType="w" fact="0.4134"/>
+              <dgm:constr type="h" for="ch" forName="FinalChildText" refType="h" fact="0.4"/>
+            </dgm:constrLst>
+          </dgm:else>
+        </dgm:choose>
+        <dgm:choose name="Name9">
+          <dgm:if name="Name10" axis="followSib" ptType="node" func="cnt" op="gte" val="1">
+            <dgm:layoutNode name="bentUpArrow1" styleLbl="alignImgPlace1">
+              <dgm:alg type="sp"/>
+              <dgm:choose name="Name11">
+                <dgm:if name="Name12" func="var" arg="dir" op="equ" val="norm">
+                  <dgm:shape xmlns:r="http://schemas.openxmlformats.org/officeDocument/2006/relationships" rot="90" type="bentUpArrow" r:blip="">
+                    <dgm:adjLst>
+                      <dgm:adj idx="1" val="0.3284"/>
+                      <dgm:adj idx="2" val="0.25"/>
+                      <dgm:adj idx="3" val="0.3578"/>
+                    </dgm:adjLst>
+                  </dgm:shape>
+                </dgm:if>
+                <dgm:else name="Name13">
+                  <dgm:shape xmlns:r="http://schemas.openxmlformats.org/officeDocument/2006/relationships" rot="180" type="bentArrow" r:blip="">
+                    <dgm:adjLst>
+                      <dgm:adj idx="1" val="0.3284"/>
+                      <dgm:adj idx="2" val="0.25"/>
+                      <dgm:adj idx="3" val="0.3578"/>
+                      <dgm:adj idx="4" val="0"/>
+                    </dgm:adjLst>
+                  </dgm:shape>
+                </dgm:else>
+              </dgm:choose>
+              <dgm:presOf/>
+            </dgm:layoutNode>
+          </dgm:if>
+          <dgm:else name="Name14"/>
+        </dgm:choose>
+        <dgm:layoutNode name="ParentText" styleLbl="node1">
+          <dgm:varLst>
+            <dgm:chMax val="1"/>
+            <dgm:chPref val="1"/>
+            <dgm:bulletEnabled val="1"/>
+          </dgm:varLst>
+          <dgm:alg type="tx"/>
+          <dgm:shape xmlns:r="http://schemas.openxmlformats.org/officeDocument/2006/relationships" type="roundRect" r:blip="">
+            <dgm:adjLst>
+              <dgm:adj idx="1" val="0.1667"/>
+            </dgm:adjLst>
+          </dgm:shape>
+          <dgm:presOf axis="self" ptType="node"/>
+          <dgm:constrLst>
+            <dgm:constr type="lMarg" refType="primFontSz" fact="0.3"/>
+            <dgm:constr type="rMarg" refType="primFontSz" fact="0.3"/>
+            <dgm:constr type="tMarg" refType="primFontSz" fact="0.3"/>
+            <dgm:constr type="bMarg" refType="primFontSz" fact="0.3"/>
+          </dgm:constrLst>
+          <dgm:ruleLst>
+            <dgm:rule type="primFontSz" val="5" fact="NaN" max="NaN"/>
+          </dgm:ruleLst>
+        </dgm:layoutNode>
+        <dgm:choose name="Name15">
+          <dgm:if name="Name16" axis="followSib" ptType="node" func="cnt" op="equ" val="0">
+            <dgm:choose name="Name17">
+              <dgm:if name="Name18" axis="ch" ptType="node" func="cnt" op="gte" val="1">
+                <dgm:layoutNode name="FinalChildText" styleLbl="revTx">
+                  <dgm:varLst>
+                    <dgm:chMax val="0"/>
+                    <dgm:chPref val="0"/>
+                    <dgm:bulletEnabled val="1"/>
+                  </dgm:varLst>
+                  <dgm:alg type="tx">
+                    <dgm:param type="stBulletLvl" val="1"/>
+                    <dgm:param type="txAnchorVertCh" val="mid"/>
+                    <dgm:param type="parTxLTRAlign" val="l"/>
+                  </dgm:alg>
+                  <dgm:shape xmlns:r="http://schemas.openxmlformats.org/officeDocument/2006/relationships" type="rect" r:blip="">
+                    <dgm:adjLst/>
+                  </dgm:shape>
+                  <dgm:presOf axis="des" ptType="node"/>
+                  <dgm:constrLst>
+                    <dgm:constr type="lMarg" refType="primFontSz" fact="0.3"/>
+                    <dgm:constr type="rMarg" refType="primFontSz" fact="0.3"/>
+                    <dgm:constr type="tMarg" refType="primFontSz" fact="0.3"/>
+                    <dgm:constr type="bMarg" refType="primFontSz" fact="0.3"/>
+                  </dgm:constrLst>
+                  <dgm:ruleLst>
+                    <dgm:rule type="primFontSz" val="5" fact="NaN" max="NaN"/>
+                  </dgm:ruleLst>
+                </dgm:layoutNode>
+              </dgm:if>
+              <dgm:else name="Name19"/>
+            </dgm:choose>
+          </dgm:if>
+          <dgm:else name="Name20">
+            <dgm:layoutNode name="ChildText" styleLbl="revTx">
+              <dgm:varLst>
+                <dgm:chMax val="0"/>
+                <dgm:chPref val="0"/>
+                <dgm:bulletEnabled val="1"/>
+              </dgm:varLst>
+              <dgm:alg type="tx">
+                <dgm:param type="stBulletLvl" val="1"/>
+                <dgm:param type="txAnchorVertCh" val="mid"/>
+                <dgm:param type="parTxLTRAlign" val="l"/>
+              </dgm:alg>
+              <dgm:shape xmlns:r="http://schemas.openxmlformats.org/officeDocument/2006/relationships" type="rect" r:blip="">
+                <dgm:adjLst/>
+              </dgm:shape>
+              <dgm:presOf axis="des" ptType="node"/>
+              <dgm:constrLst>
+                <dgm:constr type="lMarg" refType="primFontSz" fact="0.3"/>
+                <dgm:constr type="rMarg" refType="primFontSz" fact="0.3"/>
+                <dgm:constr type="tMarg" refType="primFontSz" fact="0.3"/>
+                <dgm:constr type="bMarg" refType="primFontSz" fact="0.3"/>
+              </dgm:constrLst>
+              <dgm:ruleLst>
+                <dgm:rule type="primFontSz" val="5" fact="NaN" max="NaN"/>
+              </dgm:ruleLst>
+            </dgm:layoutNode>
+          </dgm:else>
+        </dgm:choose>
+      </dgm:layoutNode>
+      <dgm:forEach name="sibTransForEach" axis="followSib" ptType="sibTrans" cnt="1">
+        <dgm:layoutNode name="sibTrans">
+          <dgm:alg type="sp"/>
+          <dgm:shape xmlns:r="http://schemas.openxmlformats.org/officeDocument/2006/relationships" r:blip="">
+            <dgm:adjLst/>
+          </dgm:shape>
+        </dgm:layoutNode>
+      </dgm:forEach>
+    </dgm:forEach>
+  </dgm:layoutNode>
+</dgm:layoutDef>
+</file>
+
+<file path=ppt/diagrams/quickStyle1.xml><?xml version="1.0" encoding="utf-8"?>
+<dgm:styleDef xmlns:dgm="http://schemas.openxmlformats.org/drawingml/2006/diagram" xmlns:a="http://schemas.openxmlformats.org/drawingml/2006/main" uniqueId="urn:microsoft.com/office/officeart/2005/8/quickstyle/simple1">
+  <dgm:title val=""/>
+  <dgm:desc val=""/>
+  <dgm:catLst>
+    <dgm:cat type="simple" pri="10100"/>
+  </dgm:catLst>
+  <dgm:scene3d>
+    <a:camera prst="orthographicFront"/>
+    <a:lightRig rig="threePt" dir="t"/>
+  </dgm:scene3d>
+  <dgm:styleLbl name="node0">
+    <dgm:scene3d>
+      <a:camera prst="orthographicFront"/>
+      <a:lightRig rig="threePt" dir="t"/>
+    </dgm:scene3d>
+    <dgm:sp3d/>
+    <dgm:txPr/>
+    <dgm:style>
+      <a:lnRef idx="2">
+        <a:scrgbClr r="0" g="0" b="0"/>
+      </a:lnRef>
+      <a:fillRef idx="1">
+        <a:scrgbClr r="0" g="0" b="0"/>
+      </a:fillRef>
+      <a:effectRef idx="0">
+        <a:scrgbClr r="0" g="0" b="0"/>
+      </a:effectRef>
+      <a:fontRef idx="minor">
+        <a:schemeClr val="lt1"/>
+      </a:fontRef>
+    </dgm:style>
+  </dgm:styleLbl>
+  <dgm:styleLbl name="lnNode1">
+    <dgm:scene3d>
+      <a:camera prst="orthographicFront"/>
+      <a:lightRig rig="threePt" dir="t"/>
+    </dgm:scene3d>
+    <dgm:sp3d/>
+    <dgm:txPr/>
+    <dgm:style>
+      <a:lnRef idx="2">
+        <a:scrgbClr r="0" g="0" b="0"/>
+      </a:lnRef>
+      <a:fillRef idx="1">
+        <a:scrgbClr r="0" g="0" b="0"/>
+      </a:fillRef>
+      <a:effectRef idx="0">
+        <a:scrgbClr r="0" g="0" b="0"/>
+      </a:effectRef>
+      <a:fontRef idx="minor">
+        <a:schemeClr val="lt1"/>
+      </a:fontRef>
+    </dgm:style>
+  </dgm:styleLbl>
+  <dgm:styleLbl name="vennNode1">
+    <dgm:scene3d>
+      <a:camera prst="orthographicFront"/>
+      <a:lightRig rig="threePt" dir="t"/>
+    </dgm:scene3d>
+    <dgm:sp3d/>
+    <dgm:txPr/>
+    <dgm:style>
+      <a:lnRef idx="2">
+        <a:scrgbClr r="0" g="0" b="0"/>
+      </a:lnRef>
+      <a:fillRef idx="1">
+        <a:scrgbClr r="0" g="0" b="0"/>
+      </a:fillRef>
+      <a:effectRef idx="0">
+        <a:scrgbClr r="0" g="0" b="0"/>
+      </a:effectRef>
+      <a:fontRef idx="minor">
+        <a:schemeClr val="tx1"/>
+      </a:fontRef>
+    </dgm:style>
+  </dgm:styleLbl>
+  <dgm:styleLbl name="alignNode1">
+    <dgm:scene3d>
+      <a:camera prst="orthographicFront"/>
+      <a:lightRig rig="threePt" dir="t"/>
+    </dgm:scene3d>
+    <dgm:sp3d/>
+    <dgm:txPr/>
+    <dgm:style>
+      <a:lnRef idx="2">
+        <a:scrgbClr r="0" g="0" b="0"/>
+      </a:lnRef>
+      <a:fillRef idx="1">
+        <a:scrgbClr r="0" g="0" b="0"/>
+      </a:fillRef>
+      <a:effectRef idx="0">
+        <a:scrgbClr r="0" g="0" b="0"/>
+      </a:effectRef>
+      <a:fontRef idx="minor">
+        <a:schemeClr val="lt1"/>
+      </a:fontRef>
+    </dgm:style>
+  </dgm:styleLbl>
+  <dgm:styleLbl name="node1">
+    <dgm:scene3d>
+      <a:camera prst="orthographicFront"/>
+      <a:lightRig rig="threePt" dir="t"/>
+    </dgm:scene3d>
+    <dgm:sp3d/>
+    <dgm:txPr/>
+    <dgm:style>
+      <a:lnRef idx="2">
+        <a:scrgbClr r="0" g="0" b="0"/>
+      </a:lnRef>
+      <a:fillRef idx="1">
+        <a:scrgbClr r="0" g="0" b="0"/>
+      </a:fillRef>
+      <a:effectRef idx="0">
+        <a:scrgbClr r="0" g="0" b="0"/>
+      </a:effectRef>
+      <a:fontRef idx="minor">
+        <a:schemeClr val="lt1"/>
+      </a:fontRef>
+    </dgm:style>
+  </dgm:styleLbl>
+  <dgm:styleLbl name="node2">
+    <dgm:scene3d>
+      <a:camera prst="orthographicFront"/>
+      <a:lightRig rig="threePt" dir="t"/>
+    </dgm:scene3d>
+    <dgm:sp3d/>
+    <dgm:txPr/>
+    <dgm:style>
+      <a:lnRef idx="2">
+        <a:scrgbClr r="0" g="0" b="0"/>
+      </a:lnRef>
+      <a:fillRef idx="1">
+        <a:scrgbClr r="0" g="0" b="0"/>
+      </a:fillRef>
+      <a:effectRef idx="0">
+        <a:scrgbClr r="0" g="0" b="0"/>
+      </a:effectRef>
+      <a:fontRef idx="minor">
+        <a:schemeClr val="lt1"/>
+      </a:fontRef>
+    </dgm:style>
+  </dgm:styleLbl>
+  <dgm:styleLbl name="node3">
+    <dgm:scene3d>
+      <a:camera prst="orthographicFront"/>
+      <a:lightRig rig="threePt" dir="t"/>
+    </dgm:scene3d>
+    <dgm:sp3d/>
+    <dgm:txPr/>
+    <dgm:style>
+      <a:lnRef idx="2">
+        <a:scrgbClr r="0" g="0" b="0"/>
+      </a:lnRef>
+      <a:fillRef idx="1">
+        <a:scrgbClr r="0" g="0" b="0"/>
+      </a:fillRef>
+      <a:effectRef idx="0">
+        <a:scrgbClr r="0" g="0" b="0"/>
+      </a:effectRef>
+      <a:fontRef idx="minor">
+        <a:schemeClr val="lt1"/>
+      </a:fontRef>
+    </dgm:style>
+  </dgm:styleLbl>
+  <dgm:styleLbl name="node4">
+    <dgm:scene3d>
+      <a:camera prst="orthographicFront"/>
+      <a:lightRig rig="threePt" dir="t"/>
+    </dgm:scene3d>
+    <dgm:sp3d/>
+    <dgm:txPr/>
+    <dgm:style>
+      <a:lnRef idx="2">
+        <a:scrgbClr r="0" g="0" b="0"/>
+      </a:lnRef>
+      <a:fillRef idx="1">
+        <a:scrgbClr r="0" g="0" b="0"/>
+      </a:fillRef>
+      <a:effectRef idx="0">
+        <a:scrgbClr r="0" g="0" b="0"/>
+      </a:effectRef>
+      <a:fontRef idx="minor">
+        <a:schemeClr val="lt1"/>
+      </a:fontRef>
+    </dgm:style>
+  </dgm:styleLbl>
+  <dgm:styleLbl name="fgImgPlace1">
+    <dgm:scene3d>
+      <a:camera prst="orthographicFront"/>
+      <a:lightRig rig="threePt" dir="t"/>
+    </dgm:scene3d>
+    <dgm:sp3d/>
+    <dgm:txPr/>
+    <dgm:style>
+      <a:lnRef idx="2">
+        <a:scrgbClr r="0" g="0" b="0"/>
+      </a:lnRef>
+      <a:fillRef idx="1">
+        <a:scrgbClr r="0" g="0" b="0"/>
+      </a:fillRef>
+      <a:effectRef idx="0">
+        <a:scrgbClr r="0" g="0" b="0"/>
+      </a:effectRef>
+      <a:fontRef idx="minor"/>
+    </dgm:style>
+  </dgm:styleLbl>
+  <dgm:styleLbl name="alignImgPlace1">
+    <dgm:scene3d>
+      <a:camera prst="orthographicFront"/>
+      <a:lightRig rig="threePt" dir="t"/>
+    </dgm:scene3d>
+    <dgm:sp3d/>
+    <dgm:txPr/>
+    <dgm:style>
+      <a:lnRef idx="2">
+        <a:scrgbClr r="0" g="0" b="0"/>
+      </a:lnRef>
+      <a:fillRef idx="1">
+        <a:scrgbClr r="0" g="0" b="0"/>
+      </a:fillRef>
+      <a:effectRef idx="0">
+        <a:scrgbClr r="0" g="0" b="0"/>
+      </a:effectRef>
+      <a:fontRef idx="minor"/>
+    </dgm:style>
+  </dgm:styleLbl>
+  <dgm:styleLbl name="bgImgPlace1">
+    <dgm:scene3d>
+      <a:camera prst="orthographicFront"/>
+      <a:lightRig rig="threePt" dir="t"/>
+    </dgm:scene3d>
+    <dgm:sp3d/>
+    <dgm:txPr/>
+    <dgm:style>
+      <a:lnRef idx="2">
+        <a:scrgbClr r="0" g="0" b="0"/>
+      </a:lnRef>
+      <a:fillRef idx="1">
+        <a:scrgbClr r="0" g="0" b="0"/>
+      </a:fillRef>
+      <a:effectRef idx="0">
+        <a:scrgbClr r="0" g="0" b="0"/>
+      </a:effectRef>
+      <a:fontRef idx="minor"/>
+    </dgm:style>
+  </dgm:styleLbl>
+  <dgm:styleLbl name="sibTrans2D1">
+    <dgm:scene3d>
+      <a:camera prst="orthographicFront"/>
+      <a:lightRig rig="threePt" dir="t"/>
+    </dgm:scene3d>
+    <dgm:sp3d/>
+    <dgm:txPr/>
+    <dgm:style>
+      <a:lnRef idx="0">
+        <a:scrgbClr r="0" g="0" b="0"/>
+      </a:lnRef>
+      <a:fillRef idx="1">
+        <a:scrgbClr r="0" g="0" b="0"/>
+      </a:fillRef>
+      <a:effectRef idx="0">
+        <a:scrgbClr r="0" g="0" b="0"/>
+      </a:effectRef>
+      <a:fontRef idx="minor">
+        <a:schemeClr val="lt1"/>
+      </a:fontRef>
+    </dgm:style>
+  </dgm:styleLbl>
+  <dgm:styleLbl name="fgSibTrans2D1">
+    <dgm:scene3d>
+      <a:camera prst="orthographicFront"/>
+      <a:lightRig rig="threePt" dir="t"/>
+    </dgm:scene3d>
+    <dgm:sp3d/>
+    <dgm:txPr/>
+    <dgm:style>
+      <a:lnRef idx="0">
+        <a:scrgbClr r="0" g="0" b="0"/>
+      </a:lnRef>
+      <a:fillRef idx="1">
+        <a:scrgbClr r="0" g="0" b="0"/>
+      </a:fillRef>
+      <a:effectRef idx="0">
+        <a:scrgbClr r="0" g="0" b="0"/>
+      </a:effectRef>
+      <a:fontRef idx="minor">
+        <a:schemeClr val="lt1"/>
+      </a:fontRef>
+    </dgm:style>
+  </dgm:styleLbl>
+  <dgm:styleLbl name="bgSibTrans2D1">
+    <dgm:scene3d>
+      <a:camera prst="orthographicFront"/>
+      <a:lightRig rig="threePt" dir="t"/>
+    </dgm:scene3d>
+    <dgm:sp3d/>
+    <dgm:txPr/>
+    <dgm:style>
+      <a:lnRef idx="0">
+        <a:scrgbClr r="0" g="0" b="0"/>
+      </a:lnRef>
+      <a:fillRef idx="1">
+        <a:scrgbClr r="0" g="0" b="0"/>
+      </a:fillRef>
+      <a:effectRef idx="0">
+        <a:scrgbClr r="0" g="0" b="0"/>
+      </a:effectRef>
+      <a:fontRef idx="minor">
+        <a:schemeClr val="lt1"/>
+      </a:fontRef>
+    </dgm:style>
+  </dgm:styleLbl>
+  <dgm:styleLbl name="sibTrans1D1">
+    <dgm:scene3d>
+      <a:camera prst="orthographicFront"/>
+      <a:lightRig rig="threePt" dir="t"/>
+    </dgm:scene3d>
+    <dgm:sp3d/>
+    <dgm:txPr/>
+    <dgm:style>
+      <a:lnRef idx="1">
+        <a:scrgbClr r="0" g="0" b="0"/>
+      </a:lnRef>
+      <a:fillRef idx="0">
+        <a:scrgbClr r="0" g="0" b="0"/>
+      </a:fillRef>
+      <a:effectRef idx="0">
+        <a:scrgbClr r="0" g="0" b="0"/>
+      </a:effectRef>
+      <a:fontRef idx="minor"/>
+    </dgm:style>
+  </dgm:styleLbl>
+  <dgm:styleLbl name="callout">
+    <dgm:scene3d>
+      <a:camera prst="orthographicFront"/>
+      <a:lightRig rig="threePt" dir="t"/>
+    </dgm:scene3d>
+    <dgm:sp3d/>
+    <dgm:txPr/>
+    <dgm:style>
+      <a:lnRef idx="2">
+        <a:scrgbClr r="0" g="0" b="0"/>
+      </a:lnRef>
+      <a:fillRef idx="1">
+        <a:scrgbClr r="0" g="0" b="0"/>
+      </a:fillRef>
+      <a:effectRef idx="0">
+        <a:scrgbClr r="0" g="0" b="0"/>
+      </a:effectRef>
+      <a:fontRef idx="minor"/>
+    </dgm:style>
+  </dgm:styleLbl>
+  <dgm:styleLbl name="asst0">
+    <dgm:scene3d>
+      <a:camera prst="orthographicFront"/>
+      <a:lightRig rig="threePt" dir="t"/>
+    </dgm:scene3d>
+    <dgm:sp3d/>
+    <dgm:txPr/>
+    <dgm:style>
+      <a:lnRef idx="2">
+        <a:scrgbClr r="0" g="0" b="0"/>
+      </a:lnRef>
+      <a:fillRef idx="1">
+        <a:scrgbClr r="0" g="0" b="0"/>
+      </a:fillRef>
+      <a:effectRef idx="0">
+        <a:scrgbClr r="0" g="0" b="0"/>
+      </a:effectRef>
+      <a:fontRef idx="minor">
+        <a:schemeClr val="lt1"/>
+      </a:fontRef>
+    </dgm:style>
+  </dgm:styleLbl>
+  <dgm:styleLbl name="asst1">
+    <dgm:scene3d>
+      <a:camera prst="orthographicFront"/>
+      <a:lightRig rig="threePt" dir="t"/>
+    </dgm:scene3d>
+    <dgm:sp3d/>
+    <dgm:txPr/>
+    <dgm:style>
+      <a:lnRef idx="2">
+        <a:scrgbClr r="0" g="0" b="0"/>
+      </a:lnRef>
+      <a:fillRef idx="1">
+        <a:scrgbClr r="0" g="0" b="0"/>
+      </a:fillRef>
+      <a:effectRef idx="0">
+        <a:scrgbClr r="0" g="0" b="0"/>
+      </a:effectRef>
+      <a:fontRef idx="minor">
+        <a:schemeClr val="lt1"/>
+      </a:fontRef>
+    </dgm:style>
+  </dgm:styleLbl>
+  <dgm:styleLbl name="asst2">
+    <dgm:scene3d>
+      <a:camera prst="orthographicFront"/>
+      <a:lightRig rig="threePt" dir="t"/>
+    </dgm:scene3d>
+    <dgm:sp3d/>
+    <dgm:txPr/>
+    <dgm:style>
+      <a:lnRef idx="2">
+        <a:scrgbClr r="0" g="0" b="0"/>
+      </a:lnRef>
+      <a:fillRef idx="1">
+        <a:scrgbClr r="0" g="0" b="0"/>
+      </a:fillRef>
+      <a:effectRef idx="0">
+        <a:scrgbClr r="0" g="0" b="0"/>
+      </a:effectRef>
+      <a:fontRef idx="minor">
+        <a:schemeClr val="lt1"/>
+      </a:fontRef>
+    </dgm:style>
+  </dgm:styleLbl>
+  <dgm:styleLbl name="asst3">
+    <dgm:scene3d>
+      <a:camera prst="orthographicFront"/>
+      <a:lightRig rig="threePt" dir="t"/>
+    </dgm:scene3d>
+    <dgm:sp3d/>
+    <dgm:txPr/>
+    <dgm:style>
+      <a:lnRef idx="2">
+        <a:scrgbClr r="0" g="0" b="0"/>
+      </a:lnRef>
+      <a:fillRef idx="1">
+        <a:scrgbClr r="0" g="0" b="0"/>
+      </a:fillRef>
+      <a:effectRef idx="0">
+        <a:scrgbClr r="0" g="0" b="0"/>
+      </a:effectRef>
+      <a:fontRef idx="minor">
+        <a:schemeClr val="lt1"/>
+      </a:fontRef>
+    </dgm:style>
+  </dgm:styleLbl>
+  <dgm:styleLbl name="asst4">
+    <dgm:scene3d>
+      <a:camera prst="orthographicFront"/>
+      <a:lightRig rig="threePt" dir="t"/>
+    </dgm:scene3d>
+    <dgm:sp3d/>
+    <dgm:txPr/>
+    <dgm:style>
+      <a:lnRef idx="2">
+        <a:scrgbClr r="0" g="0" b="0"/>
+      </a:lnRef>
+      <a:fillRef idx="1">
+        <a:scrgbClr r="0" g="0" b="0"/>
+      </a:fillRef>
+      <a:effectRef idx="0">
+        <a:scrgbClr r="0" g="0" b="0"/>
+      </a:effectRef>
+      <a:fontRef idx="minor">
+        <a:schemeClr val="lt1"/>
+      </a:fontRef>
+    </dgm:style>
+  </dgm:styleLbl>
+  <dgm:styleLbl name="parChTrans2D1">
+    <dgm:scene3d>
+      <a:camera prst="orthographicFront"/>
+      <a:lightRig rig="threePt" dir="t"/>
+    </dgm:scene3d>
+    <dgm:sp3d/>
+    <dgm:txPr/>
+    <dgm:style>
+      <a:lnRef idx="2">
+        <a:scrgbClr r="0" g="0" b="0"/>
+      </a:lnRef>
+      <a:fillRef idx="1">
+        <a:scrgbClr r="0" g="0" b="0"/>
+      </a:fillRef>
+      <a:effectRef idx="0">
+        <a:scrgbClr r="0" g="0" b="0"/>
+      </a:effectRef>
+      <a:fontRef idx="minor">
+        <a:schemeClr val="lt1"/>
+      </a:fontRef>
+    </dgm:style>
+  </dgm:styleLbl>
+  <dgm:styleLbl name="parChTrans2D2">
+    <dgm:scene3d>
+      <a:camera prst="orthographicFront"/>
+      <a:lightRig rig="threePt" dir="t"/>
+    </dgm:scene3d>
+    <dgm:sp3d/>
+    <dgm:txPr/>
+    <dgm:style>
+      <a:lnRef idx="2">
+        <a:scrgbClr r="0" g="0" b="0"/>
+      </a:lnRef>
+      <a:fillRef idx="1">
+        <a:scrgbClr r="0" g="0" b="0"/>
+      </a:fillRef>
+      <a:effectRef idx="0">
+        <a:scrgbClr r="0" g="0" b="0"/>
+      </a:effectRef>
+      <a:fontRef idx="minor">
+        <a:schemeClr val="lt1"/>
+      </a:fontRef>
+    </dgm:style>
+  </dgm:styleLbl>
+  <dgm:styleLbl name="parChTrans2D3">
+    <dgm:scene3d>
+      <a:camera prst="orthographicFront"/>
+      <a:lightRig rig="threePt" dir="t"/>
+    </dgm:scene3d>
+    <dgm:sp3d/>
+    <dgm:txPr/>
+    <dgm:style>
+      <a:lnRef idx="2">
+        <a:scrgbClr r="0" g="0" b="0"/>
+      </a:lnRef>
+      <a:fillRef idx="1">
+        <a:scrgbClr r="0" g="0" b="0"/>
+      </a:fillRef>
+      <a:effectRef idx="0">
+        <a:scrgbClr r="0" g="0" b="0"/>
+      </a:effectRef>
+      <a:fontRef idx="minor">
+        <a:schemeClr val="lt1"/>
+      </a:fontRef>
+    </dgm:style>
+  </dgm:styleLbl>
+  <dgm:styleLbl name="parChTrans2D4">
+    <dgm:scene3d>
+      <a:camera prst="orthographicFront"/>
+      <a:lightRig rig="threePt" dir="t"/>
+    </dgm:scene3d>
+    <dgm:sp3d/>
+    <dgm:txPr/>
+    <dgm:style>
+      <a:lnRef idx="2">
+        <a:scrgbClr r="0" g="0" b="0"/>
+      </a:lnRef>
+      <a:fillRef idx="1">
+        <a:scrgbClr r="0" g="0" b="0"/>
+      </a:fillRef>
+      <a:effectRef idx="0">
+        <a:scrgbClr r="0" g="0" b="0"/>
+      </a:effectRef>
+      <a:fontRef idx="minor">
+        <a:schemeClr val="lt1"/>
+      </a:fontRef>
+    </dgm:style>
+  </dgm:styleLbl>
+  <dgm:styleLbl name="parChTrans1D1">
+    <dgm:scene3d>
+      <a:camera prst="orthographicFront"/>
+      <a:lightRig rig="threePt" dir="t"/>
+    </dgm:scene3d>
+    <dgm:sp3d/>
+    <dgm:txPr/>
+    <dgm:style>
+      <a:lnRef idx="2">
+        <a:scrgbClr r="0" g="0" b="0"/>
+      </a:lnRef>
+      <a:fillRef idx="0">
+        <a:scrgbClr r="0" g="0" b="0"/>
+      </a:fillRef>
+      <a:effectRef idx="0">
+        <a:scrgbClr r="0" g="0" b="0"/>
+      </a:effectRef>
+      <a:fontRef idx="minor"/>
+    </dgm:style>
+  </dgm:styleLbl>
+  <dgm:styleLbl name="parChTrans1D2">
+    <dgm:scene3d>
+      <a:camera prst="orthographicFront"/>
+      <a:lightRig rig="threePt" dir="t"/>
+    </dgm:scene3d>
+    <dgm:sp3d/>
+    <dgm:txPr/>
+    <dgm:style>
+      <a:lnRef idx="2">
+        <a:scrgbClr r="0" g="0" b="0"/>
+      </a:lnRef>
+      <a:fillRef idx="0">
+        <a:scrgbClr r="0" g="0" b="0"/>
+      </a:fillRef>
+      <a:effectRef idx="0">
+        <a:scrgbClr r="0" g="0" b="0"/>
+      </a:effectRef>
+      <a:fontRef idx="minor"/>
+    </dgm:style>
+  </dgm:styleLbl>
+  <dgm:styleLbl name="parChTrans1D3">
+    <dgm:scene3d>
+      <a:camera prst="orthographicFront"/>
+      <a:lightRig rig="threePt" dir="t"/>
+    </dgm:scene3d>
+    <dgm:sp3d/>
+    <dgm:txPr/>
+    <dgm:style>
+      <a:lnRef idx="2">
+        <a:scrgbClr r="0" g="0" b="0"/>
+      </a:lnRef>
+      <a:fillRef idx="0">
+        <a:scrgbClr r="0" g="0" b="0"/>
+      </a:fillRef>
+      <a:effectRef idx="0">
+        <a:scrgbClr r="0" g="0" b="0"/>
+      </a:effectRef>
+      <a:fontRef idx="minor"/>
+    </dgm:style>
+  </dgm:styleLbl>
+  <dgm:styleLbl name="parChTrans1D4">
+    <dgm:scene3d>
+      <a:camera prst="orthographicFront"/>
+      <a:lightRig rig="threePt" dir="t"/>
+    </dgm:scene3d>
+    <dgm:sp3d/>
+    <dgm:txPr/>
+    <dgm:style>
+      <a:lnRef idx="2">
+        <a:scrgbClr r="0" g="0" b="0"/>
+      </a:lnRef>
+      <a:fillRef idx="0">
+        <a:scrgbClr r="0" g="0" b="0"/>
+      </a:fillRef>
+      <a:effectRef idx="0">
+        <a:scrgbClr r="0" g="0" b="0"/>
+      </a:effectRef>
+      <a:fontRef idx="minor"/>
+    </dgm:style>
+  </dgm:styleLbl>
+  <dgm:styleLbl name="fgAcc1">
+    <dgm:scene3d>
+      <a:camera prst="orthographicFront"/>
+      <a:lightRig rig="threePt" dir="t"/>
+    </dgm:scene3d>
+    <dgm:sp3d/>
+    <dgm:txPr/>
+    <dgm:style>
+      <a:lnRef idx="2">
+        <a:scrgbClr r="0" g="0" b="0"/>
+      </a:lnRef>
+      <a:fillRef idx="1">
+        <a:scrgbClr r="0" g="0" b="0"/>
+      </a:fillRef>
+      <a:effectRef idx="0">
+        <a:scrgbClr r="0" g="0" b="0"/>
+      </a:effectRef>
+      <a:fontRef idx="minor"/>
+    </dgm:style>
+  </dgm:styleLbl>
+  <dgm:styleLbl name="conFgAcc1">
+    <dgm:scene3d>
+      <a:camera prst="orthographicFront"/>
+      <a:lightRig rig="threePt" dir="t"/>
+    </dgm:scene3d>
+    <dgm:sp3d/>
+    <dgm:txPr/>
+    <dgm:style>
+      <a:lnRef idx="2">
+        <a:scrgbClr r="0" g="0" b="0"/>
+      </a:lnRef>
+      <a:fillRef idx="1">
+        <a:scrgbClr r="0" g="0" b="0"/>
+      </a:fillRef>
+      <a:effectRef idx="0">
+        <a:scrgbClr r="0" g="0" b="0"/>
+      </a:effectRef>
+      <a:fontRef idx="minor"/>
+    </dgm:style>
+  </dgm:styleLbl>
+  <dgm:styleLbl name="alignAcc1">
+    <dgm:scene3d>
+      <a:camera prst="orthographicFront"/>
+      <a:lightRig rig="threePt" dir="t"/>
+    </dgm:scene3d>
+    <dgm:sp3d/>
+    <dgm:txPr/>
+    <dgm:style>
+      <a:lnRef idx="2">
+        <a:scrgbClr r="0" g="0" b="0"/>
+      </a:lnRef>
+      <a:fillRef idx="1">
+        <a:scrgbClr r="0" g="0" b="0"/>
+      </a:fillRef>
+      <a:effectRef idx="0">
+        <a:scrgbClr r="0" g="0" b="0"/>
+      </a:effectRef>
+      <a:fontRef idx="minor"/>
+    </dgm:style>
+  </dgm:styleLbl>
+  <dgm:styleLbl name="trAlignAcc1">
+    <dgm:scene3d>
+      <a:camera prst="orthographicFront"/>
+      <a:lightRig rig="threePt" dir="t"/>
+    </dgm:scene3d>
+    <dgm:sp3d/>
+    <dgm:txPr/>
+    <dgm:style>
+      <a:lnRef idx="1">
+        <a:scrgbClr r="0" g="0" b="0"/>
+      </a:lnRef>
+      <a:fillRef idx="1">
+        <a:scrgbClr r="0" g="0" b="0"/>
+      </a:fillRef>
+      <a:effectRef idx="0">
+        <a:scrgbClr r="0" g="0" b="0"/>
+      </a:effectRef>
+      <a:fontRef idx="minor"/>
+    </dgm:style>
+  </dgm:styleLbl>
+  <dgm:styleLbl name="bgAcc1">
+    <dgm:scene3d>
+      <a:camera prst="orthographicFront"/>
+      <a:lightRig rig="threePt" dir="t"/>
+    </dgm:scene3d>
+    <dgm:sp3d/>
+    <dgm:txPr/>
+    <dgm:style>
+      <a:lnRef idx="2">
+        <a:scrgbClr r="0" g="0" b="0"/>
+      </a:lnRef>
+      <a:fillRef idx="1">
+        <a:scrgbClr r="0" g="0" b="0"/>
+      </a:fillRef>
+      <a:effectRef idx="0">
+        <a:scrgbClr r="0" g="0" b="0"/>
+      </a:effectRef>
+      <a:fontRef idx="minor"/>
+    </dgm:style>
+  </dgm:styleLbl>
+  <dgm:styleLbl name="solidFgAcc1">
+    <dgm:scene3d>
+      <a:camera prst="orthographicFront"/>
+      <a:lightRig rig="threePt" dir="t"/>
+    </dgm:scene3d>
+    <dgm:sp3d/>
+    <dgm:txPr/>
+    <dgm:style>
+      <a:lnRef idx="2">
+        <a:scrgbClr r="0" g="0" b="0"/>
+      </a:lnRef>
+      <a:fillRef idx="1">
+        <a:scrgbClr r="0" g="0" b="0"/>
+      </a:fillRef>
+      <a:effectRef idx="0">
+        <a:scrgbClr r="0" g="0" b="0"/>
+      </a:effectRef>
+      <a:fontRef idx="minor"/>
+    </dgm:style>
+  </dgm:styleLbl>
+  <dgm:styleLbl name="solidAlignAcc1">
+    <dgm:scene3d>
+      <a:camera prst="orthographicFront"/>
+      <a:lightRig rig="threePt" dir="t"/>
+    </dgm:scene3d>
+    <dgm:sp3d/>
+    <dgm:txPr/>
+    <dgm:style>
+      <a:lnRef idx="2">
+        <a:scrgbClr r="0" g="0" b="0"/>
+      </a:lnRef>
+      <a:fillRef idx="1">
+        <a:scrgbClr r="0" g="0" b="0"/>
+      </a:fillRef>
+      <a:effectRef idx="0">
+        <a:scrgbClr r="0" g="0" b="0"/>
+      </a:effectRef>
+      <a:fontRef idx="minor"/>
+    </dgm:style>
+  </dgm:styleLbl>
+  <dgm:styleLbl name="solidBgAcc1">
+    <dgm:scene3d>
+      <a:camera prst="orthographicFront"/>
+      <a:lightRig rig="threePt" dir="t"/>
+    </dgm:scene3d>
+    <dgm:sp3d/>
+    <dgm:txPr/>
+    <dgm:style>
+      <a:lnRef idx="2">
+        <a:scrgbClr r="0" g="0" b="0"/>
+      </a:lnRef>
+      <a:fillRef idx="1">
+        <a:scrgbClr r="0" g="0" b="0"/>
+      </a:fillRef>
+      <a:effectRef idx="0">
+        <a:scrgbClr r="0" g="0" b="0"/>
+      </a:effectRef>
+      <a:fontRef idx="minor"/>
+    </dgm:style>
+  </dgm:styleLbl>
+  <dgm:styleLbl name="fgAccFollowNode1">
+    <dgm:scene3d>
+      <a:camera prst="orthographicFront"/>
+      <a:lightRig rig="threePt" dir="t"/>
+    </dgm:scene3d>
+    <dgm:sp3d/>
+    <dgm:txPr/>
+    <dgm:style>
+      <a:lnRef idx="2">
+        <a:scrgbClr r="0" g="0" b="0"/>
+      </a:lnRef>
+      <a:fillRef idx="1">
+        <a:scrgbClr r="0" g="0" b="0"/>
+      </a:fillRef>
+      <a:effectRef idx="0">
+        <a:scrgbClr r="0" g="0" b="0"/>
+      </a:effectRef>
+      <a:fontRef idx="minor"/>
+    </dgm:style>
+  </dgm:styleLbl>
+  <dgm:styleLbl name="alignAccFollowNode1">
+    <dgm:scene3d>
+      <a:camera prst="orthographicFront"/>
+      <a:lightRig rig="threePt" dir="t"/>
+    </dgm:scene3d>
+    <dgm:sp3d/>
+    <dgm:txPr/>
+    <dgm:style>
+      <a:lnRef idx="2">
+        <a:scrgbClr r="0" g="0" b="0"/>
+      </a:lnRef>
+      <a:fillRef idx="1">
+        <a:scrgbClr r="0" g="0" b="0"/>
+      </a:fillRef>
+      <a:effectRef idx="0">
+        <a:scrgbClr r="0" g="0" b="0"/>
+      </a:effectRef>
+      <a:fontRef idx="minor"/>
+    </dgm:style>
+  </dgm:styleLbl>
+  <dgm:styleLbl name="bgAccFollowNode1">
+    <dgm:scene3d>
+      <a:camera prst="orthographicFront"/>
+      <a:lightRig rig="threePt" dir="t"/>
+    </dgm:scene3d>
+    <dgm:sp3d/>
+    <dgm:txPr/>
+    <dgm:style>
+      <a:lnRef idx="2">
+        <a:scrgbClr r="0" g="0" b="0"/>
+      </a:lnRef>
+      <a:fillRef idx="1">
+        <a:scrgbClr r="0" g="0" b="0"/>
+      </a:fillRef>
+      <a:effectRef idx="0">
+        <a:scrgbClr r="0" g="0" b="0"/>
+      </a:effectRef>
+      <a:fontRef idx="minor"/>
+    </dgm:style>
+  </dgm:styleLbl>
+  <dgm:styleLbl name="fgAcc0">
+    <dgm:scene3d>
+      <a:camera prst="orthographicFront"/>
+      <a:lightRig rig="threePt" dir="t"/>
+    </dgm:scene3d>
+    <dgm:sp3d/>
+    <dgm:txPr/>
+    <dgm:style>
+      <a:lnRef idx="2">
+        <a:scrgbClr r="0" g="0" b="0"/>
+      </a:lnRef>
+      <a:fillRef idx="1">
+        <a:scrgbClr r="0" g="0" b="0"/>
+      </a:fillRef>
+      <a:effectRef idx="0">
+        <a:scrgbClr r="0" g="0" b="0"/>
+      </a:effectRef>
+      <a:fontRef idx="minor"/>
+    </dgm:style>
+  </dgm:styleLbl>
+  <dgm:styleLbl name="fgAcc2">
+    <dgm:scene3d>
+      <a:camera prst="orthographicFront"/>
+      <a:lightRig rig="threePt" dir="t"/>
+    </dgm:scene3d>
+    <dgm:sp3d/>
+    <dgm:txPr/>
+    <dgm:style>
+      <a:lnRef idx="2">
+        <a:scrgbClr r="0" g="0" b="0"/>
+      </a:lnRef>
+      <a:fillRef idx="1">
+        <a:scrgbClr r="0" g="0" b="0"/>
+      </a:fillRef>
+      <a:effectRef idx="0">
+        <a:scrgbClr r="0" g="0" b="0"/>
+      </a:effectRef>
+      <a:fontRef idx="minor"/>
+    </dgm:style>
+  </dgm:styleLbl>
+  <dgm:styleLbl name="fgAcc3">
+    <dgm:scene3d>
+      <a:camera prst="orthographicFront"/>
+      <a:lightRig rig="threePt" dir="t"/>
+    </dgm:scene3d>
+    <dgm:sp3d/>
+    <dgm:txPr/>
+    <dgm:style>
+      <a:lnRef idx="2">
+        <a:scrgbClr r="0" g="0" b="0"/>
+      </a:lnRef>
+      <a:fillRef idx="1">
+        <a:scrgbClr r="0" g="0" b="0"/>
+      </a:fillRef>
+      <a:effectRef idx="0">
+        <a:scrgbClr r="0" g="0" b="0"/>
+      </a:effectRef>
+      <a:fontRef idx="minor"/>
+    </dgm:style>
+  </dgm:styleLbl>
+  <dgm:styleLbl name="fgAcc4">
+    <dgm:scene3d>
+      <a:camera prst="orthographicFront"/>
+      <a:lightRig rig="threePt" dir="t"/>
+    </dgm:scene3d>
+    <dgm:sp3d/>
+    <dgm:txPr/>
+    <dgm:style>
+      <a:lnRef idx="2">
+        <a:scrgbClr r="0" g="0" b="0"/>
+      </a:lnRef>
+      <a:fillRef idx="1">
+        <a:scrgbClr r="0" g="0" b="0"/>
+      </a:fillRef>
+      <a:effectRef idx="0">
+        <a:scrgbClr r="0" g="0" b="0"/>
+      </a:effectRef>
+      <a:fontRef idx="minor"/>
+    </dgm:style>
+  </dgm:styleLbl>
+  <dgm:styleLbl name="bgShp">
+    <dgm:scene3d>
+      <a:camera prst="orthographicFront"/>
+      <a:lightRig rig="threePt" dir="t"/>
+    </dgm:scene3d>
+    <dgm:sp3d/>
+    <dgm:txPr/>
+    <dgm:style>
+      <a:lnRef idx="0">
+        <a:scrgbClr r="0" g="0" b="0"/>
+      </a:lnRef>
+      <a:fillRef idx="1">
+        <a:scrgbClr r="0" g="0" b="0"/>
+      </a:fillRef>
+      <a:effectRef idx="0">
+        <a:scrgbClr r="0" g="0" b="0"/>
+      </a:effectRef>
+      <a:fontRef idx="minor"/>
+    </dgm:style>
+  </dgm:styleLbl>
+  <dgm:styleLbl name="dkBgShp">
+    <dgm:scene3d>
+      <a:camera prst="orthographicFront"/>
+      <a:lightRig rig="threePt" dir="t"/>
+    </dgm:scene3d>
+    <dgm:sp3d/>
+    <dgm:txPr/>
+    <dgm:style>
+      <a:lnRef idx="0">
+        <a:scrgbClr r="0" g="0" b="0"/>
+      </a:lnRef>
+      <a:fillRef idx="1">
+        <a:scrgbClr r="0" g="0" b="0"/>
+      </a:fillRef>
+      <a:effectRef idx="0">
+        <a:scrgbClr r="0" g="0" b="0"/>
+      </a:effectRef>
+      <a:fontRef idx="minor"/>
+    </dgm:style>
+  </dgm:styleLbl>
+  <dgm:styleLbl name="trBgShp">
+    <dgm:scene3d>
+      <a:camera prst="orthographicFront"/>
+      <a:lightRig rig="threePt" dir="t"/>
+    </dgm:scene3d>
+    <dgm:sp3d/>
+    <dgm:txPr/>
+    <dgm:style>
+      <a:lnRef idx="0">
+        <a:scrgbClr r="0" g="0" b="0"/>
+      </a:lnRef>
+      <a:fillRef idx="1">
+        <a:scrgbClr r="0" g="0" b="0"/>
+      </a:fillRef>
+      <a:effectRef idx="0">
+        <a:scrgbClr r="0" g="0" b="0"/>
+      </a:effectRef>
+      <a:fontRef idx="minor"/>
+    </dgm:style>
+  </dgm:styleLbl>
+  <dgm:styleLbl name="fgShp">
+    <dgm:scene3d>
+      <a:camera prst="orthographicFront"/>
+      <a:lightRig rig="threePt" dir="t"/>
+    </dgm:scene3d>
+    <dgm:sp3d/>
+    <dgm:txPr/>
+    <dgm:style>
+      <a:lnRef idx="2">
+        <a:scrgbClr r="0" g="0" b="0"/>
+      </a:lnRef>
+      <a:fillRef idx="1">
+        <a:scrgbClr r="0" g="0" b="0"/>
+      </a:fillRef>
+      <a:effectRef idx="0">
+        <a:scrgbClr r="0" g="0" b="0"/>
+      </a:effectRef>
+      <a:fontRef idx="minor"/>
+    </dgm:style>
+  </dgm:styleLbl>
+  <dgm:styleLbl name="revTx">
+    <dgm:scene3d>
+      <a:camera prst="orthographicFront"/>
+      <a:lightRig rig="threePt" dir="t"/>
+    </dgm:scene3d>
+    <dgm:sp3d/>
+    <dgm:txPr/>
+    <dgm:style>
+      <a:lnRef idx="0">
+        <a:scrgbClr r="0" g="0" b="0"/>
+      </a:lnRef>
+      <a:fillRef idx="0">
+        <a:scrgbClr r="0" g="0" b="0"/>
+      </a:fillRef>
+      <a:effectRef idx="0">
+        <a:scrgbClr r="0" g="0" b="0"/>
+      </a:effectRef>
+      <a:fontRef idx="minor"/>
+    </dgm:style>
+  </dgm:styleLbl>
+</dgm:styleDef>
+</file>
+
+<file path=ppt/diagrams/quickStyle2.xml><?xml version="1.0" encoding="utf-8"?>
+<dgm:styleDef xmlns:dgm="http://schemas.openxmlformats.org/drawingml/2006/diagram" xmlns:a="http://schemas.openxmlformats.org/drawingml/2006/main" uniqueId="urn:microsoft.com/office/officeart/2005/8/quickstyle/simple1">
+  <dgm:title val=""/>
+  <dgm:desc val=""/>
+  <dgm:catLst>
+    <dgm:cat type="simple" pri="10100"/>
+  </dgm:catLst>
+  <dgm:scene3d>
+    <a:camera prst="orthographicFront"/>
+    <a:lightRig rig="threePt" dir="t"/>
+  </dgm:scene3d>
+  <dgm:styleLbl name="node0">
+    <dgm:scene3d>
+      <a:camera prst="orthographicFront"/>
+      <a:lightRig rig="threePt" dir="t"/>
+    </dgm:scene3d>
+    <dgm:sp3d/>
+    <dgm:txPr/>
+    <dgm:style>
+      <a:lnRef idx="2">
+        <a:scrgbClr r="0" g="0" b="0"/>
+      </a:lnRef>
+      <a:fillRef idx="1">
+        <a:scrgbClr r="0" g="0" b="0"/>
+      </a:fillRef>
+      <a:effectRef idx="0">
+        <a:scrgbClr r="0" g="0" b="0"/>
+      </a:effectRef>
+      <a:fontRef idx="minor">
+        <a:schemeClr val="lt1"/>
+      </a:fontRef>
+    </dgm:style>
+  </dgm:styleLbl>
+  <dgm:styleLbl name="lnNode1">
+    <dgm:scene3d>
+      <a:camera prst="orthographicFront"/>
+      <a:lightRig rig="threePt" dir="t"/>
+    </dgm:scene3d>
+    <dgm:sp3d/>
+    <dgm:txPr/>
+    <dgm:style>
+      <a:lnRef idx="2">
+        <a:scrgbClr r="0" g="0" b="0"/>
+      </a:lnRef>
+      <a:fillRef idx="1">
+        <a:scrgbClr r="0" g="0" b="0"/>
+      </a:fillRef>
+      <a:effectRef idx="0">
+        <a:scrgbClr r="0" g="0" b="0"/>
+      </a:effectRef>
+      <a:fontRef idx="minor">
+        <a:schemeClr val="lt1"/>
+      </a:fontRef>
+    </dgm:style>
+  </dgm:styleLbl>
+  <dgm:styleLbl name="vennNode1">
+    <dgm:scene3d>
+      <a:camera prst="orthographicFront"/>
+      <a:lightRig rig="threePt" dir="t"/>
+    </dgm:scene3d>
+    <dgm:sp3d/>
+    <dgm:txPr/>
+    <dgm:style>
+      <a:lnRef idx="2">
+        <a:scrgbClr r="0" g="0" b="0"/>
+      </a:lnRef>
+      <a:fillRef idx="1">
+        <a:scrgbClr r="0" g="0" b="0"/>
+      </a:fillRef>
+      <a:effectRef idx="0">
+        <a:scrgbClr r="0" g="0" b="0"/>
+      </a:effectRef>
+      <a:fontRef idx="minor">
+        <a:schemeClr val="tx1"/>
+      </a:fontRef>
+    </dgm:style>
+  </dgm:styleLbl>
+  <dgm:styleLbl name="alignNode1">
+    <dgm:scene3d>
+      <a:camera prst="orthographicFront"/>
+      <a:lightRig rig="threePt" dir="t"/>
+    </dgm:scene3d>
+    <dgm:sp3d/>
+    <dgm:txPr/>
+    <dgm:style>
+      <a:lnRef idx="2">
+        <a:scrgbClr r="0" g="0" b="0"/>
+      </a:lnRef>
+      <a:fillRef idx="1">
+        <a:scrgbClr r="0" g="0" b="0"/>
+      </a:fillRef>
+      <a:effectRef idx="0">
+        <a:scrgbClr r="0" g="0" b="0"/>
+      </a:effectRef>
+      <a:fontRef idx="minor">
+        <a:schemeClr val="lt1"/>
+      </a:fontRef>
+    </dgm:style>
+  </dgm:styleLbl>
+  <dgm:styleLbl name="node1">
+    <dgm:scene3d>
+      <a:camera prst="orthographicFront"/>
+      <a:lightRig rig="threePt" dir="t"/>
+    </dgm:scene3d>
+    <dgm:sp3d/>
+    <dgm:txPr/>
+    <dgm:style>
+      <a:lnRef idx="2">
+        <a:scrgbClr r="0" g="0" b="0"/>
+      </a:lnRef>
+      <a:fillRef idx="1">
+        <a:scrgbClr r="0" g="0" b="0"/>
+      </a:fillRef>
+      <a:effectRef idx="0">
+        <a:scrgbClr r="0" g="0" b="0"/>
+      </a:effectRef>
+      <a:fontRef idx="minor">
+        <a:schemeClr val="lt1"/>
+      </a:fontRef>
+    </dgm:style>
+  </dgm:styleLbl>
+  <dgm:styleLbl name="node2">
+    <dgm:scene3d>
+      <a:camera prst="orthographicFront"/>
+      <a:lightRig rig="threePt" dir="t"/>
+    </dgm:scene3d>
+    <dgm:sp3d/>
+    <dgm:txPr/>
+    <dgm:style>
+      <a:lnRef idx="2">
+        <a:scrgbClr r="0" g="0" b="0"/>
+      </a:lnRef>
+      <a:fillRef idx="1">
+        <a:scrgbClr r="0" g="0" b="0"/>
+      </a:fillRef>
+      <a:effectRef idx="0">
+        <a:scrgbClr r="0" g="0" b="0"/>
+      </a:effectRef>
+      <a:fontRef idx="minor">
+        <a:schemeClr val="lt1"/>
+      </a:fontRef>
+    </dgm:style>
+  </dgm:styleLbl>
+  <dgm:styleLbl name="node3">
+    <dgm:scene3d>
+      <a:camera prst="orthographicFront"/>
+      <a:lightRig rig="threePt" dir="t"/>
+    </dgm:scene3d>
+    <dgm:sp3d/>
+    <dgm:txPr/>
+    <dgm:style>
+      <a:lnRef idx="2">
+        <a:scrgbClr r="0" g="0" b="0"/>
+      </a:lnRef>
+      <a:fillRef idx="1">
+        <a:scrgbClr r="0" g="0" b="0"/>
+      </a:fillRef>
+      <a:effectRef idx="0">
+        <a:scrgbClr r="0" g="0" b="0"/>
+      </a:effectRef>
+      <a:fontRef idx="minor">
+        <a:schemeClr val="lt1"/>
+      </a:fontRef>
+    </dgm:style>
+  </dgm:styleLbl>
+  <dgm:styleLbl name="node4">
+    <dgm:scene3d>
+      <a:camera prst="orthographicFront"/>
+      <a:lightRig rig="threePt" dir="t"/>
+    </dgm:scene3d>
+    <dgm:sp3d/>
+    <dgm:txPr/>
+    <dgm:style>
+      <a:lnRef idx="2">
+        <a:scrgbClr r="0" g="0" b="0"/>
+      </a:lnRef>
+      <a:fillRef idx="1">
+        <a:scrgbClr r="0" g="0" b="0"/>
+      </a:fillRef>
+      <a:effectRef idx="0">
+        <a:scrgbClr r="0" g="0" b="0"/>
+      </a:effectRef>
+      <a:fontRef idx="minor">
+        <a:schemeClr val="lt1"/>
+      </a:fontRef>
+    </dgm:style>
+  </dgm:styleLbl>
+  <dgm:styleLbl name="fgImgPlace1">
+    <dgm:scene3d>
+      <a:camera prst="orthographicFront"/>
+      <a:lightRig rig="threePt" dir="t"/>
+    </dgm:scene3d>
+    <dgm:sp3d/>
+    <dgm:txPr/>
+    <dgm:style>
+      <a:lnRef idx="2">
+        <a:scrgbClr r="0" g="0" b="0"/>
+      </a:lnRef>
+      <a:fillRef idx="1">
+        <a:scrgbClr r="0" g="0" b="0"/>
+      </a:fillRef>
+      <a:effectRef idx="0">
+        <a:scrgbClr r="0" g="0" b="0"/>
+      </a:effectRef>
+      <a:fontRef idx="minor"/>
+    </dgm:style>
+  </dgm:styleLbl>
+  <dgm:styleLbl name="alignImgPlace1">
+    <dgm:scene3d>
+      <a:camera prst="orthographicFront"/>
+      <a:lightRig rig="threePt" dir="t"/>
+    </dgm:scene3d>
+    <dgm:sp3d/>
+    <dgm:txPr/>
+    <dgm:style>
+      <a:lnRef idx="2">
+        <a:scrgbClr r="0" g="0" b="0"/>
+      </a:lnRef>
+      <a:fillRef idx="1">
+        <a:scrgbClr r="0" g="0" b="0"/>
+      </a:fillRef>
+      <a:effectRef idx="0">
+        <a:scrgbClr r="0" g="0" b="0"/>
+      </a:effectRef>
+      <a:fontRef idx="minor"/>
+    </dgm:style>
+  </dgm:styleLbl>
+  <dgm:styleLbl name="bgImgPlace1">
+    <dgm:scene3d>
+      <a:camera prst="orthographicFront"/>
+      <a:lightRig rig="threePt" dir="t"/>
+    </dgm:scene3d>
+    <dgm:sp3d/>
+    <dgm:txPr/>
+    <dgm:style>
+      <a:lnRef idx="2">
+        <a:scrgbClr r="0" g="0" b="0"/>
+      </a:lnRef>
+      <a:fillRef idx="1">
+        <a:scrgbClr r="0" g="0" b="0"/>
+      </a:fillRef>
+      <a:effectRef idx="0">
+        <a:scrgbClr r="0" g="0" b="0"/>
+      </a:effectRef>
+      <a:fontRef idx="minor"/>
+    </dgm:style>
+  </dgm:styleLbl>
+  <dgm:styleLbl name="sibTrans2D1">
+    <dgm:scene3d>
+      <a:camera prst="orthographicFront"/>
+      <a:lightRig rig="threePt" dir="t"/>
+    </dgm:scene3d>
+    <dgm:sp3d/>
+    <dgm:txPr/>
+    <dgm:style>
+      <a:lnRef idx="0">
+        <a:scrgbClr r="0" g="0" b="0"/>
+      </a:lnRef>
+      <a:fillRef idx="1">
+        <a:scrgbClr r="0" g="0" b="0"/>
+      </a:fillRef>
+      <a:effectRef idx="0">
+        <a:scrgbClr r="0" g="0" b="0"/>
+      </a:effectRef>
+      <a:fontRef idx="minor">
+        <a:schemeClr val="lt1"/>
+      </a:fontRef>
+    </dgm:style>
+  </dgm:styleLbl>
+  <dgm:styleLbl name="fgSibTrans2D1">
+    <dgm:scene3d>
+      <a:camera prst="orthographicFront"/>
+      <a:lightRig rig="threePt" dir="t"/>
+    </dgm:scene3d>
+    <dgm:sp3d/>
+    <dgm:txPr/>
+    <dgm:style>
+      <a:lnRef idx="0">
+        <a:scrgbClr r="0" g="0" b="0"/>
+      </a:lnRef>
+      <a:fillRef idx="1">
+        <a:scrgbClr r="0" g="0" b="0"/>
+      </a:fillRef>
+      <a:effectRef idx="0">
+        <a:scrgbClr r="0" g="0" b="0"/>
+      </a:effectRef>
+      <a:fontRef idx="minor">
+        <a:schemeClr val="lt1"/>
+      </a:fontRef>
+    </dgm:style>
+  </dgm:styleLbl>
+  <dgm:styleLbl name="bgSibTrans2D1">
+    <dgm:scene3d>
+      <a:camera prst="orthographicFront"/>
+      <a:lightRig rig="threePt" dir="t"/>
+    </dgm:scene3d>
+    <dgm:sp3d/>
+    <dgm:txPr/>
+    <dgm:style>
+      <a:lnRef idx="0">
+        <a:scrgbClr r="0" g="0" b="0"/>
+      </a:lnRef>
+      <a:fillRef idx="1">
+        <a:scrgbClr r="0" g="0" b="0"/>
+      </a:fillRef>
+      <a:effectRef idx="0">
+        <a:scrgbClr r="0" g="0" b="0"/>
+      </a:effectRef>
+      <a:fontRef idx="minor">
+        <a:schemeClr val="lt1"/>
+      </a:fontRef>
+    </dgm:style>
+  </dgm:styleLbl>
+  <dgm:styleLbl name="sibTrans1D1">
+    <dgm:scene3d>
+      <a:camera prst="orthographicFront"/>
+      <a:lightRig rig="threePt" dir="t"/>
+    </dgm:scene3d>
+    <dgm:sp3d/>
+    <dgm:txPr/>
+    <dgm:style>
+      <a:lnRef idx="1">
+        <a:scrgbClr r="0" g="0" b="0"/>
+      </a:lnRef>
+      <a:fillRef idx="0">
+        <a:scrgbClr r="0" g="0" b="0"/>
+      </a:fillRef>
+      <a:effectRef idx="0">
+        <a:scrgbClr r="0" g="0" b="0"/>
+      </a:effectRef>
+      <a:fontRef idx="minor"/>
+    </dgm:style>
+  </dgm:styleLbl>
+  <dgm:styleLbl name="callout">
+    <dgm:scene3d>
+      <a:camera prst="orthographicFront"/>
+      <a:lightRig rig="threePt" dir="t"/>
+    </dgm:scene3d>
+    <dgm:sp3d/>
+    <dgm:txPr/>
+    <dgm:style>
+      <a:lnRef idx="2">
+        <a:scrgbClr r="0" g="0" b="0"/>
+      </a:lnRef>
+      <a:fillRef idx="1">
+        <a:scrgbClr r="0" g="0" b="0"/>
+      </a:fillRef>
+      <a:effectRef idx="0">
+        <a:scrgbClr r="0" g="0" b="0"/>
+      </a:effectRef>
+      <a:fontRef idx="minor"/>
+    </dgm:style>
+  </dgm:styleLbl>
+  <dgm:styleLbl name="asst0">
+    <dgm:scene3d>
+      <a:camera prst="orthographicFront"/>
+      <a:lightRig rig="threePt" dir="t"/>
+    </dgm:scene3d>
+    <dgm:sp3d/>
+    <dgm:txPr/>
+    <dgm:style>
+      <a:lnRef idx="2">
+        <a:scrgbClr r="0" g="0" b="0"/>
+      </a:lnRef>
+      <a:fillRef idx="1">
+        <a:scrgbClr r="0" g="0" b="0"/>
+      </a:fillRef>
+      <a:effectRef idx="0">
+        <a:scrgbClr r="0" g="0" b="0"/>
+      </a:effectRef>
+      <a:fontRef idx="minor">
+        <a:schemeClr val="lt1"/>
+      </a:fontRef>
+    </dgm:style>
+  </dgm:styleLbl>
+  <dgm:styleLbl name="asst1">
+    <dgm:scene3d>
+      <a:camera prst="orthographicFront"/>
+      <a:lightRig rig="threePt" dir="t"/>
+    </dgm:scene3d>
+    <dgm:sp3d/>
+    <dgm:txPr/>
+    <dgm:style>
+      <a:lnRef idx="2">
+        <a:scrgbClr r="0" g="0" b="0"/>
+      </a:lnRef>
+      <a:fillRef idx="1">
+        <a:scrgbClr r="0" g="0" b="0"/>
+      </a:fillRef>
+      <a:effectRef idx="0">
+        <a:scrgbClr r="0" g="0" b="0"/>
+      </a:effectRef>
+      <a:fontRef idx="minor">
+        <a:schemeClr val="lt1"/>
+      </a:fontRef>
+    </dgm:style>
+  </dgm:styleLbl>
+  <dgm:styleLbl name="asst2">
+    <dgm:scene3d>
+      <a:camera prst="orthographicFront"/>
+      <a:lightRig rig="threePt" dir="t"/>
+    </dgm:scene3d>
+    <dgm:sp3d/>
+    <dgm:txPr/>
+    <dgm:style>
+      <a:lnRef idx="2">
+        <a:scrgbClr r="0" g="0" b="0"/>
+      </a:lnRef>
+      <a:fillRef idx="1">
+        <a:scrgbClr r="0" g="0" b="0"/>
+      </a:fillRef>
+      <a:effectRef idx="0">
+        <a:scrgbClr r="0" g="0" b="0"/>
+      </a:effectRef>
+      <a:fontRef idx="minor">
+        <a:schemeClr val="lt1"/>
+      </a:fontRef>
+    </dgm:style>
+  </dgm:styleLbl>
+  <dgm:styleLbl name="asst3">
+    <dgm:scene3d>
+      <a:camera prst="orthographicFront"/>
+      <a:lightRig rig="threePt" dir="t"/>
+    </dgm:scene3d>
+    <dgm:sp3d/>
+    <dgm:txPr/>
+    <dgm:style>
+      <a:lnRef idx="2">
+        <a:scrgbClr r="0" g="0" b="0"/>
+      </a:lnRef>
+      <a:fillRef idx="1">
+        <a:scrgbClr r="0" g="0" b="0"/>
+      </a:fillRef>
+      <a:effectRef idx="0">
+        <a:scrgbClr r="0" g="0" b="0"/>
+      </a:effectRef>
+      <a:fontRef idx="minor">
+        <a:schemeClr val="lt1"/>
+      </a:fontRef>
+    </dgm:style>
+  </dgm:styleLbl>
+  <dgm:styleLbl name="asst4">
+    <dgm:scene3d>
+      <a:camera prst="orthographicFront"/>
+      <a:lightRig rig="threePt" dir="t"/>
+    </dgm:scene3d>
+    <dgm:sp3d/>
+    <dgm:txPr/>
+    <dgm:style>
+      <a:lnRef idx="2">
+        <a:scrgbClr r="0" g="0" b="0"/>
+      </a:lnRef>
+      <a:fillRef idx="1">
+        <a:scrgbClr r="0" g="0" b="0"/>
+      </a:fillRef>
+      <a:effectRef idx="0">
+        <a:scrgbClr r="0" g="0" b="0"/>
+      </a:effectRef>
+      <a:fontRef idx="minor">
+        <a:schemeClr val="lt1"/>
+      </a:fontRef>
+    </dgm:style>
+  </dgm:styleLbl>
+  <dgm:styleLbl name="parChTrans2D1">
+    <dgm:scene3d>
+      <a:camera prst="orthographicFront"/>
+      <a:lightRig rig="threePt" dir="t"/>
+    </dgm:scene3d>
+    <dgm:sp3d/>
+    <dgm:txPr/>
+    <dgm:style>
+      <a:lnRef idx="2">
+        <a:scrgbClr r="0" g="0" b="0"/>
+      </a:lnRef>
+      <a:fillRef idx="1">
+        <a:scrgbClr r="0" g="0" b="0"/>
+      </a:fillRef>
+      <a:effectRef idx="0">
+        <a:scrgbClr r="0" g="0" b="0"/>
+      </a:effectRef>
+      <a:fontRef idx="minor">
+        <a:schemeClr val="lt1"/>
+      </a:fontRef>
+    </dgm:style>
+  </dgm:styleLbl>
+  <dgm:styleLbl name="parChTrans2D2">
+    <dgm:scene3d>
+      <a:camera prst="orthographicFront"/>
+      <a:lightRig rig="threePt" dir="t"/>
+    </dgm:scene3d>
+    <dgm:sp3d/>
+    <dgm:txPr/>
+    <dgm:style>
+      <a:lnRef idx="2">
+        <a:scrgbClr r="0" g="0" b="0"/>
+      </a:lnRef>
+      <a:fillRef idx="1">
+        <a:scrgbClr r="0" g="0" b="0"/>
+      </a:fillRef>
+      <a:effectRef idx="0">
+        <a:scrgbClr r="0" g="0" b="0"/>
+      </a:effectRef>
+      <a:fontRef idx="minor">
+        <a:schemeClr val="lt1"/>
+      </a:fontRef>
+    </dgm:style>
+  </dgm:styleLbl>
+  <dgm:styleLbl name="parChTrans2D3">
+    <dgm:scene3d>
+      <a:camera prst="orthographicFront"/>
+      <a:lightRig rig="threePt" dir="t"/>
+    </dgm:scene3d>
+    <dgm:sp3d/>
+    <dgm:txPr/>
+    <dgm:style>
+      <a:lnRef idx="2">
+        <a:scrgbClr r="0" g="0" b="0"/>
+      </a:lnRef>
+      <a:fillRef idx="1">
+        <a:scrgbClr r="0" g="0" b="0"/>
+      </a:fillRef>
+      <a:effectRef idx="0">
+        <a:scrgbClr r="0" g="0" b="0"/>
+      </a:effectRef>
+      <a:fontRef idx="minor">
+        <a:schemeClr val="lt1"/>
+      </a:fontRef>
+    </dgm:style>
+  </dgm:styleLbl>
+  <dgm:styleLbl name="parChTrans2D4">
+    <dgm:scene3d>
+      <a:camera prst="orthographicFront"/>
+      <a:lightRig rig="threePt" dir="t"/>
+    </dgm:scene3d>
+    <dgm:sp3d/>
+    <dgm:txPr/>
+    <dgm:style>
+      <a:lnRef idx="2">
+        <a:scrgbClr r="0" g="0" b="0"/>
+      </a:lnRef>
+      <a:fillRef idx="1">
+        <a:scrgbClr r="0" g="0" b="0"/>
+      </a:fillRef>
+      <a:effectRef idx="0">
+        <a:scrgbClr r="0" g="0" b="0"/>
+      </a:effectRef>
+      <a:fontRef idx="minor">
+        <a:schemeClr val="lt1"/>
+      </a:fontRef>
+    </dgm:style>
+  </dgm:styleLbl>
+  <dgm:styleLbl name="parChTrans1D1">
+    <dgm:scene3d>
+      <a:camera prst="orthographicFront"/>
+      <a:lightRig rig="threePt" dir="t"/>
+    </dgm:scene3d>
+    <dgm:sp3d/>
+    <dgm:txPr/>
+    <dgm:style>
+      <a:lnRef idx="2">
+        <a:scrgbClr r="0" g="0" b="0"/>
+      </a:lnRef>
+      <a:fillRef idx="0">
+        <a:scrgbClr r="0" g="0" b="0"/>
+      </a:fillRef>
+      <a:effectRef idx="0">
+        <a:scrgbClr r="0" g="0" b="0"/>
+      </a:effectRef>
+      <a:fontRef idx="minor"/>
+    </dgm:style>
+  </dgm:styleLbl>
+  <dgm:styleLbl name="parChTrans1D2">
+    <dgm:scene3d>
+      <a:camera prst="orthographicFront"/>
+      <a:lightRig rig="threePt" dir="t"/>
+    </dgm:scene3d>
+    <dgm:sp3d/>
+    <dgm:txPr/>
+    <dgm:style>
+      <a:lnRef idx="2">
+        <a:scrgbClr r="0" g="0" b="0"/>
+      </a:lnRef>
+      <a:fillRef idx="0">
+        <a:scrgbClr r="0" g="0" b="0"/>
+      </a:fillRef>
+      <a:effectRef idx="0">
+        <a:scrgbClr r="0" g="0" b="0"/>
+      </a:effectRef>
+      <a:fontRef idx="minor"/>
+    </dgm:style>
+  </dgm:styleLbl>
+  <dgm:styleLbl name="parChTrans1D3">
+    <dgm:scene3d>
+      <a:camera prst="orthographicFront"/>
+      <a:lightRig rig="threePt" dir="t"/>
+    </dgm:scene3d>
+    <dgm:sp3d/>
+    <dgm:txPr/>
+    <dgm:style>
+      <a:lnRef idx="2">
+        <a:scrgbClr r="0" g="0" b="0"/>
+      </a:lnRef>
+      <a:fillRef idx="0">
+        <a:scrgbClr r="0" g="0" b="0"/>
+      </a:fillRef>
+      <a:effectRef idx="0">
+        <a:scrgbClr r="0" g="0" b="0"/>
+      </a:effectRef>
+      <a:fontRef idx="minor"/>
+    </dgm:style>
+  </dgm:styleLbl>
+  <dgm:styleLbl name="parChTrans1D4">
+    <dgm:scene3d>
+      <a:camera prst="orthographicFront"/>
+      <a:lightRig rig="threePt" dir="t"/>
+    </dgm:scene3d>
+    <dgm:sp3d/>
+    <dgm:txPr/>
+    <dgm:style>
+      <a:lnRef idx="2">
+        <a:scrgbClr r="0" g="0" b="0"/>
+      </a:lnRef>
+      <a:fillRef idx="0">
+        <a:scrgbClr r="0" g="0" b="0"/>
+      </a:fillRef>
+      <a:effectRef idx="0">
+        <a:scrgbClr r="0" g="0" b="0"/>
+      </a:effectRef>
+      <a:fontRef idx="minor"/>
+    </dgm:style>
+  </dgm:styleLbl>
+  <dgm:styleLbl name="fgAcc1">
+    <dgm:scene3d>
+      <a:camera prst="orthographicFront"/>
+      <a:lightRig rig="threePt" dir="t"/>
+    </dgm:scene3d>
+    <dgm:sp3d/>
+    <dgm:txPr/>
+    <dgm:style>
+      <a:lnRef idx="2">
+        <a:scrgbClr r="0" g="0" b="0"/>
+      </a:lnRef>
+      <a:fillRef idx="1">
+        <a:scrgbClr r="0" g="0" b="0"/>
+      </a:fillRef>
+      <a:effectRef idx="0">
+        <a:scrgbClr r="0" g="0" b="0"/>
+      </a:effectRef>
+      <a:fontRef idx="minor"/>
+    </dgm:style>
+  </dgm:styleLbl>
+  <dgm:styleLbl name="conFgAcc1">
+    <dgm:scene3d>
+      <a:camera prst="orthographicFront"/>
+      <a:lightRig rig="threePt" dir="t"/>
+    </dgm:scene3d>
+    <dgm:sp3d/>
+    <dgm:txPr/>
+    <dgm:style>
+      <a:lnRef idx="2">
+        <a:scrgbClr r="0" g="0" b="0"/>
+      </a:lnRef>
+      <a:fillRef idx="1">
+        <a:scrgbClr r="0" g="0" b="0"/>
+      </a:fillRef>
+      <a:effectRef idx="0">
+        <a:scrgbClr r="0" g="0" b="0"/>
+      </a:effectRef>
+      <a:fontRef idx="minor"/>
+    </dgm:style>
+  </dgm:styleLbl>
+  <dgm:styleLbl name="alignAcc1">
+    <dgm:scene3d>
+      <a:camera prst="orthographicFront"/>
+      <a:lightRig rig="threePt" dir="t"/>
+    </dgm:scene3d>
+    <dgm:sp3d/>
+    <dgm:txPr/>
+    <dgm:style>
+      <a:lnRef idx="2">
+        <a:scrgbClr r="0" g="0" b="0"/>
+      </a:lnRef>
+      <a:fillRef idx="1">
+        <a:scrgbClr r="0" g="0" b="0"/>
+      </a:fillRef>
+      <a:effectRef idx="0">
+        <a:scrgbClr r="0" g="0" b="0"/>
+      </a:effectRef>
+      <a:fontRef idx="minor"/>
+    </dgm:style>
+  </dgm:styleLbl>
+  <dgm:styleLbl name="trAlignAcc1">
+    <dgm:scene3d>
+      <a:camera prst="orthographicFront"/>
+      <a:lightRig rig="threePt" dir="t"/>
+    </dgm:scene3d>
+    <dgm:sp3d/>
+    <dgm:txPr/>
+    <dgm:style>
+      <a:lnRef idx="1">
+        <a:scrgbClr r="0" g="0" b="0"/>
+      </a:lnRef>
+      <a:fillRef idx="1">
+        <a:scrgbClr r="0" g="0" b="0"/>
+      </a:fillRef>
+      <a:effectRef idx="0">
+        <a:scrgbClr r="0" g="0" b="0"/>
+      </a:effectRef>
+      <a:fontRef idx="minor"/>
+    </dgm:style>
+  </dgm:styleLbl>
+  <dgm:styleLbl name="bgAcc1">
+    <dgm:scene3d>
+      <a:camera prst="orthographicFront"/>
+      <a:lightRig rig="threePt" dir="t"/>
+    </dgm:scene3d>
+    <dgm:sp3d/>
+    <dgm:txPr/>
+    <dgm:style>
+      <a:lnRef idx="2">
+        <a:scrgbClr r="0" g="0" b="0"/>
+      </a:lnRef>
+      <a:fillRef idx="1">
+        <a:scrgbClr r="0" g="0" b="0"/>
+      </a:fillRef>
+      <a:effectRef idx="0">
+        <a:scrgbClr r="0" g="0" b="0"/>
+      </a:effectRef>
+      <a:fontRef idx="minor"/>
+    </dgm:style>
+  </dgm:styleLbl>
+  <dgm:styleLbl name="solidFgAcc1">
+    <dgm:scene3d>
+      <a:camera prst="orthographicFront"/>
+      <a:lightRig rig="threePt" dir="t"/>
+    </dgm:scene3d>
+    <dgm:sp3d/>
+    <dgm:txPr/>
+    <dgm:style>
+      <a:lnRef idx="2">
+        <a:scrgbClr r="0" g="0" b="0"/>
+      </a:lnRef>
+      <a:fillRef idx="1">
+        <a:scrgbClr r="0" g="0" b="0"/>
+      </a:fillRef>
+      <a:effectRef idx="0">
+        <a:scrgbClr r="0" g="0" b="0"/>
+      </a:effectRef>
+      <a:fontRef idx="minor"/>
+    </dgm:style>
+  </dgm:styleLbl>
+  <dgm:styleLbl name="solidAlignAcc1">
+    <dgm:scene3d>
+      <a:camera prst="orthographicFront"/>
+      <a:lightRig rig="threePt" dir="t"/>
+    </dgm:scene3d>
+    <dgm:sp3d/>
+    <dgm:txPr/>
+    <dgm:style>
+      <a:lnRef idx="2">
+        <a:scrgbClr r="0" g="0" b="0"/>
+      </a:lnRef>
+      <a:fillRef idx="1">
+        <a:scrgbClr r="0" g="0" b="0"/>
+      </a:fillRef>
+      <a:effectRef idx="0">
+        <a:scrgbClr r="0" g="0" b="0"/>
+      </a:effectRef>
+      <a:fontRef idx="minor"/>
+    </dgm:style>
+  </dgm:styleLbl>
+  <dgm:styleLbl name="solidBgAcc1">
+    <dgm:scene3d>
+      <a:camera prst="orthographicFront"/>
+      <a:lightRig rig="threePt" dir="t"/>
+    </dgm:scene3d>
+    <dgm:sp3d/>
+    <dgm:txPr/>
+    <dgm:style>
+      <a:lnRef idx="2">
+        <a:scrgbClr r="0" g="0" b="0"/>
+      </a:lnRef>
+      <a:fillRef idx="1">
+        <a:scrgbClr r="0" g="0" b="0"/>
+      </a:fillRef>
+      <a:effectRef idx="0">
+        <a:scrgbClr r="0" g="0" b="0"/>
+      </a:effectRef>
+      <a:fontRef idx="minor"/>
+    </dgm:style>
+  </dgm:styleLbl>
+  <dgm:styleLbl name="fgAccFollowNode1">
+    <dgm:scene3d>
+      <a:camera prst="orthographicFront"/>
+      <a:lightRig rig="threePt" dir="t"/>
+    </dgm:scene3d>
+    <dgm:sp3d/>
+    <dgm:txPr/>
+    <dgm:style>
+      <a:lnRef idx="2">
+        <a:scrgbClr r="0" g="0" b="0"/>
+      </a:lnRef>
+      <a:fillRef idx="1">
+        <a:scrgbClr r="0" g="0" b="0"/>
+      </a:fillRef>
+      <a:effectRef idx="0">
+        <a:scrgbClr r="0" g="0" b="0"/>
+      </a:effectRef>
+      <a:fontRef idx="minor"/>
+    </dgm:style>
+  </dgm:styleLbl>
+  <dgm:styleLbl name="alignAccFollowNode1">
+    <dgm:scene3d>
+      <a:camera prst="orthographicFront"/>
+      <a:lightRig rig="threePt" dir="t"/>
+    </dgm:scene3d>
+    <dgm:sp3d/>
+    <dgm:txPr/>
+    <dgm:style>
+      <a:lnRef idx="2">
+        <a:scrgbClr r="0" g="0" b="0"/>
+      </a:lnRef>
+      <a:fillRef idx="1">
+        <a:scrgbClr r="0" g="0" b="0"/>
+      </a:fillRef>
+      <a:effectRef idx="0">
+        <a:scrgbClr r="0" g="0" b="0"/>
+      </a:effectRef>
+      <a:fontRef idx="minor"/>
+    </dgm:style>
+  </dgm:styleLbl>
+  <dgm:styleLbl name="bgAccFollowNode1">
+    <dgm:scene3d>
+      <a:camera prst="orthographicFront"/>
+      <a:lightRig rig="threePt" dir="t"/>
+    </dgm:scene3d>
+    <dgm:sp3d/>
+    <dgm:txPr/>
+    <dgm:style>
+      <a:lnRef idx="2">
+        <a:scrgbClr r="0" g="0" b="0"/>
+      </a:lnRef>
+      <a:fillRef idx="1">
+        <a:scrgbClr r="0" g="0" b="0"/>
+      </a:fillRef>
+      <a:effectRef idx="0">
+        <a:scrgbClr r="0" g="0" b="0"/>
+      </a:effectRef>
+      <a:fontRef idx="minor"/>
+    </dgm:style>
+  </dgm:styleLbl>
+  <dgm:styleLbl name="fgAcc0">
+    <dgm:scene3d>
+      <a:camera prst="orthographicFront"/>
+      <a:lightRig rig="threePt" dir="t"/>
+    </dgm:scene3d>
+    <dgm:sp3d/>
+    <dgm:txPr/>
+    <dgm:style>
+      <a:lnRef idx="2">
+        <a:scrgbClr r="0" g="0" b="0"/>
+      </a:lnRef>
+      <a:fillRef idx="1">
+        <a:scrgbClr r="0" g="0" b="0"/>
+      </a:fillRef>
+      <a:effectRef idx="0">
+        <a:scrgbClr r="0" g="0" b="0"/>
+      </a:effectRef>
+      <a:fontRef idx="minor"/>
+    </dgm:style>
+  </dgm:styleLbl>
+  <dgm:styleLbl name="fgAcc2">
+    <dgm:scene3d>
+      <a:camera prst="orthographicFront"/>
+      <a:lightRig rig="threePt" dir="t"/>
+    </dgm:scene3d>
+    <dgm:sp3d/>
+    <dgm:txPr/>
+    <dgm:style>
+      <a:lnRef idx="2">
+        <a:scrgbClr r="0" g="0" b="0"/>
+      </a:lnRef>
+      <a:fillRef idx="1">
+        <a:scrgbClr r="0" g="0" b="0"/>
+      </a:fillRef>
+      <a:effectRef idx="0">
+        <a:scrgbClr r="0" g="0" b="0"/>
+      </a:effectRef>
+      <a:fontRef idx="minor"/>
+    </dgm:style>
+  </dgm:styleLbl>
+  <dgm:styleLbl name="fgAcc3">
+    <dgm:scene3d>
+      <a:camera prst="orthographicFront"/>
+      <a:lightRig rig="threePt" dir="t"/>
+    </dgm:scene3d>
+    <dgm:sp3d/>
+    <dgm:txPr/>
+    <dgm:style>
+      <a:lnRef idx="2">
+        <a:scrgbClr r="0" g="0" b="0"/>
+      </a:lnRef>
+      <a:fillRef idx="1">
+        <a:scrgbClr r="0" g="0" b="0"/>
+      </a:fillRef>
+      <a:effectRef idx="0">
+        <a:scrgbClr r="0" g="0" b="0"/>
+      </a:effectRef>
+      <a:fontRef idx="minor"/>
+    </dgm:style>
+  </dgm:styleLbl>
+  <dgm:styleLbl name="fgAcc4">
+    <dgm:scene3d>
+      <a:camera prst="orthographicFront"/>
+      <a:lightRig rig="threePt" dir="t"/>
+    </dgm:scene3d>
+    <dgm:sp3d/>
+    <dgm:txPr/>
+    <dgm:style>
+      <a:lnRef idx="2">
+        <a:scrgbClr r="0" g="0" b="0"/>
+      </a:lnRef>
+      <a:fillRef idx="1">
+        <a:scrgbClr r="0" g="0" b="0"/>
+      </a:fillRef>
+      <a:effectRef idx="0">
+        <a:scrgbClr r="0" g="0" b="0"/>
+      </a:effectRef>
+      <a:fontRef idx="minor"/>
+    </dgm:style>
+  </dgm:styleLbl>
+  <dgm:styleLbl name="bgShp">
+    <dgm:scene3d>
+      <a:camera prst="orthographicFront"/>
+      <a:lightRig rig="threePt" dir="t"/>
+    </dgm:scene3d>
+    <dgm:sp3d/>
+    <dgm:txPr/>
+    <dgm:style>
+      <a:lnRef idx="0">
+        <a:scrgbClr r="0" g="0" b="0"/>
+      </a:lnRef>
+      <a:fillRef idx="1">
+        <a:scrgbClr r="0" g="0" b="0"/>
+      </a:fillRef>
+      <a:effectRef idx="0">
+        <a:scrgbClr r="0" g="0" b="0"/>
+      </a:effectRef>
+      <a:fontRef idx="minor"/>
+    </dgm:style>
+  </dgm:styleLbl>
+  <dgm:styleLbl name="dkBgShp">
+    <dgm:scene3d>
+      <a:camera prst="orthographicFront"/>
+      <a:lightRig rig="threePt" dir="t"/>
+    </dgm:scene3d>
+    <dgm:sp3d/>
+    <dgm:txPr/>
+    <dgm:style>
+      <a:lnRef idx="0">
+        <a:scrgbClr r="0" g="0" b="0"/>
+      </a:lnRef>
+      <a:fillRef idx="1">
+        <a:scrgbClr r="0" g="0" b="0"/>
+      </a:fillRef>
+      <a:effectRef idx="0">
+        <a:scrgbClr r="0" g="0" b="0"/>
+      </a:effectRef>
+      <a:fontRef idx="minor"/>
+    </dgm:style>
+  </dgm:styleLbl>
+  <dgm:styleLbl name="trBgShp">
+    <dgm:scene3d>
+      <a:camera prst="orthographicFront"/>
+      <a:lightRig rig="threePt" dir="t"/>
+    </dgm:scene3d>
+    <dgm:sp3d/>
+    <dgm:txPr/>
+    <dgm:style>
+      <a:lnRef idx="0">
+        <a:scrgbClr r="0" g="0" b="0"/>
+      </a:lnRef>
+      <a:fillRef idx="1">
+        <a:scrgbClr r="0" g="0" b="0"/>
+      </a:fillRef>
+      <a:effectRef idx="0">
+        <a:scrgbClr r="0" g="0" b="0"/>
+      </a:effectRef>
+      <a:fontRef idx="minor"/>
+    </dgm:style>
+  </dgm:styleLbl>
+  <dgm:styleLbl name="fgShp">
+    <dgm:scene3d>
+      <a:camera prst="orthographicFront"/>
+      <a:lightRig rig="threePt" dir="t"/>
+    </dgm:scene3d>
+    <dgm:sp3d/>
+    <dgm:txPr/>
+    <dgm:style>
+      <a:lnRef idx="2">
+        <a:scrgbClr r="0" g="0" b="0"/>
+      </a:lnRef>
+      <a:fillRef idx="1">
+        <a:scrgbClr r="0" g="0" b="0"/>
+      </a:fillRef>
+      <a:effectRef idx="0">
+        <a:scrgbClr r="0" g="0" b="0"/>
+      </a:effectRef>
+      <a:fontRef idx="minor"/>
+    </dgm:style>
+  </dgm:styleLbl>
+  <dgm:styleLbl name="revTx">
+    <dgm:scene3d>
+      <a:camera prst="orthographicFront"/>
+      <a:lightRig rig="threePt" dir="t"/>
+    </dgm:scene3d>
+    <dgm:sp3d/>
+    <dgm:txPr/>
+    <dgm:style>
+      <a:lnRef idx="0">
+        <a:scrgbClr r="0" g="0" b="0"/>
+      </a:lnRef>
+      <a:fillRef idx="0">
+        <a:scrgbClr r="0" g="0" b="0"/>
+      </a:fillRef>
+      <a:effectRef idx="0">
+        <a:scrgbClr r="0" g="0" b="0"/>
+      </a:effectRef>
+      <a:fontRef idx="minor"/>
+    </dgm:style>
+  </dgm:styleLbl>
+</dgm:styleDef>
 </file>
 
 <file path=ppt/slideLayouts/slideLayout1.xml><?xml version="1.0" encoding="utf-8"?>
@@ -259,7 +6956,7 @@
           <a:p>
             <a:fld id="{B3191E36-DE35-43E6-928F-4F0F238BF226}" type="datetimeFigureOut">
               <a:rPr kumimoji="1" lang="ja-JP" altLang="en-US" smtClean="0"/>
-              <a:t>2026/10/7</a:t>
+              <a:t>2026/10/22</a:t>
             </a:fld>
             <a:endParaRPr kumimoji="1" lang="ja-JP" altLang="en-US"/>
           </a:p>
@@ -489,7 +7186,7 @@
           <a:p>
             <a:fld id="{B3191E36-DE35-43E6-928F-4F0F238BF226}" type="datetimeFigureOut">
               <a:rPr kumimoji="1" lang="ja-JP" altLang="en-US" smtClean="0"/>
-              <a:t>2026/10/7</a:t>
+              <a:t>2026/10/22</a:t>
             </a:fld>
             <a:endParaRPr kumimoji="1" lang="ja-JP" altLang="en-US"/>
           </a:p>
@@ -729,7 +7426,7 @@
           <a:p>
             <a:fld id="{B3191E36-DE35-43E6-928F-4F0F238BF226}" type="datetimeFigureOut">
               <a:rPr kumimoji="1" lang="ja-JP" altLang="en-US" smtClean="0"/>
-              <a:t>2026/10/7</a:t>
+              <a:t>2026/10/22</a:t>
             </a:fld>
             <a:endParaRPr kumimoji="1" lang="ja-JP" altLang="en-US"/>
           </a:p>
@@ -959,7 +7656,7 @@
           <a:p>
             <a:fld id="{B3191E36-DE35-43E6-928F-4F0F238BF226}" type="datetimeFigureOut">
               <a:rPr kumimoji="1" lang="ja-JP" altLang="en-US" smtClean="0"/>
-              <a:t>2026/10/7</a:t>
+              <a:t>2026/10/22</a:t>
             </a:fld>
             <a:endParaRPr kumimoji="1" lang="ja-JP" altLang="en-US"/>
           </a:p>
@@ -1234,7 +7931,7 @@
           <a:p>
             <a:fld id="{B3191E36-DE35-43E6-928F-4F0F238BF226}" type="datetimeFigureOut">
               <a:rPr kumimoji="1" lang="ja-JP" altLang="en-US" smtClean="0"/>
-              <a:t>2026/10/7</a:t>
+              <a:t>2026/10/22</a:t>
             </a:fld>
             <a:endParaRPr kumimoji="1" lang="ja-JP" altLang="en-US"/>
           </a:p>
@@ -1563,7 +8260,7 @@
           <a:p>
             <a:fld id="{B3191E36-DE35-43E6-928F-4F0F238BF226}" type="datetimeFigureOut">
               <a:rPr kumimoji="1" lang="ja-JP" altLang="en-US" smtClean="0"/>
-              <a:t>2026/10/7</a:t>
+              <a:t>2026/10/22</a:t>
             </a:fld>
             <a:endParaRPr kumimoji="1" lang="ja-JP" altLang="en-US"/>
           </a:p>
@@ -2039,7 +8736,7 @@
           <a:p>
             <a:fld id="{B3191E36-DE35-43E6-928F-4F0F238BF226}" type="datetimeFigureOut">
               <a:rPr kumimoji="1" lang="ja-JP" altLang="en-US" smtClean="0"/>
-              <a:t>2026/10/7</a:t>
+              <a:t>2026/10/22</a:t>
             </a:fld>
             <a:endParaRPr kumimoji="1" lang="ja-JP" altLang="en-US"/>
           </a:p>
@@ -2180,7 +8877,7 @@
           <a:p>
             <a:fld id="{B3191E36-DE35-43E6-928F-4F0F238BF226}" type="datetimeFigureOut">
               <a:rPr kumimoji="1" lang="ja-JP" altLang="en-US" smtClean="0"/>
-              <a:t>2026/10/7</a:t>
+              <a:t>2026/10/22</a:t>
             </a:fld>
             <a:endParaRPr kumimoji="1" lang="ja-JP" altLang="en-US"/>
           </a:p>
@@ -2293,7 +8990,7 @@
           <a:p>
             <a:fld id="{B3191E36-DE35-43E6-928F-4F0F238BF226}" type="datetimeFigureOut">
               <a:rPr kumimoji="1" lang="ja-JP" altLang="en-US" smtClean="0"/>
-              <a:t>2026/10/7</a:t>
+              <a:t>2026/10/22</a:t>
             </a:fld>
             <a:endParaRPr kumimoji="1" lang="ja-JP" altLang="en-US"/>
           </a:p>
@@ -2636,7 +9333,7 @@
           <a:p>
             <a:fld id="{B3191E36-DE35-43E6-928F-4F0F238BF226}" type="datetimeFigureOut">
               <a:rPr kumimoji="1" lang="ja-JP" altLang="en-US" smtClean="0"/>
-              <a:t>2026/10/7</a:t>
+              <a:t>2026/10/22</a:t>
             </a:fld>
             <a:endParaRPr kumimoji="1" lang="ja-JP" altLang="en-US"/>
           </a:p>
@@ -2924,7 +9621,7 @@
           <a:p>
             <a:fld id="{B3191E36-DE35-43E6-928F-4F0F238BF226}" type="datetimeFigureOut">
               <a:rPr kumimoji="1" lang="ja-JP" altLang="en-US" smtClean="0"/>
-              <a:t>2026/10/7</a:t>
+              <a:t>2026/10/22</a:t>
             </a:fld>
             <a:endParaRPr kumimoji="1" lang="ja-JP" altLang="en-US"/>
           </a:p>
@@ -3197,7 +9894,7 @@
           <a:p>
             <a:fld id="{B3191E36-DE35-43E6-928F-4F0F238BF226}" type="datetimeFigureOut">
               <a:rPr kumimoji="1" lang="ja-JP" altLang="en-US" smtClean="0"/>
-              <a:t>2026/10/7</a:t>
+              <a:t>2026/10/22</a:t>
             </a:fld>
             <a:endParaRPr kumimoji="1" lang="ja-JP" altLang="en-US"/>
           </a:p>
@@ -3636,8 +10333,12 @@
           <a:lstStyle/>
           <a:p>
             <a:r>
+              <a:rPr lang="en-US" altLang="ja-JP" dirty="0"/>
+              <a:t>41</a:t>
+            </a:r>
+            <a:r>
               <a:rPr kumimoji="1" lang="en-US" altLang="ja-JP" dirty="0"/>
-              <a:t>36-40</a:t>
+              <a:t>-45</a:t>
             </a:r>
             <a:endParaRPr kumimoji="1" lang="ja-JP" altLang="en-US" dirty="0"/>
           </a:p>
@@ -3730,10 +10431,13 @@
               <a:t>問</a:t>
             </a:r>
             <a:r>
-              <a:rPr lang="en-US" altLang="ja-JP" dirty="0"/>
-              <a:t>36</a:t>
-            </a:r>
-            <a:endParaRPr kumimoji="1" lang="ja-JP" altLang="en-US" dirty="0"/>
+              <a:rPr kumimoji="1" lang="en-US" altLang="ja-JP" dirty="0"/>
+              <a:t>41: </a:t>
+            </a:r>
+            <a:r>
+              <a:rPr kumimoji="1" lang="ja-JP" altLang="en-US" dirty="0"/>
+              <a:t>クイックソート</a:t>
+            </a:r>
           </a:p>
         </p:txBody>
       </p:sp>
@@ -3766,8 +10470,13 @@
             </a:r>
             <a:r>
               <a:rPr kumimoji="1" lang="en-US" altLang="ja-JP" dirty="0"/>
-              <a:t>:</a:t>
-            </a:r>
+              <a:t>: </a:t>
+            </a:r>
+            <a:r>
+              <a:rPr kumimoji="1" lang="ja-JP" altLang="en-US" dirty="0"/>
+              <a:t>配列をクイックソートのアルゴリズムで昇順に整列</a:t>
+            </a:r>
+            <a:endParaRPr kumimoji="1" lang="en-US" altLang="ja-JP" dirty="0"/>
           </a:p>
           <a:p>
             <a:r>
@@ -3780,22 +10489,54 @@
             <a:pPr lvl="1"/>
             <a:r>
               <a:rPr lang="en-US" altLang="ja-JP" dirty="0"/>
-              <a:t>x:</a:t>
-            </a:r>
+              <a:t>pivot: </a:t>
+            </a:r>
+            <a:r>
+              <a:rPr lang="ja-JP" altLang="en-US"/>
+              <a:t>ピボット</a:t>
+            </a:r>
+            <a:r>
+              <a:rPr lang="en-US" altLang="ja-JP"/>
+              <a:t>, </a:t>
+            </a:r>
+            <a:r>
+              <a:rPr lang="en-US" altLang="ja-JP" dirty="0"/>
+              <a:t>i: </a:t>
+            </a:r>
+            <a:r>
+              <a:rPr lang="ja-JP" altLang="en-US" dirty="0"/>
+              <a:t>左マーカー</a:t>
+            </a:r>
+            <a:r>
+              <a:rPr lang="en-US" altLang="ja-JP" dirty="0"/>
+              <a:t>, j: </a:t>
+            </a:r>
+            <a:r>
+              <a:rPr lang="ja-JP" altLang="en-US" dirty="0"/>
+              <a:t>右マーカー</a:t>
+            </a:r>
+            <a:endParaRPr lang="en-US" altLang="ja-JP" dirty="0"/>
           </a:p>
           <a:p>
             <a:r>
               <a:rPr lang="ja-JP" altLang="en-US" dirty="0"/>
               <a:t>ポイント</a:t>
             </a:r>
+            <a:r>
+              <a:rPr lang="en-US" altLang="ja-JP" dirty="0"/>
+              <a:t>: </a:t>
+            </a:r>
+            <a:r>
+              <a:rPr lang="ja-JP" altLang="en-US" dirty="0"/>
+              <a:t>トレース</a:t>
+            </a:r>
             <a:endParaRPr lang="en-US" altLang="ja-JP" dirty="0"/>
           </a:p>
           <a:p>
-            <a:pPr lvl="1"/>
-            <a:r>
-              <a:rPr lang="en-US" altLang="ja-JP" dirty="0"/>
-              <a:t>point</a:t>
-            </a:r>
+            <a:pPr marL="457200" lvl="1" indent="0">
+              <a:buNone/>
+            </a:pPr>
+            <a:endParaRPr lang="en-US" altLang="ja-JP" dirty="0"/>
           </a:p>
           <a:p>
             <a:pPr lvl="1"/>
@@ -3810,6 +10551,36 @@
           </a:p>
         </p:txBody>
       </p:sp>
+      <p:pic>
+        <p:nvPicPr>
+          <p:cNvPr id="4" name="図 3">
+            <a:extLst>
+              <a:ext uri="{FF2B5EF4-FFF2-40B4-BE49-F238E27FC236}">
+                <a16:creationId xmlns:a16="http://schemas.microsoft.com/office/drawing/2014/main" id="{B42B7152-BB34-3636-B5F6-CA9A6E10BD1C}"/>
+              </a:ext>
+            </a:extLst>
+          </p:cNvPr>
+          <p:cNvPicPr>
+            <a:picLocks noChangeAspect="1"/>
+          </p:cNvPicPr>
+          <p:nvPr/>
+        </p:nvPicPr>
+        <p:blipFill>
+          <a:blip r:embed="rId2"/>
+          <a:stretch>
+            <a:fillRect/>
+          </a:stretch>
+        </p:blipFill>
+        <p:spPr>
+          <a:xfrm>
+            <a:off x="1304925" y="3768498"/>
+            <a:ext cx="9582150" cy="2162175"/>
+          </a:xfrm>
+          <a:prstGeom prst="rect">
+            <a:avLst/>
+          </a:prstGeom>
+        </p:spPr>
+      </p:pic>
     </p:spTree>
     <p:extLst>
       <p:ext uri="{BB962C8B-B14F-4D97-AF65-F5344CB8AC3E}">
@@ -3872,10 +10643,21 @@
               <a:t>問</a:t>
             </a:r>
             <a:r>
-              <a:rPr lang="en-US" altLang="ja-JP" dirty="0"/>
-              <a:t>37</a:t>
-            </a:r>
-            <a:endParaRPr kumimoji="1" lang="ja-JP" altLang="en-US" dirty="0"/>
+              <a:rPr kumimoji="1" lang="en-US" altLang="ja-JP" dirty="0"/>
+              <a:t>42: </a:t>
+            </a:r>
+            <a:r>
+              <a:rPr kumimoji="1" lang="ja-JP" altLang="en-US" dirty="0"/>
+              <a:t>マージソート</a:t>
+            </a:r>
+            <a:r>
+              <a:rPr kumimoji="1" lang="en-US" altLang="ja-JP" dirty="0"/>
+              <a:t>(</a:t>
+            </a:r>
+            <a:r>
+              <a:rPr kumimoji="1" lang="ja-JP" altLang="en-US" dirty="0"/>
+              <a:t>の一部）</a:t>
+            </a:r>
           </a:p>
         </p:txBody>
       </p:sp>
@@ -3908,8 +10690,13 @@
             </a:r>
             <a:r>
               <a:rPr kumimoji="1" lang="en-US" altLang="ja-JP" dirty="0"/>
-              <a:t>:</a:t>
-            </a:r>
+              <a:t>: </a:t>
+            </a:r>
+            <a:r>
+              <a:rPr kumimoji="1" lang="ja-JP" altLang="en-US" dirty="0"/>
+              <a:t>二つの配列を整列させながらマージする</a:t>
+            </a:r>
+            <a:endParaRPr kumimoji="1" lang="en-US" altLang="ja-JP" dirty="0"/>
           </a:p>
           <a:p>
             <a:r>
@@ -3922,7 +10709,39 @@
             <a:pPr lvl="1"/>
             <a:r>
               <a:rPr lang="en-US" altLang="ja-JP" dirty="0"/>
-              <a:t>x:</a:t>
+              <a:t>work:</a:t>
+            </a:r>
+            <a:r>
+              <a:rPr lang="ja-JP" altLang="en-US" dirty="0"/>
+              <a:t>整列マージされた配列</a:t>
+            </a:r>
+            <a:r>
+              <a:rPr lang="en-US" altLang="ja-JP" dirty="0"/>
+              <a:t>, i: data1</a:t>
+            </a:r>
+            <a:r>
+              <a:rPr lang="ja-JP" altLang="en-US" dirty="0"/>
+              <a:t>の</a:t>
+            </a:r>
+            <a:r>
+              <a:rPr lang="en-US" altLang="ja-JP" dirty="0"/>
+              <a:t>index, j: data2</a:t>
+            </a:r>
+            <a:r>
+              <a:rPr lang="ja-JP" altLang="en-US" dirty="0"/>
+              <a:t>の</a:t>
+            </a:r>
+            <a:r>
+              <a:rPr lang="en-US" altLang="ja-JP" dirty="0"/>
+              <a:t>index, k: work</a:t>
+            </a:r>
+            <a:r>
+              <a:rPr lang="ja-JP" altLang="en-US" dirty="0"/>
+              <a:t>の</a:t>
+            </a:r>
+            <a:r>
+              <a:rPr lang="en-US" altLang="ja-JP" dirty="0"/>
+              <a:t>index</a:t>
             </a:r>
           </a:p>
           <a:p>
@@ -3933,11 +10752,10 @@
             <a:endParaRPr lang="en-US" altLang="ja-JP" dirty="0"/>
           </a:p>
           <a:p>
-            <a:pPr lvl="1"/>
-            <a:r>
-              <a:rPr lang="en-US" altLang="ja-JP" dirty="0"/>
-              <a:t>point</a:t>
-            </a:r>
+            <a:pPr marL="457200" lvl="1" indent="0">
+              <a:buNone/>
+            </a:pPr>
+            <a:endParaRPr lang="en-US" altLang="ja-JP" dirty="0"/>
           </a:p>
           <a:p>
             <a:pPr lvl="1"/>
@@ -3945,6 +10763,36 @@
           </a:p>
         </p:txBody>
       </p:sp>
+      <p:pic>
+        <p:nvPicPr>
+          <p:cNvPr id="5" name="図 4">
+            <a:extLst>
+              <a:ext uri="{FF2B5EF4-FFF2-40B4-BE49-F238E27FC236}">
+                <a16:creationId xmlns:a16="http://schemas.microsoft.com/office/drawing/2014/main" id="{86C59EDB-BD4A-81EC-4B40-60883D6CE599}"/>
+              </a:ext>
+            </a:extLst>
+          </p:cNvPr>
+          <p:cNvPicPr>
+            <a:picLocks noChangeAspect="1"/>
+          </p:cNvPicPr>
+          <p:nvPr/>
+        </p:nvPicPr>
+        <p:blipFill>
+          <a:blip r:embed="rId2"/>
+          <a:stretch>
+            <a:fillRect/>
+          </a:stretch>
+        </p:blipFill>
+        <p:spPr>
+          <a:xfrm>
+            <a:off x="1753279" y="4014788"/>
+            <a:ext cx="5762625" cy="2162175"/>
+          </a:xfrm>
+          <a:prstGeom prst="rect">
+            <a:avLst/>
+          </a:prstGeom>
+        </p:spPr>
+      </p:pic>
     </p:spTree>
     <p:extLst>
       <p:ext uri="{BB962C8B-B14F-4D97-AF65-F5344CB8AC3E}">
@@ -4007,10 +10855,13 @@
               <a:t>問</a:t>
             </a:r>
             <a:r>
-              <a:rPr lang="en-US" altLang="ja-JP" dirty="0"/>
-              <a:t>38</a:t>
-            </a:r>
-            <a:endParaRPr kumimoji="1" lang="ja-JP" altLang="en-US" dirty="0"/>
+              <a:rPr kumimoji="1" lang="en-US" altLang="ja-JP" dirty="0"/>
+              <a:t>43: </a:t>
+            </a:r>
+            <a:r>
+              <a:rPr kumimoji="1" lang="ja-JP" altLang="en-US" dirty="0"/>
+              <a:t>スタックを配列で実現する</a:t>
+            </a:r>
           </a:p>
         </p:txBody>
       </p:sp>
@@ -4043,8 +10894,21 @@
             </a:r>
             <a:r>
               <a:rPr kumimoji="1" lang="en-US" altLang="ja-JP" dirty="0"/>
-              <a:t>:</a:t>
-            </a:r>
+              <a:t>: </a:t>
+            </a:r>
+            <a:r>
+              <a:rPr kumimoji="1" lang="ja-JP" altLang="en-US" dirty="0"/>
+              <a:t>スタックに対して</a:t>
+            </a:r>
+            <a:r>
+              <a:rPr kumimoji="1" lang="en-US" altLang="ja-JP" dirty="0"/>
+              <a:t>push/pop</a:t>
+            </a:r>
+            <a:r>
+              <a:rPr kumimoji="1" lang="ja-JP" altLang="en-US" dirty="0"/>
+              <a:t>する関数</a:t>
+            </a:r>
+            <a:endParaRPr kumimoji="1" lang="en-US" altLang="ja-JP" dirty="0"/>
           </a:p>
           <a:p>
             <a:r>
@@ -4055,10 +10919,7 @@
           </a:p>
           <a:p>
             <a:pPr lvl="1"/>
-            <a:r>
-              <a:rPr lang="en-US" altLang="ja-JP" dirty="0"/>
-              <a:t>x:</a:t>
-            </a:r>
+            <a:endParaRPr lang="en-US" altLang="ja-JP" dirty="0"/>
           </a:p>
           <a:p>
             <a:r>
@@ -4071,8 +10932,49 @@
             <a:pPr lvl="1"/>
             <a:r>
               <a:rPr lang="en-US" altLang="ja-JP" dirty="0"/>
-              <a:t>point</a:t>
-            </a:r>
+              <a:t>push</a:t>
+            </a:r>
+            <a:r>
+              <a:rPr lang="ja-JP" altLang="en-US" dirty="0"/>
+              <a:t>は</a:t>
+            </a:r>
+            <a:r>
+              <a:rPr lang="en-US" altLang="ja-JP" dirty="0" err="1"/>
+              <a:t>stackPos</a:t>
+            </a:r>
+            <a:r>
+              <a:rPr lang="ja-JP" altLang="en-US" dirty="0"/>
+              <a:t>に入力値を入れて、</a:t>
+            </a:r>
+            <a:r>
+              <a:rPr lang="en-US" altLang="ja-JP" dirty="0" err="1"/>
+              <a:t>stackPos</a:t>
+            </a:r>
+            <a:r>
+              <a:rPr lang="ja-JP" altLang="en-US" dirty="0"/>
+              <a:t>を一つ進める</a:t>
+            </a:r>
+            <a:endParaRPr lang="en-US" altLang="ja-JP" dirty="0"/>
+          </a:p>
+          <a:p>
+            <a:pPr lvl="1"/>
+            <a:r>
+              <a:rPr lang="en-US" altLang="ja-JP" dirty="0"/>
+              <a:t>pop</a:t>
+            </a:r>
+            <a:r>
+              <a:rPr lang="ja-JP" altLang="en-US" dirty="0"/>
+              <a:t>は</a:t>
+            </a:r>
+            <a:r>
+              <a:rPr lang="en-US" altLang="ja-JP" dirty="0" err="1"/>
+              <a:t>stackPos</a:t>
+            </a:r>
+            <a:r>
+              <a:rPr lang="ja-JP" altLang="en-US" dirty="0"/>
+              <a:t>を一つ戻して、それが指す値を返す</a:t>
+            </a:r>
+            <a:endParaRPr lang="en-US" altLang="ja-JP" dirty="0"/>
           </a:p>
           <a:p>
             <a:pPr lvl="1"/>
@@ -4149,8 +11051,24 @@
               <a:t>問</a:t>
             </a:r>
             <a:r>
-              <a:rPr lang="en-US" altLang="ja-JP" dirty="0"/>
-              <a:t>39</a:t>
+              <a:rPr kumimoji="1" lang="en-US" altLang="ja-JP" dirty="0"/>
+              <a:t>44: </a:t>
+            </a:r>
+            <a:r>
+              <a:rPr kumimoji="1" lang="ja-JP" altLang="en-US" dirty="0"/>
+              <a:t>キュー</a:t>
+            </a:r>
+            <a:r>
+              <a:rPr kumimoji="1" lang="en-US" altLang="ja-JP" dirty="0"/>
+              <a:t>(</a:t>
+            </a:r>
+            <a:r>
+              <a:rPr kumimoji="1" lang="ja-JP" altLang="en-US" dirty="0"/>
+              <a:t>配列を循環して使用</a:t>
+            </a:r>
+            <a:r>
+              <a:rPr kumimoji="1" lang="en-US" altLang="ja-JP" dirty="0"/>
+              <a:t>)</a:t>
             </a:r>
             <a:endParaRPr kumimoji="1" lang="ja-JP" altLang="en-US" dirty="0"/>
           </a:p>
@@ -4187,20 +11105,11 @@
               <a:rPr kumimoji="1" lang="en-US" altLang="ja-JP" dirty="0"/>
               <a:t>:</a:t>
             </a:r>
-          </a:p>
-          <a:p>
-            <a:r>
-              <a:rPr lang="ja-JP" altLang="en-US" dirty="0"/>
-              <a:t>変数</a:t>
-            </a:r>
-            <a:endParaRPr lang="en-US" altLang="ja-JP" dirty="0"/>
-          </a:p>
-          <a:p>
-            <a:pPr lvl="1"/>
-            <a:r>
-              <a:rPr lang="en-US" altLang="ja-JP" dirty="0"/>
-              <a:t>x:</a:t>
-            </a:r>
+            <a:r>
+              <a:rPr kumimoji="1" lang="ja-JP" altLang="en-US" dirty="0"/>
+              <a:t>キューの操作</a:t>
+            </a:r>
+            <a:endParaRPr kumimoji="1" lang="en-US" altLang="ja-JP" dirty="0"/>
           </a:p>
           <a:p>
             <a:r>
@@ -4212,13 +11121,162 @@
           <a:p>
             <a:pPr lvl="1"/>
             <a:r>
+              <a:rPr lang="ja-JP" altLang="en-US" dirty="0"/>
+              <a:t>配列を循環して使用するため、</a:t>
+            </a:r>
+            <a:r>
               <a:rPr lang="en-US" altLang="ja-JP" dirty="0"/>
-              <a:t>point</a:t>
-            </a:r>
+              <a:t>head</a:t>
+            </a:r>
+            <a:r>
+              <a:rPr lang="ja-JP" altLang="en-US" dirty="0"/>
+              <a:t>を一つ進めて、それが配列からはみ出た場合は、配列の先頭に</a:t>
+            </a:r>
+            <a:r>
+              <a:rPr lang="en-US" altLang="ja-JP" dirty="0"/>
+              <a:t>head</a:t>
+            </a:r>
+            <a:r>
+              <a:rPr lang="ja-JP" altLang="en-US" dirty="0"/>
+              <a:t>を置く（つまり、配列の先頭を次にデータを入れる場所とする）</a:t>
+            </a:r>
+            <a:endParaRPr lang="en-US" altLang="ja-JP" dirty="0"/>
           </a:p>
           <a:p>
             <a:pPr lvl="1"/>
             <a:endParaRPr lang="en-US" altLang="ja-JP" dirty="0"/>
+          </a:p>
+        </p:txBody>
+      </p:sp>
+      <p:graphicFrame>
+        <p:nvGraphicFramePr>
+          <p:cNvPr id="4" name="図表 3">
+            <a:extLst>
+              <a:ext uri="{FF2B5EF4-FFF2-40B4-BE49-F238E27FC236}">
+                <a16:creationId xmlns:a16="http://schemas.microsoft.com/office/drawing/2014/main" id="{6AEE0CE6-FC05-CD0A-38C7-27F9B69A46F4}"/>
+              </a:ext>
+            </a:extLst>
+          </p:cNvPr>
+          <p:cNvGraphicFramePr/>
+          <p:nvPr>
+            <p:extLst>
+              <p:ext uri="{D42A27DB-BD31-4B8C-83A1-F6EECF244321}">
+                <p14:modId xmlns:p14="http://schemas.microsoft.com/office/powerpoint/2010/main" val="4208309046"/>
+              </p:ext>
+            </p:extLst>
+          </p:nvPr>
+        </p:nvGraphicFramePr>
+        <p:xfrm>
+          <a:off x="3654425" y="3990144"/>
+          <a:ext cx="4883150" cy="2186819"/>
+        </p:xfrm>
+        <a:graphic>
+          <a:graphicData uri="http://schemas.openxmlformats.org/drawingml/2006/diagram">
+            <dgm:relIds xmlns:dgm="http://schemas.openxmlformats.org/drawingml/2006/diagram" xmlns:r="http://schemas.openxmlformats.org/officeDocument/2006/relationships" r:dm="rId2" r:lo="rId3" r:qs="rId4" r:cs="rId5"/>
+          </a:graphicData>
+        </a:graphic>
+      </p:graphicFrame>
+      <p:sp>
+        <p:nvSpPr>
+          <p:cNvPr id="5" name="吹き出し: 四角形 4">
+            <a:extLst>
+              <a:ext uri="{FF2B5EF4-FFF2-40B4-BE49-F238E27FC236}">
+                <a16:creationId xmlns:a16="http://schemas.microsoft.com/office/drawing/2014/main" id="{AD7D4309-9046-FA59-05E9-AAD83D9462C1}"/>
+              </a:ext>
+            </a:extLst>
+          </p:cNvPr>
+          <p:cNvSpPr/>
+          <p:nvPr/>
+        </p:nvSpPr>
+        <p:spPr>
+          <a:xfrm>
+            <a:off x="955221" y="4497065"/>
+            <a:ext cx="1404257" cy="668677"/>
+          </a:xfrm>
+          <a:prstGeom prst="wedgeRectCallout">
+            <a:avLst>
+              <a:gd name="adj1" fmla="val 250678"/>
+              <a:gd name="adj2" fmla="val -64905"/>
+            </a:avLst>
+          </a:prstGeom>
+        </p:spPr>
+        <p:style>
+          <a:lnRef idx="2">
+            <a:schemeClr val="dk1"/>
+          </a:lnRef>
+          <a:fillRef idx="1">
+            <a:schemeClr val="lt1"/>
+          </a:fillRef>
+          <a:effectRef idx="0">
+            <a:schemeClr val="dk1"/>
+          </a:effectRef>
+          <a:fontRef idx="minor">
+            <a:schemeClr val="dk1"/>
+          </a:fontRef>
+        </p:style>
+        <p:txBody>
+          <a:bodyPr rtlCol="0" anchor="ctr"/>
+          <a:lstStyle/>
+          <a:p>
+            <a:pPr algn="ctr"/>
+            <a:r>
+              <a:rPr kumimoji="1" lang="en-US" altLang="ja-JP" dirty="0"/>
+              <a:t>head</a:t>
+            </a:r>
+            <a:r>
+              <a:rPr kumimoji="1" lang="ja-JP" altLang="en-US" dirty="0"/>
+              <a:t>がここだったら、</a:t>
+            </a:r>
+          </a:p>
+        </p:txBody>
+      </p:sp>
+      <p:sp>
+        <p:nvSpPr>
+          <p:cNvPr id="7" name="吹き出し: 四角形 6">
+            <a:extLst>
+              <a:ext uri="{FF2B5EF4-FFF2-40B4-BE49-F238E27FC236}">
+                <a16:creationId xmlns:a16="http://schemas.microsoft.com/office/drawing/2014/main" id="{02DC29F5-0C5F-578B-EF45-0383E2CE515D}"/>
+              </a:ext>
+            </a:extLst>
+          </p:cNvPr>
+          <p:cNvSpPr/>
+          <p:nvPr/>
+        </p:nvSpPr>
+        <p:spPr>
+          <a:xfrm>
+            <a:off x="2862489" y="3855207"/>
+            <a:ext cx="1404257" cy="668677"/>
+          </a:xfrm>
+          <a:prstGeom prst="wedgeRectCallout">
+            <a:avLst>
+              <a:gd name="adj1" fmla="val 157074"/>
+              <a:gd name="adj2" fmla="val -17287"/>
+            </a:avLst>
+          </a:prstGeom>
+        </p:spPr>
+        <p:style>
+          <a:lnRef idx="2">
+            <a:schemeClr val="dk1"/>
+          </a:lnRef>
+          <a:fillRef idx="1">
+            <a:schemeClr val="lt1"/>
+          </a:fillRef>
+          <a:effectRef idx="0">
+            <a:schemeClr val="dk1"/>
+          </a:effectRef>
+          <a:fontRef idx="minor">
+            <a:schemeClr val="dk1"/>
+          </a:fontRef>
+        </p:style>
+        <p:txBody>
+          <a:bodyPr rtlCol="0" anchor="ctr"/>
+          <a:lstStyle/>
+          <a:p>
+            <a:pPr algn="ctr"/>
+            <a:r>
+              <a:rPr kumimoji="1" lang="ja-JP" altLang="en-US" dirty="0"/>
+              <a:t>次はここに移動</a:t>
+            </a:r>
           </a:p>
         </p:txBody>
       </p:sp>
@@ -4285,7 +11343,23 @@
             </a:r>
             <a:r>
               <a:rPr kumimoji="1" lang="en-US" altLang="ja-JP" dirty="0"/>
-              <a:t>40</a:t>
+              <a:t>45: </a:t>
+            </a:r>
+            <a:r>
+              <a:rPr kumimoji="1" lang="ja-JP" altLang="en-US" dirty="0"/>
+              <a:t>連結リスト</a:t>
+            </a:r>
+            <a:r>
+              <a:rPr kumimoji="1" lang="en-US" altLang="ja-JP" dirty="0"/>
+              <a:t>(</a:t>
+            </a:r>
+            <a:r>
+              <a:rPr kumimoji="1" lang="ja-JP" altLang="en-US" dirty="0"/>
+              <a:t>単方向</a:t>
+            </a:r>
+            <a:r>
+              <a:rPr kumimoji="1" lang="en-US" altLang="ja-JP" dirty="0"/>
+              <a:t>)</a:t>
             </a:r>
             <a:endParaRPr kumimoji="1" lang="ja-JP" altLang="en-US" dirty="0"/>
           </a:p>
@@ -4320,22 +11394,17 @@
             </a:r>
             <a:r>
               <a:rPr kumimoji="1" lang="en-US" altLang="ja-JP" dirty="0"/>
-              <a:t>:</a:t>
-            </a:r>
-          </a:p>
-          <a:p>
+              <a:t>: </a:t>
+            </a:r>
+            <a:r>
+              <a:rPr lang="en-US" altLang="ja-JP" dirty="0" err="1"/>
+              <a:t>ListElement</a:t>
+            </a:r>
             <a:r>
               <a:rPr lang="ja-JP" altLang="en-US" dirty="0"/>
-              <a:t>変数</a:t>
-            </a:r>
-            <a:endParaRPr lang="en-US" altLang="ja-JP" dirty="0"/>
-          </a:p>
-          <a:p>
-            <a:pPr lvl="1"/>
-            <a:r>
-              <a:rPr lang="en-US" altLang="ja-JP" dirty="0"/>
-              <a:t>x:</a:t>
-            </a:r>
+              <a:t>クラスを用い単方向リストを実現</a:t>
+            </a:r>
+            <a:endParaRPr kumimoji="1" lang="en-US" altLang="ja-JP" dirty="0"/>
           </a:p>
           <a:p>
             <a:r>
@@ -4348,8 +11417,84 @@
             <a:pPr lvl="1"/>
             <a:r>
               <a:rPr lang="en-US" altLang="ja-JP" dirty="0"/>
-              <a:t>point</a:t>
-            </a:r>
+              <a:t>[a]</a:t>
+            </a:r>
+            <a:r>
+              <a:rPr lang="ja-JP" altLang="en-US" dirty="0"/>
+              <a:t>は、そのあと</a:t>
+            </a:r>
+            <a:r>
+              <a:rPr lang="en-US" altLang="ja-JP" dirty="0"/>
+              <a:t>append</a:t>
+            </a:r>
+            <a:r>
+              <a:rPr lang="ja-JP" altLang="en-US" dirty="0"/>
+              <a:t>した要素を先頭にしているので、「リストが空であったとき」を表しているとわかる</a:t>
+            </a:r>
+            <a:r>
+              <a:rPr lang="en-US" altLang="ja-JP" dirty="0"/>
+              <a:t>(</a:t>
+            </a:r>
+            <a:r>
+              <a:rPr lang="ja-JP" altLang="en-US" dirty="0"/>
+              <a:t>つまり</a:t>
+            </a:r>
+            <a:r>
+              <a:rPr lang="en-US" altLang="ja-JP" dirty="0" err="1"/>
+              <a:t>ListHead</a:t>
+            </a:r>
+            <a:r>
+              <a:rPr lang="ja-JP" altLang="en-US" dirty="0"/>
+              <a:t>未定義</a:t>
+            </a:r>
+            <a:r>
+              <a:rPr lang="en-US" altLang="ja-JP" dirty="0"/>
+              <a:t>)</a:t>
+            </a:r>
+          </a:p>
+          <a:p>
+            <a:pPr lvl="1"/>
+            <a:r>
+              <a:rPr lang="en-US" altLang="ja-JP" dirty="0"/>
+              <a:t>[b]</a:t>
+            </a:r>
+            <a:r>
+              <a:rPr lang="ja-JP" altLang="en-US" dirty="0"/>
+              <a:t>は、</a:t>
+            </a:r>
+            <a:r>
+              <a:rPr lang="en-US" altLang="ja-JP" dirty="0" err="1"/>
+              <a:t>listHead</a:t>
+            </a:r>
+            <a:r>
+              <a:rPr lang="ja-JP" altLang="en-US" dirty="0"/>
+              <a:t>からリストの最後までたどる</a:t>
+            </a:r>
+            <a:r>
+              <a:rPr lang="en-US" altLang="ja-JP" dirty="0"/>
+              <a:t>while</a:t>
+            </a:r>
+            <a:r>
+              <a:rPr lang="ja-JP" altLang="en-US" dirty="0"/>
+              <a:t>ループのあとに行われている処理なので、</a:t>
+            </a:r>
+            <a:r>
+              <a:rPr lang="en-US" altLang="ja-JP" dirty="0"/>
+              <a:t>append</a:t>
+            </a:r>
+            <a:r>
+              <a:rPr lang="ja-JP" altLang="en-US" dirty="0"/>
+              <a:t>した要素の参照を、前の要素の</a:t>
+            </a:r>
+            <a:r>
+              <a:rPr lang="en-US" altLang="ja-JP" dirty="0"/>
+              <a:t>next</a:t>
+            </a:r>
+            <a:r>
+              <a:rPr lang="ja-JP" altLang="en-US" dirty="0"/>
+              <a:t>プロパティに入れる処理とわかる</a:t>
+            </a:r>
+            <a:endParaRPr lang="en-US" altLang="ja-JP" dirty="0"/>
           </a:p>
           <a:p>
             <a:pPr lvl="1"/>
@@ -4357,6 +11502,34 @@
           </a:p>
         </p:txBody>
       </p:sp>
+      <p:graphicFrame>
+        <p:nvGraphicFramePr>
+          <p:cNvPr id="6" name="図表 5">
+            <a:extLst>
+              <a:ext uri="{FF2B5EF4-FFF2-40B4-BE49-F238E27FC236}">
+                <a16:creationId xmlns:a16="http://schemas.microsoft.com/office/drawing/2014/main" id="{0A80708C-0B3C-101F-823D-A990294D51B5}"/>
+              </a:ext>
+            </a:extLst>
+          </p:cNvPr>
+          <p:cNvGraphicFramePr/>
+          <p:nvPr>
+            <p:extLst>
+              <p:ext uri="{D42A27DB-BD31-4B8C-83A1-F6EECF244321}">
+                <p14:modId xmlns:p14="http://schemas.microsoft.com/office/powerpoint/2010/main" val="1502380142"/>
+              </p:ext>
+            </p:extLst>
+          </p:nvPr>
+        </p:nvGraphicFramePr>
+        <p:xfrm>
+          <a:off x="2907846" y="4537151"/>
+          <a:ext cx="6376308" cy="1639812"/>
+        </p:xfrm>
+        <a:graphic>
+          <a:graphicData uri="http://schemas.openxmlformats.org/drawingml/2006/diagram">
+            <dgm:relIds xmlns:dgm="http://schemas.openxmlformats.org/drawingml/2006/diagram" xmlns:r="http://schemas.openxmlformats.org/officeDocument/2006/relationships" r:dm="rId2" r:lo="rId3" r:qs="rId4" r:cs="rId5"/>
+          </a:graphicData>
+        </a:graphic>
+      </p:graphicFrame>
     </p:spTree>
     <p:extLst>
       <p:ext uri="{BB962C8B-B14F-4D97-AF65-F5344CB8AC3E}">
